--- a/figures/fig6/fig6.pptx
+++ b/figures/fig6/fig6.pptx
@@ -9,7 +9,7 @@
   </p:notesMasterIdLst>
   <p:sldIdLst>
     <p:sldId id="257" r:id="rId2"/>
-    <p:sldId id="256" r:id="rId3"/>
+    <p:sldId id="258" r:id="rId3"/>
   </p:sldIdLst>
   <p:sldSz cx="36576000" cy="32918400"/>
   <p:notesSz cx="7010400" cy="9296400"/>
@@ -258,7 +258,7 @@
       </p15:sldGuideLst>
     </p:ext>
     <p:ext uri="http://customooxmlschemas.google.com/">
-      <go:slidesCustomData xmlns:go="http://customooxmlschemas.google.com/" xmlns:ahyp="http://schemas.microsoft.com/office/drawing/2018/hyperlinkcolor" xmlns:p15="http://schemas.microsoft.com/office/powerpoint/2012/main" xmlns:p14="http://schemas.microsoft.com/office/powerpoint/2010/main" xmlns:com="http://schemas.openxmlformats.org/drawingml/2006/compatibility" xmlns:pvml="urn:schemas-microsoft-com:office:powerpoint" xmlns:v="urn:schemas-microsoft-com:vml" xmlns:o="urn:schemas-microsoft-com:office:office" xmlns:dgm="http://schemas.openxmlformats.org/drawingml/2006/diagram" xmlns:c="http://schemas.openxmlformats.org/drawingml/2006/chart" xmlns:mv="urn:schemas-microsoft-com:mac:vml" xmlns:mc="http://schemas.openxmlformats.org/markup-compatibility/2006" xmlns="" r:id="rId10" roundtripDataSignature="AMtx7mhiytGPk8UOxiAGs9KaAxakDbg4SQ=="/>
+      <go:slidesCustomData xmlns="" xmlns:mc="http://schemas.openxmlformats.org/markup-compatibility/2006" xmlns:mv="urn:schemas-microsoft-com:mac:vml" xmlns:c="http://schemas.openxmlformats.org/drawingml/2006/chart" xmlns:dgm="http://schemas.openxmlformats.org/drawingml/2006/diagram" xmlns:o="urn:schemas-microsoft-com:office:office" xmlns:v="urn:schemas-microsoft-com:vml" xmlns:pvml="urn:schemas-microsoft-com:office:powerpoint" xmlns:com="http://schemas.openxmlformats.org/drawingml/2006/compatibility" xmlns:p14="http://schemas.microsoft.com/office/powerpoint/2010/main" xmlns:p15="http://schemas.microsoft.com/office/powerpoint/2012/main" xmlns:ahyp="http://schemas.microsoft.com/office/drawing/2018/hyperlinkcolor" xmlns:go="http://customooxmlschemas.google.com/" r:id="rId10" roundtripDataSignature="AMtx7mhiytGPk8UOxiAGs9KaAxakDbg4SQ=="/>
     </p:ext>
   </p:extLst>
 </p:presentation>
@@ -1462,7 +1462,13 @@
   <p:cSld>
     <p:spTree>
       <p:nvGrpSpPr>
-        <p:cNvPr id="1" name="Shape 84"/>
+        <p:cNvPr id="1" name="Shape 84">
+          <a:extLst>
+            <a:ext uri="{FF2B5EF4-FFF2-40B4-BE49-F238E27FC236}">
+              <a16:creationId xmlns:a16="http://schemas.microsoft.com/office/drawing/2014/main" id="{45CFCE6A-9451-8C86-7CBB-1843F267BC78}"/>
+            </a:ext>
+          </a:extLst>
+        </p:cNvPr>
         <p:cNvGrpSpPr/>
         <p:nvPr/>
       </p:nvGrpSpPr>
@@ -1476,7 +1482,13 @@
       </p:grpSpPr>
       <p:sp>
         <p:nvSpPr>
-          <p:cNvPr id="85" name="Google Shape;85;p1:notes"/>
+          <p:cNvPr id="85" name="Google Shape;85;p1:notes">
+            <a:extLst>
+              <a:ext uri="{FF2B5EF4-FFF2-40B4-BE49-F238E27FC236}">
+                <a16:creationId xmlns:a16="http://schemas.microsoft.com/office/drawing/2014/main" id="{3072C67B-8D2F-3AAE-394F-2C43DD5AB6CE}"/>
+              </a:ext>
+            </a:extLst>
+          </p:cNvPr>
           <p:cNvSpPr>
             <a:spLocks noGrp="1" noRot="1" noChangeAspect="1"/>
           </p:cNvSpPr>
@@ -1527,7 +1539,13 @@
       </p:sp>
       <p:sp>
         <p:nvSpPr>
-          <p:cNvPr id="86" name="Google Shape;86;p1:notes"/>
+          <p:cNvPr id="86" name="Google Shape;86;p1:notes">
+            <a:extLst>
+              <a:ext uri="{FF2B5EF4-FFF2-40B4-BE49-F238E27FC236}">
+                <a16:creationId xmlns:a16="http://schemas.microsoft.com/office/drawing/2014/main" id="{D581213B-582B-A4B3-0BE5-76B971FD3DFB}"/>
+              </a:ext>
+            </a:extLst>
+          </p:cNvPr>
           <p:cNvSpPr txBox="1">
             <a:spLocks noGrp="1"/>
           </p:cNvSpPr>
@@ -1569,7 +1587,13 @@
       </p:sp>
       <p:sp>
         <p:nvSpPr>
-          <p:cNvPr id="87" name="Google Shape;87;p1:notes"/>
+          <p:cNvPr id="87" name="Google Shape;87;p1:notes">
+            <a:extLst>
+              <a:ext uri="{FF2B5EF4-FFF2-40B4-BE49-F238E27FC236}">
+                <a16:creationId xmlns:a16="http://schemas.microsoft.com/office/drawing/2014/main" id="{D9349ABE-2577-ABC2-60A2-ED6D28F81341}"/>
+              </a:ext>
+            </a:extLst>
+          </p:cNvPr>
           <p:cNvSpPr txBox="1">
             <a:spLocks noGrp="1"/>
           </p:cNvSpPr>
@@ -1630,6 +1654,11 @@
         </p:txBody>
       </p:sp>
     </p:spTree>
+    <p:extLst>
+      <p:ext uri="{BB962C8B-B14F-4D97-AF65-F5344CB8AC3E}">
+        <p14:creationId xmlns:p14="http://schemas.microsoft.com/office/powerpoint/2010/main" val="1222357178"/>
+      </p:ext>
+    </p:extLst>
   </p:cSld>
   <p:clrMapOvr>
     <a:masterClrMapping/>
@@ -11917,10 +11946,10 @@
       </p:graphicFrame>
       <p:pic>
         <p:nvPicPr>
-          <p:cNvPr id="3" name="Graphic 2">
+          <p:cNvPr id="14" name="Graphic 13">
             <a:extLst>
               <a:ext uri="{FF2B5EF4-FFF2-40B4-BE49-F238E27FC236}">
-                <a16:creationId xmlns:a16="http://schemas.microsoft.com/office/drawing/2014/main" id="{0DC882CE-3C19-37E5-05AE-3EF5372CE09A}"/>
+                <a16:creationId xmlns:a16="http://schemas.microsoft.com/office/drawing/2014/main" id="{EB750F53-BB08-54A3-65D0-AD2A42FC9AD9}"/>
               </a:ext>
             </a:extLst>
           </p:cNvPr>
@@ -11937,15 +11966,15 @@
               </a:ext>
             </a:extLst>
           </a:blip>
-          <a:srcRect r="8572"/>
+          <a:srcRect l="7177" r="10080"/>
           <a:stretch>
             <a:fillRect/>
           </a:stretch>
         </p:blipFill>
         <p:spPr>
           <a:xfrm>
-            <a:off x="0" y="7244162"/>
-            <a:ext cx="33440914" cy="18430075"/>
+            <a:off x="2625213" y="10090161"/>
+            <a:ext cx="30263690" cy="12738077"/>
           </a:xfrm>
           <a:prstGeom prst="rect">
             <a:avLst/>
@@ -11978,7 +12007,13 @@
     </p:bg>
     <p:spTree>
       <p:nvGrpSpPr>
-        <p:cNvPr id="1" name="Shape 88"/>
+        <p:cNvPr id="1" name="Shape 88">
+          <a:extLst>
+            <a:ext uri="{FF2B5EF4-FFF2-40B4-BE49-F238E27FC236}">
+              <a16:creationId xmlns:a16="http://schemas.microsoft.com/office/drawing/2014/main" id="{888707C2-3318-A9CA-E087-E746027FB9C0}"/>
+            </a:ext>
+          </a:extLst>
+        </p:cNvPr>
         <p:cNvGrpSpPr/>
         <p:nvPr/>
       </p:nvGrpSpPr>
@@ -11992,10 +12027,10 @@
       </p:grpSpPr>
       <p:pic>
         <p:nvPicPr>
-          <p:cNvPr id="19" name="Picture 18">
+          <p:cNvPr id="153" name="Picture 152">
             <a:extLst>
               <a:ext uri="{FF2B5EF4-FFF2-40B4-BE49-F238E27FC236}">
-                <a16:creationId xmlns:a16="http://schemas.microsoft.com/office/drawing/2014/main" id="{E21E2108-F9AF-23EA-73C2-763D91858333}"/>
+                <a16:creationId xmlns:a16="http://schemas.microsoft.com/office/drawing/2014/main" id="{E924589F-BEE0-7847-629E-44909FBDECBD}"/>
               </a:ext>
             </a:extLst>
           </p:cNvPr>
@@ -12006,15 +12041,15 @@
         </p:nvPicPr>
         <p:blipFill>
           <a:blip r:embed="rId3"/>
-          <a:srcRect l="7372" t="14110" r="16310" b="24801"/>
+          <a:srcRect l="11009" t="13366" r="24228" b="21763"/>
           <a:stretch>
             <a:fillRect/>
           </a:stretch>
         </p:blipFill>
         <p:spPr>
           <a:xfrm>
-            <a:off x="13230792" y="15289530"/>
-            <a:ext cx="8371907" cy="2226945"/>
+            <a:off x="7596741" y="14309131"/>
+            <a:ext cx="4743402" cy="2364826"/>
           </a:xfrm>
           <a:prstGeom prst="rect">
             <a:avLst/>
@@ -12023,10 +12058,10 @@
       </p:pic>
       <p:pic>
         <p:nvPicPr>
-          <p:cNvPr id="21" name="Picture 20">
+          <p:cNvPr id="155" name="Picture 154">
             <a:extLst>
               <a:ext uri="{FF2B5EF4-FFF2-40B4-BE49-F238E27FC236}">
-                <a16:creationId xmlns:a16="http://schemas.microsoft.com/office/drawing/2014/main" id="{5FDF14D7-01A8-8416-FD6D-33FEBC4DC717}"/>
+                <a16:creationId xmlns:a16="http://schemas.microsoft.com/office/drawing/2014/main" id="{EF4121B5-3F06-3233-812C-BE22CEB9956D}"/>
               </a:ext>
             </a:extLst>
           </p:cNvPr>
@@ -12037,15 +12072,15 @@
         </p:nvPicPr>
         <p:blipFill>
           <a:blip r:embed="rId4"/>
-          <a:srcRect l="7372" t="14109" r="16310" b="24802"/>
+          <a:srcRect l="11033" t="14256" r="24637" b="20873"/>
           <a:stretch>
             <a:fillRect/>
           </a:stretch>
         </p:blipFill>
         <p:spPr>
           <a:xfrm>
-            <a:off x="13230792" y="17821465"/>
-            <a:ext cx="8371908" cy="2226945"/>
+            <a:off x="13183335" y="14339973"/>
+            <a:ext cx="4711741" cy="2364826"/>
           </a:xfrm>
           <a:prstGeom prst="rect">
             <a:avLst/>
@@ -12054,10 +12089,10 @@
       </p:pic>
       <p:pic>
         <p:nvPicPr>
-          <p:cNvPr id="23" name="Picture 22">
+          <p:cNvPr id="157" name="Picture 156">
             <a:extLst>
               <a:ext uri="{FF2B5EF4-FFF2-40B4-BE49-F238E27FC236}">
-                <a16:creationId xmlns:a16="http://schemas.microsoft.com/office/drawing/2014/main" id="{4ED9B0DD-13C3-AFED-E019-E6D3E3778B23}"/>
+                <a16:creationId xmlns:a16="http://schemas.microsoft.com/office/drawing/2014/main" id="{28B9251D-1C65-944C-38F5-1B496BB423E4}"/>
               </a:ext>
             </a:extLst>
           </p:cNvPr>
@@ -12068,15 +12103,15 @@
         </p:nvPicPr>
         <p:blipFill>
           <a:blip r:embed="rId5"/>
-          <a:srcRect l="7372" t="14109" r="16310" b="15291"/>
+          <a:srcRect l="11032" t="14265" r="24174" b="20891"/>
           <a:stretch>
             <a:fillRect/>
           </a:stretch>
         </p:blipFill>
         <p:spPr>
           <a:xfrm>
-            <a:off x="13230792" y="20353400"/>
-            <a:ext cx="8371908" cy="2573655"/>
+            <a:off x="13183335" y="17454855"/>
+            <a:ext cx="4745695" cy="2363844"/>
           </a:xfrm>
           <a:prstGeom prst="rect">
             <a:avLst/>
@@ -12085,10 +12120,10 @@
       </p:pic>
       <p:pic>
         <p:nvPicPr>
-          <p:cNvPr id="24" name="Picture 23">
+          <p:cNvPr id="159" name="Picture 158">
             <a:extLst>
               <a:ext uri="{FF2B5EF4-FFF2-40B4-BE49-F238E27FC236}">
-                <a16:creationId xmlns:a16="http://schemas.microsoft.com/office/drawing/2014/main" id="{67C7C369-796E-17DF-99D1-071268B77900}"/>
+                <a16:creationId xmlns:a16="http://schemas.microsoft.com/office/drawing/2014/main" id="{549BE2EB-98EE-ADC3-BADB-D736E57D32AD}"/>
               </a:ext>
             </a:extLst>
           </p:cNvPr>
@@ -12098,28 +12133,1661 @@
           <p:nvPr/>
         </p:nvPicPr>
         <p:blipFill>
-          <a:blip r:embed="rId3"/>
-          <a:srcRect l="86355" t="21359" r="3416" b="61998"/>
+          <a:blip r:embed="rId6"/>
+          <a:srcRect l="11010" t="14222" r="24390" b="20906"/>
           <a:stretch>
             <a:fillRect/>
           </a:stretch>
         </p:blipFill>
         <p:spPr>
           <a:xfrm>
-            <a:off x="22005097" y="15553800"/>
-            <a:ext cx="2882502" cy="1558564"/>
+            <a:off x="7596741" y="17454855"/>
+            <a:ext cx="4731495" cy="2364826"/>
           </a:xfrm>
           <a:prstGeom prst="rect">
             <a:avLst/>
           </a:prstGeom>
         </p:spPr>
       </p:pic>
+      <p:sp>
+        <p:nvSpPr>
+          <p:cNvPr id="20" name="TextBox 19">
+            <a:extLst>
+              <a:ext uri="{FF2B5EF4-FFF2-40B4-BE49-F238E27FC236}">
+                <a16:creationId xmlns:a16="http://schemas.microsoft.com/office/drawing/2014/main" id="{2F2EA852-FACC-800C-4A89-E45C5B32CFD2}"/>
+              </a:ext>
+            </a:extLst>
+          </p:cNvPr>
+          <p:cNvSpPr txBox="1"/>
+          <p:nvPr/>
+        </p:nvSpPr>
+        <p:spPr>
+          <a:xfrm>
+            <a:off x="3808483" y="15157644"/>
+            <a:ext cx="3178103" cy="400110"/>
+          </a:xfrm>
+          <a:prstGeom prst="rect">
+            <a:avLst/>
+          </a:prstGeom>
+          <a:noFill/>
+        </p:spPr>
+        <p:txBody>
+          <a:bodyPr wrap="square" rtlCol="0">
+            <a:spAutoFit/>
+          </a:bodyPr>
+          <a:lstStyle/>
+          <a:p>
+            <a:pPr algn="r"/>
+            <a:r>
+              <a:rPr lang="en-US" sz="2000" dirty="0"/>
+              <a:t>Sign-aligned </a:t>
+            </a:r>
+            <a:r>
+              <a:rPr lang="el-GR" sz="2000" dirty="0"/>
+              <a:t>β</a:t>
+            </a:r>
+            <a:r>
+              <a:rPr lang="en-US" sz="2000" dirty="0"/>
+              <a:t> </a:t>
+            </a:r>
+          </a:p>
+        </p:txBody>
+      </p:sp>
+      <p:sp>
+        <p:nvSpPr>
+          <p:cNvPr id="82" name="TextBox 81">
+            <a:extLst>
+              <a:ext uri="{FF2B5EF4-FFF2-40B4-BE49-F238E27FC236}">
+                <a16:creationId xmlns:a16="http://schemas.microsoft.com/office/drawing/2014/main" id="{3A20B51A-108D-838D-8A37-4F68A113ABBA}"/>
+              </a:ext>
+            </a:extLst>
+          </p:cNvPr>
+          <p:cNvSpPr txBox="1"/>
+          <p:nvPr/>
+        </p:nvSpPr>
+        <p:spPr>
+          <a:xfrm>
+            <a:off x="12573179" y="14934157"/>
+            <a:ext cx="610163" cy="353943"/>
+          </a:xfrm>
+          <a:prstGeom prst="rect">
+            <a:avLst/>
+          </a:prstGeom>
+          <a:noFill/>
+        </p:spPr>
+        <p:txBody>
+          <a:bodyPr wrap="square" rtlCol="0">
+            <a:spAutoFit/>
+          </a:bodyPr>
+          <a:lstStyle/>
+          <a:p>
+            <a:pPr algn="r"/>
+            <a:r>
+              <a:rPr lang="en-US" sz="1700" dirty="0"/>
+              <a:t>0.5</a:t>
+            </a:r>
+          </a:p>
+        </p:txBody>
+      </p:sp>
+      <p:sp>
+        <p:nvSpPr>
+          <p:cNvPr id="22" name="TextBox 21">
+            <a:extLst>
+              <a:ext uri="{FF2B5EF4-FFF2-40B4-BE49-F238E27FC236}">
+                <a16:creationId xmlns:a16="http://schemas.microsoft.com/office/drawing/2014/main" id="{B2377443-FA5A-3B21-56E3-113829CA37C9}"/>
+              </a:ext>
+            </a:extLst>
+          </p:cNvPr>
+          <p:cNvSpPr txBox="1"/>
+          <p:nvPr/>
+        </p:nvSpPr>
+        <p:spPr>
+          <a:xfrm>
+            <a:off x="6986588" y="14391323"/>
+            <a:ext cx="610163" cy="353943"/>
+          </a:xfrm>
+          <a:prstGeom prst="rect">
+            <a:avLst/>
+          </a:prstGeom>
+          <a:noFill/>
+        </p:spPr>
+        <p:txBody>
+          <a:bodyPr wrap="square" rtlCol="0">
+            <a:spAutoFit/>
+          </a:bodyPr>
+          <a:lstStyle/>
+          <a:p>
+            <a:pPr algn="r"/>
+            <a:r>
+              <a:rPr lang="en-US" sz="1700" dirty="0"/>
+              <a:t>1.5</a:t>
+            </a:r>
+          </a:p>
+        </p:txBody>
+      </p:sp>
+      <p:sp>
+        <p:nvSpPr>
+          <p:cNvPr id="27" name="TextBox 26">
+            <a:extLst>
+              <a:ext uri="{FF2B5EF4-FFF2-40B4-BE49-F238E27FC236}">
+                <a16:creationId xmlns:a16="http://schemas.microsoft.com/office/drawing/2014/main" id="{24F791D7-178E-4AD7-026F-5C3E2EDA136D}"/>
+              </a:ext>
+            </a:extLst>
+          </p:cNvPr>
+          <p:cNvSpPr txBox="1"/>
+          <p:nvPr/>
+        </p:nvSpPr>
+        <p:spPr>
+          <a:xfrm>
+            <a:off x="6986588" y="14931776"/>
+            <a:ext cx="610163" cy="353943"/>
+          </a:xfrm>
+          <a:prstGeom prst="rect">
+            <a:avLst/>
+          </a:prstGeom>
+          <a:noFill/>
+        </p:spPr>
+        <p:txBody>
+          <a:bodyPr wrap="square" rtlCol="0">
+            <a:spAutoFit/>
+          </a:bodyPr>
+          <a:lstStyle/>
+          <a:p>
+            <a:pPr algn="r"/>
+            <a:r>
+              <a:rPr lang="en-US" sz="1700" dirty="0"/>
+              <a:t>1</a:t>
+            </a:r>
+          </a:p>
+        </p:txBody>
+      </p:sp>
+      <p:sp>
+        <p:nvSpPr>
+          <p:cNvPr id="28" name="TextBox 27">
+            <a:extLst>
+              <a:ext uri="{FF2B5EF4-FFF2-40B4-BE49-F238E27FC236}">
+                <a16:creationId xmlns:a16="http://schemas.microsoft.com/office/drawing/2014/main" id="{FE004D9D-D8D8-9DE9-2684-1F0613C8AF3D}"/>
+              </a:ext>
+            </a:extLst>
+          </p:cNvPr>
+          <p:cNvSpPr txBox="1"/>
+          <p:nvPr/>
+        </p:nvSpPr>
+        <p:spPr>
+          <a:xfrm>
+            <a:off x="6986587" y="15472569"/>
+            <a:ext cx="610163" cy="353943"/>
+          </a:xfrm>
+          <a:prstGeom prst="rect">
+            <a:avLst/>
+          </a:prstGeom>
+          <a:noFill/>
+        </p:spPr>
+        <p:txBody>
+          <a:bodyPr wrap="square" rtlCol="0">
+            <a:spAutoFit/>
+          </a:bodyPr>
+          <a:lstStyle/>
+          <a:p>
+            <a:pPr algn="r"/>
+            <a:r>
+              <a:rPr lang="en-US" sz="1700" dirty="0"/>
+              <a:t>0.5</a:t>
+            </a:r>
+          </a:p>
+        </p:txBody>
+      </p:sp>
+      <p:sp>
+        <p:nvSpPr>
+          <p:cNvPr id="29" name="TextBox 28">
+            <a:extLst>
+              <a:ext uri="{FF2B5EF4-FFF2-40B4-BE49-F238E27FC236}">
+                <a16:creationId xmlns:a16="http://schemas.microsoft.com/office/drawing/2014/main" id="{5A6264A1-431A-69E2-CF50-96B767CFE2D8}"/>
+              </a:ext>
+            </a:extLst>
+          </p:cNvPr>
+          <p:cNvSpPr txBox="1"/>
+          <p:nvPr/>
+        </p:nvSpPr>
+        <p:spPr>
+          <a:xfrm>
+            <a:off x="6986589" y="16013113"/>
+            <a:ext cx="610163" cy="353943"/>
+          </a:xfrm>
+          <a:prstGeom prst="rect">
+            <a:avLst/>
+          </a:prstGeom>
+          <a:noFill/>
+        </p:spPr>
+        <p:txBody>
+          <a:bodyPr wrap="square" rtlCol="0">
+            <a:spAutoFit/>
+          </a:bodyPr>
+          <a:lstStyle/>
+          <a:p>
+            <a:pPr algn="r"/>
+            <a:r>
+              <a:rPr lang="en-US" sz="1700" dirty="0"/>
+              <a:t>0</a:t>
+            </a:r>
+          </a:p>
+        </p:txBody>
+      </p:sp>
+      <p:sp>
+        <p:nvSpPr>
+          <p:cNvPr id="33" name="TextBox 32">
+            <a:extLst>
+              <a:ext uri="{FF2B5EF4-FFF2-40B4-BE49-F238E27FC236}">
+                <a16:creationId xmlns:a16="http://schemas.microsoft.com/office/drawing/2014/main" id="{9D3036E3-F38E-42CA-6838-4810968CC4D1}"/>
+              </a:ext>
+            </a:extLst>
+          </p:cNvPr>
+          <p:cNvSpPr txBox="1"/>
+          <p:nvPr/>
+        </p:nvSpPr>
+        <p:spPr>
+          <a:xfrm>
+            <a:off x="6986590" y="17463294"/>
+            <a:ext cx="610163" cy="353943"/>
+          </a:xfrm>
+          <a:prstGeom prst="rect">
+            <a:avLst/>
+          </a:prstGeom>
+          <a:noFill/>
+        </p:spPr>
+        <p:txBody>
+          <a:bodyPr wrap="square" rtlCol="0">
+            <a:spAutoFit/>
+          </a:bodyPr>
+          <a:lstStyle/>
+          <a:p>
+            <a:pPr algn="r"/>
+            <a:r>
+              <a:rPr lang="en-US" sz="1700" dirty="0"/>
+              <a:t>0.8</a:t>
+            </a:r>
+          </a:p>
+        </p:txBody>
+      </p:sp>
+      <p:sp>
+        <p:nvSpPr>
+          <p:cNvPr id="34" name="TextBox 33">
+            <a:extLst>
+              <a:ext uri="{FF2B5EF4-FFF2-40B4-BE49-F238E27FC236}">
+                <a16:creationId xmlns:a16="http://schemas.microsoft.com/office/drawing/2014/main" id="{471E1563-E2D1-9D4D-75E4-8B7428CEC032}"/>
+              </a:ext>
+            </a:extLst>
+          </p:cNvPr>
+          <p:cNvSpPr txBox="1"/>
+          <p:nvPr/>
+        </p:nvSpPr>
+        <p:spPr>
+          <a:xfrm>
+            <a:off x="6986590" y="17892130"/>
+            <a:ext cx="610163" cy="353943"/>
+          </a:xfrm>
+          <a:prstGeom prst="rect">
+            <a:avLst/>
+          </a:prstGeom>
+          <a:noFill/>
+        </p:spPr>
+        <p:txBody>
+          <a:bodyPr wrap="square" rtlCol="0">
+            <a:spAutoFit/>
+          </a:bodyPr>
+          <a:lstStyle/>
+          <a:p>
+            <a:pPr algn="r"/>
+            <a:r>
+              <a:rPr lang="en-US" sz="1700" dirty="0"/>
+              <a:t>0.6</a:t>
+            </a:r>
+          </a:p>
+        </p:txBody>
+      </p:sp>
+      <p:sp>
+        <p:nvSpPr>
+          <p:cNvPr id="35" name="TextBox 34">
+            <a:extLst>
+              <a:ext uri="{FF2B5EF4-FFF2-40B4-BE49-F238E27FC236}">
+                <a16:creationId xmlns:a16="http://schemas.microsoft.com/office/drawing/2014/main" id="{060C52B8-0EEA-6FE1-43C5-89D9C32443C1}"/>
+              </a:ext>
+            </a:extLst>
+          </p:cNvPr>
+          <p:cNvSpPr txBox="1"/>
+          <p:nvPr/>
+        </p:nvSpPr>
+        <p:spPr>
+          <a:xfrm>
+            <a:off x="6986592" y="18323136"/>
+            <a:ext cx="610163" cy="353943"/>
+          </a:xfrm>
+          <a:prstGeom prst="rect">
+            <a:avLst/>
+          </a:prstGeom>
+          <a:noFill/>
+        </p:spPr>
+        <p:txBody>
+          <a:bodyPr wrap="square" rtlCol="0">
+            <a:spAutoFit/>
+          </a:bodyPr>
+          <a:lstStyle/>
+          <a:p>
+            <a:pPr algn="r"/>
+            <a:r>
+              <a:rPr lang="en-US" sz="1700" dirty="0"/>
+              <a:t>0.4</a:t>
+            </a:r>
+          </a:p>
+        </p:txBody>
+      </p:sp>
+      <p:sp>
+        <p:nvSpPr>
+          <p:cNvPr id="40" name="TextBox 39">
+            <a:extLst>
+              <a:ext uri="{FF2B5EF4-FFF2-40B4-BE49-F238E27FC236}">
+                <a16:creationId xmlns:a16="http://schemas.microsoft.com/office/drawing/2014/main" id="{F8712D38-3D4C-C2B8-FF52-8AF53D81F801}"/>
+              </a:ext>
+            </a:extLst>
+          </p:cNvPr>
+          <p:cNvSpPr txBox="1"/>
+          <p:nvPr/>
+        </p:nvSpPr>
+        <p:spPr>
+          <a:xfrm>
+            <a:off x="6986591" y="18755797"/>
+            <a:ext cx="610163" cy="353943"/>
+          </a:xfrm>
+          <a:prstGeom prst="rect">
+            <a:avLst/>
+          </a:prstGeom>
+          <a:noFill/>
+        </p:spPr>
+        <p:txBody>
+          <a:bodyPr wrap="square" rtlCol="0">
+            <a:spAutoFit/>
+          </a:bodyPr>
+          <a:lstStyle/>
+          <a:p>
+            <a:pPr algn="r"/>
+            <a:r>
+              <a:rPr lang="en-US" sz="1700" dirty="0"/>
+              <a:t>0.2</a:t>
+            </a:r>
+          </a:p>
+        </p:txBody>
+      </p:sp>
+      <p:sp>
+        <p:nvSpPr>
+          <p:cNvPr id="41" name="TextBox 40">
+            <a:extLst>
+              <a:ext uri="{FF2B5EF4-FFF2-40B4-BE49-F238E27FC236}">
+                <a16:creationId xmlns:a16="http://schemas.microsoft.com/office/drawing/2014/main" id="{3D6A42BA-85D2-0010-D74F-52337FD5F058}"/>
+              </a:ext>
+            </a:extLst>
+          </p:cNvPr>
+          <p:cNvSpPr txBox="1"/>
+          <p:nvPr/>
+        </p:nvSpPr>
+        <p:spPr>
+          <a:xfrm>
+            <a:off x="6986586" y="19185359"/>
+            <a:ext cx="610163" cy="353943"/>
+          </a:xfrm>
+          <a:prstGeom prst="rect">
+            <a:avLst/>
+          </a:prstGeom>
+          <a:noFill/>
+        </p:spPr>
+        <p:txBody>
+          <a:bodyPr wrap="square" rtlCol="0">
+            <a:spAutoFit/>
+          </a:bodyPr>
+          <a:lstStyle/>
+          <a:p>
+            <a:pPr algn="r"/>
+            <a:r>
+              <a:rPr lang="en-US" sz="1700" dirty="0"/>
+              <a:t>0</a:t>
+            </a:r>
+          </a:p>
+        </p:txBody>
+      </p:sp>
+      <p:sp>
+        <p:nvSpPr>
+          <p:cNvPr id="42" name="TextBox 41">
+            <a:extLst>
+              <a:ext uri="{FF2B5EF4-FFF2-40B4-BE49-F238E27FC236}">
+                <a16:creationId xmlns:a16="http://schemas.microsoft.com/office/drawing/2014/main" id="{58E54E5A-42BA-961A-3269-7B3F9C2E808C}"/>
+              </a:ext>
+            </a:extLst>
+          </p:cNvPr>
+          <p:cNvSpPr txBox="1"/>
+          <p:nvPr/>
+        </p:nvSpPr>
+        <p:spPr>
+          <a:xfrm>
+            <a:off x="7667626" y="19785437"/>
+            <a:ext cx="409575" cy="353943"/>
+          </a:xfrm>
+          <a:prstGeom prst="rect">
+            <a:avLst/>
+          </a:prstGeom>
+          <a:noFill/>
+        </p:spPr>
+        <p:txBody>
+          <a:bodyPr wrap="square" rtlCol="0">
+            <a:spAutoFit/>
+          </a:bodyPr>
+          <a:lstStyle/>
+          <a:p>
+            <a:pPr algn="ctr"/>
+            <a:r>
+              <a:rPr lang="en-US" sz="1700" dirty="0"/>
+              <a:t>2</a:t>
+            </a:r>
+          </a:p>
+        </p:txBody>
+      </p:sp>
+      <p:sp>
+        <p:nvSpPr>
+          <p:cNvPr id="43" name="TextBox 42">
+            <a:extLst>
+              <a:ext uri="{FF2B5EF4-FFF2-40B4-BE49-F238E27FC236}">
+                <a16:creationId xmlns:a16="http://schemas.microsoft.com/office/drawing/2014/main" id="{A0AA1698-EF4A-0068-DF0A-F1EAB2FCF439}"/>
+              </a:ext>
+            </a:extLst>
+          </p:cNvPr>
+          <p:cNvSpPr txBox="1"/>
+          <p:nvPr/>
+        </p:nvSpPr>
+        <p:spPr>
+          <a:xfrm>
+            <a:off x="8139114" y="19785437"/>
+            <a:ext cx="409575" cy="353943"/>
+          </a:xfrm>
+          <a:prstGeom prst="rect">
+            <a:avLst/>
+          </a:prstGeom>
+          <a:noFill/>
+        </p:spPr>
+        <p:txBody>
+          <a:bodyPr wrap="square" rtlCol="0">
+            <a:spAutoFit/>
+          </a:bodyPr>
+          <a:lstStyle/>
+          <a:p>
+            <a:pPr algn="ctr"/>
+            <a:r>
+              <a:rPr lang="en-US" sz="1700" dirty="0"/>
+              <a:t>4</a:t>
+            </a:r>
+          </a:p>
+        </p:txBody>
+      </p:sp>
+      <p:sp>
+        <p:nvSpPr>
+          <p:cNvPr id="44" name="TextBox 43">
+            <a:extLst>
+              <a:ext uri="{FF2B5EF4-FFF2-40B4-BE49-F238E27FC236}">
+                <a16:creationId xmlns:a16="http://schemas.microsoft.com/office/drawing/2014/main" id="{DF32341A-CC33-D9AD-8D4A-89E32BE78EC2}"/>
+              </a:ext>
+            </a:extLst>
+          </p:cNvPr>
+          <p:cNvSpPr txBox="1"/>
+          <p:nvPr/>
+        </p:nvSpPr>
+        <p:spPr>
+          <a:xfrm>
+            <a:off x="8610602" y="19785437"/>
+            <a:ext cx="409575" cy="353943"/>
+          </a:xfrm>
+          <a:prstGeom prst="rect">
+            <a:avLst/>
+          </a:prstGeom>
+          <a:noFill/>
+        </p:spPr>
+        <p:txBody>
+          <a:bodyPr wrap="square" rtlCol="0">
+            <a:spAutoFit/>
+          </a:bodyPr>
+          <a:lstStyle/>
+          <a:p>
+            <a:pPr algn="ctr"/>
+            <a:r>
+              <a:rPr lang="en-US" sz="1700" dirty="0"/>
+              <a:t>6</a:t>
+            </a:r>
+          </a:p>
+        </p:txBody>
+      </p:sp>
+      <p:sp>
+        <p:nvSpPr>
+          <p:cNvPr id="45" name="TextBox 44">
+            <a:extLst>
+              <a:ext uri="{FF2B5EF4-FFF2-40B4-BE49-F238E27FC236}">
+                <a16:creationId xmlns:a16="http://schemas.microsoft.com/office/drawing/2014/main" id="{A88F19DA-CEEB-CB24-C0E1-8208BA61A3ED}"/>
+              </a:ext>
+            </a:extLst>
+          </p:cNvPr>
+          <p:cNvSpPr txBox="1"/>
+          <p:nvPr/>
+        </p:nvSpPr>
+        <p:spPr>
+          <a:xfrm>
+            <a:off x="9084471" y="19785437"/>
+            <a:ext cx="409575" cy="353943"/>
+          </a:xfrm>
+          <a:prstGeom prst="rect">
+            <a:avLst/>
+          </a:prstGeom>
+          <a:noFill/>
+        </p:spPr>
+        <p:txBody>
+          <a:bodyPr wrap="square" rtlCol="0">
+            <a:spAutoFit/>
+          </a:bodyPr>
+          <a:lstStyle/>
+          <a:p>
+            <a:pPr algn="ctr"/>
+            <a:r>
+              <a:rPr lang="en-US" sz="1700" dirty="0"/>
+              <a:t>8</a:t>
+            </a:r>
+          </a:p>
+        </p:txBody>
+      </p:sp>
+      <p:sp>
+        <p:nvSpPr>
+          <p:cNvPr id="46" name="TextBox 45">
+            <a:extLst>
+              <a:ext uri="{FF2B5EF4-FFF2-40B4-BE49-F238E27FC236}">
+                <a16:creationId xmlns:a16="http://schemas.microsoft.com/office/drawing/2014/main" id="{75FBE407-9526-1888-A0DF-2A41E0556D7A}"/>
+              </a:ext>
+            </a:extLst>
+          </p:cNvPr>
+          <p:cNvSpPr txBox="1"/>
+          <p:nvPr/>
+        </p:nvSpPr>
+        <p:spPr>
+          <a:xfrm>
+            <a:off x="9535989" y="19785437"/>
+            <a:ext cx="448592" cy="353943"/>
+          </a:xfrm>
+          <a:prstGeom prst="rect">
+            <a:avLst/>
+          </a:prstGeom>
+          <a:noFill/>
+        </p:spPr>
+        <p:txBody>
+          <a:bodyPr wrap="square" rtlCol="0">
+            <a:spAutoFit/>
+          </a:bodyPr>
+          <a:lstStyle/>
+          <a:p>
+            <a:pPr algn="ctr"/>
+            <a:r>
+              <a:rPr lang="en-US" sz="1700" dirty="0"/>
+              <a:t>10</a:t>
+            </a:r>
+          </a:p>
+        </p:txBody>
+      </p:sp>
+      <p:sp>
+        <p:nvSpPr>
+          <p:cNvPr id="47" name="TextBox 46">
+            <a:extLst>
+              <a:ext uri="{FF2B5EF4-FFF2-40B4-BE49-F238E27FC236}">
+                <a16:creationId xmlns:a16="http://schemas.microsoft.com/office/drawing/2014/main" id="{B913B91D-B99D-C05F-0BAD-48CD345A016C}"/>
+              </a:ext>
+            </a:extLst>
+          </p:cNvPr>
+          <p:cNvSpPr txBox="1"/>
+          <p:nvPr/>
+        </p:nvSpPr>
+        <p:spPr>
+          <a:xfrm>
+            <a:off x="10007476" y="19785437"/>
+            <a:ext cx="448592" cy="353943"/>
+          </a:xfrm>
+          <a:prstGeom prst="rect">
+            <a:avLst/>
+          </a:prstGeom>
+          <a:noFill/>
+        </p:spPr>
+        <p:txBody>
+          <a:bodyPr wrap="square" rtlCol="0">
+            <a:spAutoFit/>
+          </a:bodyPr>
+          <a:lstStyle/>
+          <a:p>
+            <a:pPr algn="ctr"/>
+            <a:r>
+              <a:rPr lang="en-US" sz="1700" dirty="0"/>
+              <a:t>12</a:t>
+            </a:r>
+          </a:p>
+        </p:txBody>
+      </p:sp>
+      <p:sp>
+        <p:nvSpPr>
+          <p:cNvPr id="48" name="TextBox 47">
+            <a:extLst>
+              <a:ext uri="{FF2B5EF4-FFF2-40B4-BE49-F238E27FC236}">
+                <a16:creationId xmlns:a16="http://schemas.microsoft.com/office/drawing/2014/main" id="{4CCFB58B-B2D9-E620-BE98-4626FD49553B}"/>
+              </a:ext>
+            </a:extLst>
+          </p:cNvPr>
+          <p:cNvSpPr txBox="1"/>
+          <p:nvPr/>
+        </p:nvSpPr>
+        <p:spPr>
+          <a:xfrm>
+            <a:off x="10478963" y="19785437"/>
+            <a:ext cx="448592" cy="353943"/>
+          </a:xfrm>
+          <a:prstGeom prst="rect">
+            <a:avLst/>
+          </a:prstGeom>
+          <a:noFill/>
+        </p:spPr>
+        <p:txBody>
+          <a:bodyPr wrap="square" rtlCol="0">
+            <a:spAutoFit/>
+          </a:bodyPr>
+          <a:lstStyle/>
+          <a:p>
+            <a:pPr algn="ctr"/>
+            <a:r>
+              <a:rPr lang="en-US" sz="1700" dirty="0"/>
+              <a:t>14</a:t>
+            </a:r>
+          </a:p>
+        </p:txBody>
+      </p:sp>
+      <p:sp>
+        <p:nvSpPr>
+          <p:cNvPr id="49" name="TextBox 48">
+            <a:extLst>
+              <a:ext uri="{FF2B5EF4-FFF2-40B4-BE49-F238E27FC236}">
+                <a16:creationId xmlns:a16="http://schemas.microsoft.com/office/drawing/2014/main" id="{F61746E6-58B0-4625-D634-6615C4A163BF}"/>
+              </a:ext>
+            </a:extLst>
+          </p:cNvPr>
+          <p:cNvSpPr txBox="1"/>
+          <p:nvPr/>
+        </p:nvSpPr>
+        <p:spPr>
+          <a:xfrm>
+            <a:off x="10949992" y="19785306"/>
+            <a:ext cx="448592" cy="353943"/>
+          </a:xfrm>
+          <a:prstGeom prst="rect">
+            <a:avLst/>
+          </a:prstGeom>
+          <a:noFill/>
+        </p:spPr>
+        <p:txBody>
+          <a:bodyPr wrap="square" rtlCol="0">
+            <a:spAutoFit/>
+          </a:bodyPr>
+          <a:lstStyle/>
+          <a:p>
+            <a:pPr algn="ctr"/>
+            <a:r>
+              <a:rPr lang="en-US" sz="1700" dirty="0"/>
+              <a:t>16</a:t>
+            </a:r>
+          </a:p>
+        </p:txBody>
+      </p:sp>
+      <p:sp>
+        <p:nvSpPr>
+          <p:cNvPr id="50" name="TextBox 49">
+            <a:extLst>
+              <a:ext uri="{FF2B5EF4-FFF2-40B4-BE49-F238E27FC236}">
+                <a16:creationId xmlns:a16="http://schemas.microsoft.com/office/drawing/2014/main" id="{2320AA32-611B-013F-2D95-6605F91767B2}"/>
+              </a:ext>
+            </a:extLst>
+          </p:cNvPr>
+          <p:cNvSpPr txBox="1"/>
+          <p:nvPr/>
+        </p:nvSpPr>
+        <p:spPr>
+          <a:xfrm>
+            <a:off x="11420518" y="19785306"/>
+            <a:ext cx="448592" cy="353943"/>
+          </a:xfrm>
+          <a:prstGeom prst="rect">
+            <a:avLst/>
+          </a:prstGeom>
+          <a:noFill/>
+        </p:spPr>
+        <p:txBody>
+          <a:bodyPr wrap="square" rtlCol="0">
+            <a:spAutoFit/>
+          </a:bodyPr>
+          <a:lstStyle/>
+          <a:p>
+            <a:pPr algn="ctr"/>
+            <a:r>
+              <a:rPr lang="en-US" sz="1700" dirty="0"/>
+              <a:t>18</a:t>
+            </a:r>
+          </a:p>
+        </p:txBody>
+      </p:sp>
+      <p:sp>
+        <p:nvSpPr>
+          <p:cNvPr id="51" name="TextBox 50">
+            <a:extLst>
+              <a:ext uri="{FF2B5EF4-FFF2-40B4-BE49-F238E27FC236}">
+                <a16:creationId xmlns:a16="http://schemas.microsoft.com/office/drawing/2014/main" id="{40D132F6-E45E-5F45-D6AD-4E9741027D71}"/>
+              </a:ext>
+            </a:extLst>
+          </p:cNvPr>
+          <p:cNvSpPr txBox="1"/>
+          <p:nvPr/>
+        </p:nvSpPr>
+        <p:spPr>
+          <a:xfrm>
+            <a:off x="11891551" y="19785306"/>
+            <a:ext cx="448592" cy="353943"/>
+          </a:xfrm>
+          <a:prstGeom prst="rect">
+            <a:avLst/>
+          </a:prstGeom>
+          <a:noFill/>
+        </p:spPr>
+        <p:txBody>
+          <a:bodyPr wrap="square" rtlCol="0">
+            <a:spAutoFit/>
+          </a:bodyPr>
+          <a:lstStyle/>
+          <a:p>
+            <a:pPr algn="ctr"/>
+            <a:r>
+              <a:rPr lang="en-US" sz="1700" dirty="0"/>
+              <a:t>20</a:t>
+            </a:r>
+          </a:p>
+        </p:txBody>
+      </p:sp>
+      <p:sp>
+        <p:nvSpPr>
+          <p:cNvPr id="52" name="TextBox 51">
+            <a:extLst>
+              <a:ext uri="{FF2B5EF4-FFF2-40B4-BE49-F238E27FC236}">
+                <a16:creationId xmlns:a16="http://schemas.microsoft.com/office/drawing/2014/main" id="{8E77A68D-2F50-2A3B-3606-45CF3B1EF216}"/>
+              </a:ext>
+            </a:extLst>
+          </p:cNvPr>
+          <p:cNvSpPr txBox="1"/>
+          <p:nvPr/>
+        </p:nvSpPr>
+        <p:spPr>
+          <a:xfrm>
+            <a:off x="13256513" y="19785306"/>
+            <a:ext cx="409575" cy="353943"/>
+          </a:xfrm>
+          <a:prstGeom prst="rect">
+            <a:avLst/>
+          </a:prstGeom>
+          <a:noFill/>
+        </p:spPr>
+        <p:txBody>
+          <a:bodyPr wrap="square" rtlCol="0">
+            <a:spAutoFit/>
+          </a:bodyPr>
+          <a:lstStyle/>
+          <a:p>
+            <a:pPr algn="ctr"/>
+            <a:r>
+              <a:rPr lang="en-US" sz="1700" dirty="0"/>
+              <a:t>2</a:t>
+            </a:r>
+          </a:p>
+        </p:txBody>
+      </p:sp>
+      <p:sp>
+        <p:nvSpPr>
+          <p:cNvPr id="53" name="TextBox 52">
+            <a:extLst>
+              <a:ext uri="{FF2B5EF4-FFF2-40B4-BE49-F238E27FC236}">
+                <a16:creationId xmlns:a16="http://schemas.microsoft.com/office/drawing/2014/main" id="{50427FF1-00DC-B79B-96A1-197168DAAEDF}"/>
+              </a:ext>
+            </a:extLst>
+          </p:cNvPr>
+          <p:cNvSpPr txBox="1"/>
+          <p:nvPr/>
+        </p:nvSpPr>
+        <p:spPr>
+          <a:xfrm>
+            <a:off x="13728001" y="19785306"/>
+            <a:ext cx="409575" cy="353943"/>
+          </a:xfrm>
+          <a:prstGeom prst="rect">
+            <a:avLst/>
+          </a:prstGeom>
+          <a:noFill/>
+        </p:spPr>
+        <p:txBody>
+          <a:bodyPr wrap="square" rtlCol="0">
+            <a:spAutoFit/>
+          </a:bodyPr>
+          <a:lstStyle/>
+          <a:p>
+            <a:pPr algn="ctr"/>
+            <a:r>
+              <a:rPr lang="en-US" sz="1700" dirty="0"/>
+              <a:t>4</a:t>
+            </a:r>
+          </a:p>
+        </p:txBody>
+      </p:sp>
+      <p:sp>
+        <p:nvSpPr>
+          <p:cNvPr id="54" name="TextBox 53">
+            <a:extLst>
+              <a:ext uri="{FF2B5EF4-FFF2-40B4-BE49-F238E27FC236}">
+                <a16:creationId xmlns:a16="http://schemas.microsoft.com/office/drawing/2014/main" id="{246F7FF8-E5A4-596D-74A1-0A4EC80F9A8C}"/>
+              </a:ext>
+            </a:extLst>
+          </p:cNvPr>
+          <p:cNvSpPr txBox="1"/>
+          <p:nvPr/>
+        </p:nvSpPr>
+        <p:spPr>
+          <a:xfrm>
+            <a:off x="14197108" y="19785306"/>
+            <a:ext cx="409575" cy="353943"/>
+          </a:xfrm>
+          <a:prstGeom prst="rect">
+            <a:avLst/>
+          </a:prstGeom>
+          <a:noFill/>
+        </p:spPr>
+        <p:txBody>
+          <a:bodyPr wrap="square" rtlCol="0">
+            <a:spAutoFit/>
+          </a:bodyPr>
+          <a:lstStyle/>
+          <a:p>
+            <a:pPr algn="ctr"/>
+            <a:r>
+              <a:rPr lang="en-US" sz="1700" dirty="0"/>
+              <a:t>6</a:t>
+            </a:r>
+          </a:p>
+        </p:txBody>
+      </p:sp>
+      <p:sp>
+        <p:nvSpPr>
+          <p:cNvPr id="55" name="TextBox 54">
+            <a:extLst>
+              <a:ext uri="{FF2B5EF4-FFF2-40B4-BE49-F238E27FC236}">
+                <a16:creationId xmlns:a16="http://schemas.microsoft.com/office/drawing/2014/main" id="{0CC4B3A4-C8E7-703A-9C1A-C7047CD324B6}"/>
+              </a:ext>
+            </a:extLst>
+          </p:cNvPr>
+          <p:cNvSpPr txBox="1"/>
+          <p:nvPr/>
+        </p:nvSpPr>
+        <p:spPr>
+          <a:xfrm>
+            <a:off x="14670977" y="19785306"/>
+            <a:ext cx="409575" cy="353943"/>
+          </a:xfrm>
+          <a:prstGeom prst="rect">
+            <a:avLst/>
+          </a:prstGeom>
+          <a:noFill/>
+        </p:spPr>
+        <p:txBody>
+          <a:bodyPr wrap="square" rtlCol="0">
+            <a:spAutoFit/>
+          </a:bodyPr>
+          <a:lstStyle/>
+          <a:p>
+            <a:pPr algn="ctr"/>
+            <a:r>
+              <a:rPr lang="en-US" sz="1700" dirty="0"/>
+              <a:t>8</a:t>
+            </a:r>
+          </a:p>
+        </p:txBody>
+      </p:sp>
+      <p:sp>
+        <p:nvSpPr>
+          <p:cNvPr id="57" name="TextBox 56">
+            <a:extLst>
+              <a:ext uri="{FF2B5EF4-FFF2-40B4-BE49-F238E27FC236}">
+                <a16:creationId xmlns:a16="http://schemas.microsoft.com/office/drawing/2014/main" id="{42A41D43-7F03-6E08-547C-C69E4E65356A}"/>
+              </a:ext>
+            </a:extLst>
+          </p:cNvPr>
+          <p:cNvSpPr txBox="1"/>
+          <p:nvPr/>
+        </p:nvSpPr>
+        <p:spPr>
+          <a:xfrm>
+            <a:off x="15122495" y="19785306"/>
+            <a:ext cx="448592" cy="353943"/>
+          </a:xfrm>
+          <a:prstGeom prst="rect">
+            <a:avLst/>
+          </a:prstGeom>
+          <a:noFill/>
+        </p:spPr>
+        <p:txBody>
+          <a:bodyPr wrap="square" rtlCol="0">
+            <a:spAutoFit/>
+          </a:bodyPr>
+          <a:lstStyle/>
+          <a:p>
+            <a:pPr algn="ctr"/>
+            <a:r>
+              <a:rPr lang="en-US" sz="1700" dirty="0"/>
+              <a:t>10</a:t>
+            </a:r>
+          </a:p>
+        </p:txBody>
+      </p:sp>
+      <p:sp>
+        <p:nvSpPr>
+          <p:cNvPr id="76" name="TextBox 75">
+            <a:extLst>
+              <a:ext uri="{FF2B5EF4-FFF2-40B4-BE49-F238E27FC236}">
+                <a16:creationId xmlns:a16="http://schemas.microsoft.com/office/drawing/2014/main" id="{A8E9DAC3-1D30-D93A-A21F-37DA937F2546}"/>
+              </a:ext>
+            </a:extLst>
+          </p:cNvPr>
+          <p:cNvSpPr txBox="1"/>
+          <p:nvPr/>
+        </p:nvSpPr>
+        <p:spPr>
+          <a:xfrm>
+            <a:off x="15593982" y="19785306"/>
+            <a:ext cx="448592" cy="353943"/>
+          </a:xfrm>
+          <a:prstGeom prst="rect">
+            <a:avLst/>
+          </a:prstGeom>
+          <a:noFill/>
+        </p:spPr>
+        <p:txBody>
+          <a:bodyPr wrap="square" rtlCol="0">
+            <a:spAutoFit/>
+          </a:bodyPr>
+          <a:lstStyle/>
+          <a:p>
+            <a:pPr algn="ctr"/>
+            <a:r>
+              <a:rPr lang="en-US" sz="1700" dirty="0"/>
+              <a:t>12</a:t>
+            </a:r>
+          </a:p>
+        </p:txBody>
+      </p:sp>
+      <p:sp>
+        <p:nvSpPr>
+          <p:cNvPr id="77" name="TextBox 76">
+            <a:extLst>
+              <a:ext uri="{FF2B5EF4-FFF2-40B4-BE49-F238E27FC236}">
+                <a16:creationId xmlns:a16="http://schemas.microsoft.com/office/drawing/2014/main" id="{0E07A0BD-9205-75A6-0E15-8D42DD00E8F1}"/>
+              </a:ext>
+            </a:extLst>
+          </p:cNvPr>
+          <p:cNvSpPr txBox="1"/>
+          <p:nvPr/>
+        </p:nvSpPr>
+        <p:spPr>
+          <a:xfrm>
+            <a:off x="16065469" y="19785306"/>
+            <a:ext cx="448592" cy="353943"/>
+          </a:xfrm>
+          <a:prstGeom prst="rect">
+            <a:avLst/>
+          </a:prstGeom>
+          <a:noFill/>
+        </p:spPr>
+        <p:txBody>
+          <a:bodyPr wrap="square" rtlCol="0">
+            <a:spAutoFit/>
+          </a:bodyPr>
+          <a:lstStyle/>
+          <a:p>
+            <a:pPr algn="ctr"/>
+            <a:r>
+              <a:rPr lang="en-US" sz="1700" dirty="0"/>
+              <a:t>14</a:t>
+            </a:r>
+          </a:p>
+        </p:txBody>
+      </p:sp>
+      <p:sp>
+        <p:nvSpPr>
+          <p:cNvPr id="78" name="TextBox 77">
+            <a:extLst>
+              <a:ext uri="{FF2B5EF4-FFF2-40B4-BE49-F238E27FC236}">
+                <a16:creationId xmlns:a16="http://schemas.microsoft.com/office/drawing/2014/main" id="{F6C98EFF-6C39-FED3-D7C4-A93F258F82C4}"/>
+              </a:ext>
+            </a:extLst>
+          </p:cNvPr>
+          <p:cNvSpPr txBox="1"/>
+          <p:nvPr/>
+        </p:nvSpPr>
+        <p:spPr>
+          <a:xfrm>
+            <a:off x="16536498" y="19785175"/>
+            <a:ext cx="448592" cy="353943"/>
+          </a:xfrm>
+          <a:prstGeom prst="rect">
+            <a:avLst/>
+          </a:prstGeom>
+          <a:noFill/>
+        </p:spPr>
+        <p:txBody>
+          <a:bodyPr wrap="square" rtlCol="0">
+            <a:spAutoFit/>
+          </a:bodyPr>
+          <a:lstStyle/>
+          <a:p>
+            <a:pPr algn="ctr"/>
+            <a:r>
+              <a:rPr lang="en-US" sz="1700" dirty="0"/>
+              <a:t>16</a:t>
+            </a:r>
+          </a:p>
+        </p:txBody>
+      </p:sp>
+      <p:sp>
+        <p:nvSpPr>
+          <p:cNvPr id="79" name="TextBox 78">
+            <a:extLst>
+              <a:ext uri="{FF2B5EF4-FFF2-40B4-BE49-F238E27FC236}">
+                <a16:creationId xmlns:a16="http://schemas.microsoft.com/office/drawing/2014/main" id="{6305F5BC-6DB7-AD97-A63A-EB460317C2D0}"/>
+              </a:ext>
+            </a:extLst>
+          </p:cNvPr>
+          <p:cNvSpPr txBox="1"/>
+          <p:nvPr/>
+        </p:nvSpPr>
+        <p:spPr>
+          <a:xfrm>
+            <a:off x="17007024" y="19785175"/>
+            <a:ext cx="448592" cy="353943"/>
+          </a:xfrm>
+          <a:prstGeom prst="rect">
+            <a:avLst/>
+          </a:prstGeom>
+          <a:noFill/>
+        </p:spPr>
+        <p:txBody>
+          <a:bodyPr wrap="square" rtlCol="0">
+            <a:spAutoFit/>
+          </a:bodyPr>
+          <a:lstStyle/>
+          <a:p>
+            <a:pPr algn="ctr"/>
+            <a:r>
+              <a:rPr lang="en-US" sz="1700" dirty="0"/>
+              <a:t>18</a:t>
+            </a:r>
+          </a:p>
+        </p:txBody>
+      </p:sp>
+      <p:sp>
+        <p:nvSpPr>
+          <p:cNvPr id="80" name="TextBox 79">
+            <a:extLst>
+              <a:ext uri="{FF2B5EF4-FFF2-40B4-BE49-F238E27FC236}">
+                <a16:creationId xmlns:a16="http://schemas.microsoft.com/office/drawing/2014/main" id="{3893787A-A067-E4EF-B62C-D18D1AFE8A19}"/>
+              </a:ext>
+            </a:extLst>
+          </p:cNvPr>
+          <p:cNvSpPr txBox="1"/>
+          <p:nvPr/>
+        </p:nvSpPr>
+        <p:spPr>
+          <a:xfrm>
+            <a:off x="17480438" y="19785175"/>
+            <a:ext cx="448592" cy="353943"/>
+          </a:xfrm>
+          <a:prstGeom prst="rect">
+            <a:avLst/>
+          </a:prstGeom>
+          <a:noFill/>
+        </p:spPr>
+        <p:txBody>
+          <a:bodyPr wrap="square" rtlCol="0">
+            <a:spAutoFit/>
+          </a:bodyPr>
+          <a:lstStyle/>
+          <a:p>
+            <a:pPr algn="ctr"/>
+            <a:r>
+              <a:rPr lang="en-US" sz="1700" dirty="0"/>
+              <a:t>20</a:t>
+            </a:r>
+          </a:p>
+        </p:txBody>
+      </p:sp>
+      <p:sp>
+        <p:nvSpPr>
+          <p:cNvPr id="81" name="TextBox 80">
+            <a:extLst>
+              <a:ext uri="{FF2B5EF4-FFF2-40B4-BE49-F238E27FC236}">
+                <a16:creationId xmlns:a16="http://schemas.microsoft.com/office/drawing/2014/main" id="{648C43FC-8E6E-89E6-F377-289C540004D6}"/>
+              </a:ext>
+            </a:extLst>
+          </p:cNvPr>
+          <p:cNvSpPr txBox="1"/>
+          <p:nvPr/>
+        </p:nvSpPr>
+        <p:spPr>
+          <a:xfrm>
+            <a:off x="12573180" y="14516123"/>
+            <a:ext cx="610163" cy="353943"/>
+          </a:xfrm>
+          <a:prstGeom prst="rect">
+            <a:avLst/>
+          </a:prstGeom>
+          <a:noFill/>
+        </p:spPr>
+        <p:txBody>
+          <a:bodyPr wrap="square" rtlCol="0">
+            <a:spAutoFit/>
+          </a:bodyPr>
+          <a:lstStyle/>
+          <a:p>
+            <a:pPr algn="r"/>
+            <a:r>
+              <a:rPr lang="en-US" sz="1700" dirty="0"/>
+              <a:t>1</a:t>
+            </a:r>
+          </a:p>
+        </p:txBody>
+      </p:sp>
+      <p:sp>
+        <p:nvSpPr>
+          <p:cNvPr id="83" name="TextBox 82">
+            <a:extLst>
+              <a:ext uri="{FF2B5EF4-FFF2-40B4-BE49-F238E27FC236}">
+                <a16:creationId xmlns:a16="http://schemas.microsoft.com/office/drawing/2014/main" id="{5D7C3265-3258-8236-A72F-A70834E02E64}"/>
+              </a:ext>
+            </a:extLst>
+          </p:cNvPr>
+          <p:cNvSpPr txBox="1"/>
+          <p:nvPr/>
+        </p:nvSpPr>
+        <p:spPr>
+          <a:xfrm>
+            <a:off x="12573177" y="15353202"/>
+            <a:ext cx="610163" cy="353943"/>
+          </a:xfrm>
+          <a:prstGeom prst="rect">
+            <a:avLst/>
+          </a:prstGeom>
+          <a:noFill/>
+        </p:spPr>
+        <p:txBody>
+          <a:bodyPr wrap="square" rtlCol="0">
+            <a:spAutoFit/>
+          </a:bodyPr>
+          <a:lstStyle/>
+          <a:p>
+            <a:pPr algn="r"/>
+            <a:r>
+              <a:rPr lang="en-US" sz="1700" dirty="0"/>
+              <a:t>0</a:t>
+            </a:r>
+          </a:p>
+        </p:txBody>
+      </p:sp>
+      <p:sp>
+        <p:nvSpPr>
+          <p:cNvPr id="84" name="TextBox 83">
+            <a:extLst>
+              <a:ext uri="{FF2B5EF4-FFF2-40B4-BE49-F238E27FC236}">
+                <a16:creationId xmlns:a16="http://schemas.microsoft.com/office/drawing/2014/main" id="{A94E758C-5A17-8A37-5B4D-ACA27F2C2531}"/>
+              </a:ext>
+            </a:extLst>
+          </p:cNvPr>
+          <p:cNvSpPr txBox="1"/>
+          <p:nvPr/>
+        </p:nvSpPr>
+        <p:spPr>
+          <a:xfrm>
+            <a:off x="12573175" y="15769301"/>
+            <a:ext cx="610163" cy="353943"/>
+          </a:xfrm>
+          <a:prstGeom prst="rect">
+            <a:avLst/>
+          </a:prstGeom>
+          <a:noFill/>
+        </p:spPr>
+        <p:txBody>
+          <a:bodyPr wrap="square" rtlCol="0">
+            <a:spAutoFit/>
+          </a:bodyPr>
+          <a:lstStyle/>
+          <a:p>
+            <a:pPr algn="r"/>
+            <a:r>
+              <a:rPr lang="en-US" sz="1700" dirty="0"/>
+              <a:t>-0.5</a:t>
+            </a:r>
+          </a:p>
+        </p:txBody>
+      </p:sp>
+      <p:sp>
+        <p:nvSpPr>
+          <p:cNvPr id="85" name="TextBox 84">
+            <a:extLst>
+              <a:ext uri="{FF2B5EF4-FFF2-40B4-BE49-F238E27FC236}">
+                <a16:creationId xmlns:a16="http://schemas.microsoft.com/office/drawing/2014/main" id="{9EEC0DD0-05E5-6047-8E13-3B53C45DC57D}"/>
+              </a:ext>
+            </a:extLst>
+          </p:cNvPr>
+          <p:cNvSpPr txBox="1"/>
+          <p:nvPr/>
+        </p:nvSpPr>
+        <p:spPr>
+          <a:xfrm>
+            <a:off x="12573175" y="16182573"/>
+            <a:ext cx="610163" cy="353943"/>
+          </a:xfrm>
+          <a:prstGeom prst="rect">
+            <a:avLst/>
+          </a:prstGeom>
+          <a:noFill/>
+        </p:spPr>
+        <p:txBody>
+          <a:bodyPr wrap="square" rtlCol="0">
+            <a:spAutoFit/>
+          </a:bodyPr>
+          <a:lstStyle/>
+          <a:p>
+            <a:pPr algn="r"/>
+            <a:r>
+              <a:rPr lang="en-US" sz="1700" dirty="0"/>
+              <a:t>-1.0</a:t>
+            </a:r>
+          </a:p>
+        </p:txBody>
+      </p:sp>
+      <p:sp>
+        <p:nvSpPr>
+          <p:cNvPr id="86" name="TextBox 85">
+            <a:extLst>
+              <a:ext uri="{FF2B5EF4-FFF2-40B4-BE49-F238E27FC236}">
+                <a16:creationId xmlns:a16="http://schemas.microsoft.com/office/drawing/2014/main" id="{6FFCAC7F-C389-22B3-82AE-3999CD0FA05C}"/>
+              </a:ext>
+            </a:extLst>
+          </p:cNvPr>
+          <p:cNvSpPr txBox="1"/>
+          <p:nvPr/>
+        </p:nvSpPr>
+        <p:spPr>
+          <a:xfrm>
+            <a:off x="12573175" y="17643090"/>
+            <a:ext cx="610163" cy="353943"/>
+          </a:xfrm>
+          <a:prstGeom prst="rect">
+            <a:avLst/>
+          </a:prstGeom>
+          <a:noFill/>
+        </p:spPr>
+        <p:txBody>
+          <a:bodyPr wrap="square" rtlCol="0">
+            <a:spAutoFit/>
+          </a:bodyPr>
+          <a:lstStyle/>
+          <a:p>
+            <a:pPr algn="r"/>
+            <a:r>
+              <a:rPr lang="en-US" sz="1700" dirty="0"/>
+              <a:t>0</a:t>
+            </a:r>
+          </a:p>
+        </p:txBody>
+      </p:sp>
+      <p:sp>
+        <p:nvSpPr>
+          <p:cNvPr id="87" name="TextBox 86">
+            <a:extLst>
+              <a:ext uri="{FF2B5EF4-FFF2-40B4-BE49-F238E27FC236}">
+                <a16:creationId xmlns:a16="http://schemas.microsoft.com/office/drawing/2014/main" id="{4C76EC0C-7B97-9540-A57C-E66DCFA0F2FC}"/>
+              </a:ext>
+            </a:extLst>
+          </p:cNvPr>
+          <p:cNvSpPr txBox="1"/>
+          <p:nvPr/>
+        </p:nvSpPr>
+        <p:spPr>
+          <a:xfrm>
+            <a:off x="12573174" y="18068714"/>
+            <a:ext cx="610163" cy="353943"/>
+          </a:xfrm>
+          <a:prstGeom prst="rect">
+            <a:avLst/>
+          </a:prstGeom>
+          <a:noFill/>
+        </p:spPr>
+        <p:txBody>
+          <a:bodyPr wrap="square" rtlCol="0">
+            <a:spAutoFit/>
+          </a:bodyPr>
+          <a:lstStyle/>
+          <a:p>
+            <a:pPr algn="r"/>
+            <a:r>
+              <a:rPr lang="en-US" sz="1700" dirty="0"/>
+              <a:t>-0.2</a:t>
+            </a:r>
+          </a:p>
+        </p:txBody>
+      </p:sp>
+      <p:sp>
+        <p:nvSpPr>
+          <p:cNvPr id="88" name="TextBox 87">
+            <a:extLst>
+              <a:ext uri="{FF2B5EF4-FFF2-40B4-BE49-F238E27FC236}">
+                <a16:creationId xmlns:a16="http://schemas.microsoft.com/office/drawing/2014/main" id="{263661ED-E62E-6455-0367-72CF8B33BE98}"/>
+              </a:ext>
+            </a:extLst>
+          </p:cNvPr>
+          <p:cNvSpPr txBox="1"/>
+          <p:nvPr/>
+        </p:nvSpPr>
+        <p:spPr>
+          <a:xfrm>
+            <a:off x="12573174" y="18494338"/>
+            <a:ext cx="610163" cy="353943"/>
+          </a:xfrm>
+          <a:prstGeom prst="rect">
+            <a:avLst/>
+          </a:prstGeom>
+          <a:noFill/>
+        </p:spPr>
+        <p:txBody>
+          <a:bodyPr wrap="square" rtlCol="0">
+            <a:spAutoFit/>
+          </a:bodyPr>
+          <a:lstStyle/>
+          <a:p>
+            <a:pPr algn="r"/>
+            <a:r>
+              <a:rPr lang="en-US" sz="1700" dirty="0"/>
+              <a:t>-0.4</a:t>
+            </a:r>
+          </a:p>
+        </p:txBody>
+      </p:sp>
+      <p:sp>
+        <p:nvSpPr>
+          <p:cNvPr id="89" name="TextBox 88">
+            <a:extLst>
+              <a:ext uri="{FF2B5EF4-FFF2-40B4-BE49-F238E27FC236}">
+                <a16:creationId xmlns:a16="http://schemas.microsoft.com/office/drawing/2014/main" id="{C187CAB4-6E16-6774-0B6D-B30DD9663F08}"/>
+              </a:ext>
+            </a:extLst>
+          </p:cNvPr>
+          <p:cNvSpPr txBox="1"/>
+          <p:nvPr/>
+        </p:nvSpPr>
+        <p:spPr>
+          <a:xfrm>
+            <a:off x="12573173" y="18919962"/>
+            <a:ext cx="610163" cy="353943"/>
+          </a:xfrm>
+          <a:prstGeom prst="rect">
+            <a:avLst/>
+          </a:prstGeom>
+          <a:noFill/>
+        </p:spPr>
+        <p:txBody>
+          <a:bodyPr wrap="square" rtlCol="0">
+            <a:spAutoFit/>
+          </a:bodyPr>
+          <a:lstStyle/>
+          <a:p>
+            <a:pPr algn="r"/>
+            <a:r>
+              <a:rPr lang="en-US" sz="1700" dirty="0"/>
+              <a:t>-0.6</a:t>
+            </a:r>
+          </a:p>
+        </p:txBody>
+      </p:sp>
+      <p:sp>
+        <p:nvSpPr>
+          <p:cNvPr id="90" name="TextBox 89">
+            <a:extLst>
+              <a:ext uri="{FF2B5EF4-FFF2-40B4-BE49-F238E27FC236}">
+                <a16:creationId xmlns:a16="http://schemas.microsoft.com/office/drawing/2014/main" id="{527C2AA7-19CD-00AA-C172-28006368477D}"/>
+              </a:ext>
+            </a:extLst>
+          </p:cNvPr>
+          <p:cNvSpPr txBox="1"/>
+          <p:nvPr/>
+        </p:nvSpPr>
+        <p:spPr>
+          <a:xfrm>
+            <a:off x="12573172" y="19344562"/>
+            <a:ext cx="610163" cy="353943"/>
+          </a:xfrm>
+          <a:prstGeom prst="rect">
+            <a:avLst/>
+          </a:prstGeom>
+          <a:noFill/>
+        </p:spPr>
+        <p:txBody>
+          <a:bodyPr wrap="square" rtlCol="0">
+            <a:spAutoFit/>
+          </a:bodyPr>
+          <a:lstStyle/>
+          <a:p>
+            <a:pPr algn="r"/>
+            <a:r>
+              <a:rPr lang="en-US" sz="1700" dirty="0"/>
+              <a:t>-0.8</a:t>
+            </a:r>
+          </a:p>
+        </p:txBody>
+      </p:sp>
+      <p:sp>
+        <p:nvSpPr>
+          <p:cNvPr id="132" name="TextBox 131">
+            <a:extLst>
+              <a:ext uri="{FF2B5EF4-FFF2-40B4-BE49-F238E27FC236}">
+                <a16:creationId xmlns:a16="http://schemas.microsoft.com/office/drawing/2014/main" id="{62CA3510-64B6-00FE-5788-C7078ADEBC17}"/>
+              </a:ext>
+            </a:extLst>
+          </p:cNvPr>
+          <p:cNvSpPr txBox="1"/>
+          <p:nvPr/>
+        </p:nvSpPr>
+        <p:spPr>
+          <a:xfrm>
+            <a:off x="3808483" y="18386423"/>
+            <a:ext cx="3178103" cy="400110"/>
+          </a:xfrm>
+          <a:prstGeom prst="rect">
+            <a:avLst/>
+          </a:prstGeom>
+          <a:noFill/>
+        </p:spPr>
+        <p:txBody>
+          <a:bodyPr wrap="square" rtlCol="0">
+            <a:spAutoFit/>
+          </a:bodyPr>
+          <a:lstStyle/>
+          <a:p>
+            <a:pPr algn="r"/>
+            <a:r>
+              <a:rPr lang="en-US" sz="2000" dirty="0"/>
+              <a:t>Sign-aligned </a:t>
+            </a:r>
+            <a:r>
+              <a:rPr lang="el-GR" sz="2000" dirty="0"/>
+              <a:t>β</a:t>
+            </a:r>
+            <a:r>
+              <a:rPr lang="en-US" sz="2000" dirty="0"/>
+              <a:t> </a:t>
+            </a:r>
+          </a:p>
+        </p:txBody>
+      </p:sp>
+      <p:sp>
+        <p:nvSpPr>
+          <p:cNvPr id="133" name="TextBox 132">
+            <a:extLst>
+              <a:ext uri="{FF2B5EF4-FFF2-40B4-BE49-F238E27FC236}">
+                <a16:creationId xmlns:a16="http://schemas.microsoft.com/office/drawing/2014/main" id="{11EBAC9A-F984-E13B-A48C-4B04B126BC07}"/>
+              </a:ext>
+            </a:extLst>
+          </p:cNvPr>
+          <p:cNvSpPr txBox="1"/>
+          <p:nvPr/>
+        </p:nvSpPr>
+        <p:spPr>
+          <a:xfrm>
+            <a:off x="7705730" y="13939863"/>
+            <a:ext cx="3178103" cy="400110"/>
+          </a:xfrm>
+          <a:prstGeom prst="rect">
+            <a:avLst/>
+          </a:prstGeom>
+          <a:noFill/>
+        </p:spPr>
+        <p:txBody>
+          <a:bodyPr wrap="square" rtlCol="0">
+            <a:spAutoFit/>
+          </a:bodyPr>
+          <a:lstStyle/>
+          <a:p>
+            <a:r>
+              <a:rPr lang="en-US" sz="2000" dirty="0"/>
+              <a:t>All species</a:t>
+            </a:r>
+          </a:p>
+        </p:txBody>
+      </p:sp>
+      <p:sp>
+        <p:nvSpPr>
+          <p:cNvPr id="134" name="TextBox 133">
+            <a:extLst>
+              <a:ext uri="{FF2B5EF4-FFF2-40B4-BE49-F238E27FC236}">
+                <a16:creationId xmlns:a16="http://schemas.microsoft.com/office/drawing/2014/main" id="{D16B6794-628B-A93B-8936-1D3B849DC8F3}"/>
+              </a:ext>
+            </a:extLst>
+          </p:cNvPr>
+          <p:cNvSpPr txBox="1"/>
+          <p:nvPr/>
+        </p:nvSpPr>
+        <p:spPr>
+          <a:xfrm>
+            <a:off x="7708111" y="17054745"/>
+            <a:ext cx="3178103" cy="400110"/>
+          </a:xfrm>
+          <a:prstGeom prst="rect">
+            <a:avLst/>
+          </a:prstGeom>
+          <a:noFill/>
+        </p:spPr>
+        <p:txBody>
+          <a:bodyPr wrap="square" rtlCol="0">
+            <a:spAutoFit/>
+          </a:bodyPr>
+          <a:lstStyle/>
+          <a:p>
+            <a:r>
+              <a:rPr lang="en-US" sz="2000" dirty="0"/>
+              <a:t>Actinopterygii</a:t>
+            </a:r>
+          </a:p>
+        </p:txBody>
+      </p:sp>
+      <p:sp>
+        <p:nvSpPr>
+          <p:cNvPr id="135" name="TextBox 134">
+            <a:extLst>
+              <a:ext uri="{FF2B5EF4-FFF2-40B4-BE49-F238E27FC236}">
+                <a16:creationId xmlns:a16="http://schemas.microsoft.com/office/drawing/2014/main" id="{FFF9ADF3-DB4B-3E2F-4CCB-7DA42D750A00}"/>
+              </a:ext>
+            </a:extLst>
+          </p:cNvPr>
+          <p:cNvSpPr txBox="1"/>
+          <p:nvPr/>
+        </p:nvSpPr>
+        <p:spPr>
+          <a:xfrm>
+            <a:off x="13294613" y="17054745"/>
+            <a:ext cx="3178103" cy="400110"/>
+          </a:xfrm>
+          <a:prstGeom prst="rect">
+            <a:avLst/>
+          </a:prstGeom>
+          <a:noFill/>
+        </p:spPr>
+        <p:txBody>
+          <a:bodyPr wrap="square" rtlCol="0">
+            <a:spAutoFit/>
+          </a:bodyPr>
+          <a:lstStyle/>
+          <a:p>
+            <a:r>
+              <a:rPr lang="en-US" sz="2000" dirty="0" err="1"/>
+              <a:t>Sauropsida</a:t>
+            </a:r>
+            <a:endParaRPr lang="en-US" sz="2000" dirty="0"/>
+          </a:p>
+        </p:txBody>
+      </p:sp>
+      <p:sp>
+        <p:nvSpPr>
+          <p:cNvPr id="136" name="TextBox 135">
+            <a:extLst>
+              <a:ext uri="{FF2B5EF4-FFF2-40B4-BE49-F238E27FC236}">
+                <a16:creationId xmlns:a16="http://schemas.microsoft.com/office/drawing/2014/main" id="{28E01B4B-AF74-EF20-96F2-E0E0002A17DA}"/>
+              </a:ext>
+            </a:extLst>
+          </p:cNvPr>
+          <p:cNvSpPr txBox="1"/>
+          <p:nvPr/>
+        </p:nvSpPr>
+        <p:spPr>
+          <a:xfrm>
+            <a:off x="13294616" y="13940076"/>
+            <a:ext cx="3178103" cy="400110"/>
+          </a:xfrm>
+          <a:prstGeom prst="rect">
+            <a:avLst/>
+          </a:prstGeom>
+          <a:noFill/>
+        </p:spPr>
+        <p:txBody>
+          <a:bodyPr wrap="square" rtlCol="0">
+            <a:spAutoFit/>
+          </a:bodyPr>
+          <a:lstStyle/>
+          <a:p>
+            <a:r>
+              <a:rPr lang="en-US" sz="2000" dirty="0"/>
+              <a:t>Mammalia</a:t>
+            </a:r>
+          </a:p>
+        </p:txBody>
+      </p:sp>
       <p:grpSp>
         <p:nvGrpSpPr>
-          <p:cNvPr id="56" name="Group 55">
+          <p:cNvPr id="138" name="Group 137">
             <a:extLst>
               <a:ext uri="{FF2B5EF4-FFF2-40B4-BE49-F238E27FC236}">
-                <a16:creationId xmlns:a16="http://schemas.microsoft.com/office/drawing/2014/main" id="{C43CB46D-0F8E-1305-07FB-5329AD93B1E4}"/>
+                <a16:creationId xmlns:a16="http://schemas.microsoft.com/office/drawing/2014/main" id="{FDA4FC55-BEF5-6F07-D982-6B0EF7270BF9}"/>
               </a:ext>
             </a:extLst>
           </p:cNvPr>
@@ -12128,18 +13796,18 @@
         </p:nvGrpSpPr>
         <p:grpSpPr>
           <a:xfrm>
-            <a:off x="22131111" y="17380519"/>
-            <a:ext cx="3830535" cy="5335781"/>
-            <a:chOff x="22145625" y="17263687"/>
-            <a:chExt cx="3830535" cy="5335781"/>
+            <a:off x="18120111" y="16442122"/>
+            <a:ext cx="3874327" cy="3664947"/>
+            <a:chOff x="22145625" y="17185271"/>
+            <a:chExt cx="3830535" cy="5485773"/>
           </a:xfrm>
         </p:grpSpPr>
         <p:pic>
           <p:nvPicPr>
-            <p:cNvPr id="25" name="Picture 24">
+            <p:cNvPr id="139" name="Picture 138">
               <a:extLst>
                 <a:ext uri="{FF2B5EF4-FFF2-40B4-BE49-F238E27FC236}">
-                  <a16:creationId xmlns:a16="http://schemas.microsoft.com/office/drawing/2014/main" id="{371B69F1-43CD-EFC3-1375-3EB90CB7B6FA}"/>
+                  <a16:creationId xmlns:a16="http://schemas.microsoft.com/office/drawing/2014/main" id="{A56DAF45-7265-3578-F18D-43185F762BDE}"/>
                 </a:ext>
               </a:extLst>
             </p:cNvPr>
@@ -12149,7 +13817,7 @@
             <p:nvPr/>
           </p:nvPicPr>
           <p:blipFill>
-            <a:blip r:embed="rId3"/>
+            <a:blip r:embed="rId7"/>
             <a:srcRect l="86803" t="70725" r="1325" b="27543"/>
             <a:stretch>
               <a:fillRect/>
@@ -12167,10 +13835,10 @@
         </p:pic>
         <p:sp>
           <p:nvSpPr>
-            <p:cNvPr id="26" name="TextBox 25">
+            <p:cNvPr id="140" name="TextBox 139">
               <a:extLst>
                 <a:ext uri="{FF2B5EF4-FFF2-40B4-BE49-F238E27FC236}">
-                  <a16:creationId xmlns:a16="http://schemas.microsoft.com/office/drawing/2014/main" id="{90D18CFD-9947-9560-77BC-1F76366BE29E}"/>
+                  <a16:creationId xmlns:a16="http://schemas.microsoft.com/office/drawing/2014/main" id="{DD5FCBCC-31FC-40B1-2299-1441D36793A8}"/>
                 </a:ext>
               </a:extLst>
             </p:cNvPr>
@@ -12196,17 +13864,17 @@
               <a:pPr algn="ctr"/>
               <a:r>
                 <a:rPr lang="en-US" sz="2000" dirty="0"/>
-                <a:t>Weight of explanatory model</a:t>
+                <a:t>Variable importance</a:t>
               </a:r>
             </a:p>
           </p:txBody>
         </p:sp>
         <p:sp>
           <p:nvSpPr>
-            <p:cNvPr id="30" name="TextBox 29">
+            <p:cNvPr id="141" name="TextBox 140">
               <a:extLst>
                 <a:ext uri="{FF2B5EF4-FFF2-40B4-BE49-F238E27FC236}">
-                  <a16:creationId xmlns:a16="http://schemas.microsoft.com/office/drawing/2014/main" id="{88CDB4AE-2D45-AD81-0CF3-5E7F2B09ED4C}"/>
+                  <a16:creationId xmlns:a16="http://schemas.microsoft.com/office/drawing/2014/main" id="{2C9E65C7-DCA7-6082-1316-8715C26AF260}"/>
                 </a:ext>
               </a:extLst>
             </p:cNvPr>
@@ -12215,8 +13883,8 @@
           </p:nvSpPr>
           <p:spPr>
             <a:xfrm>
-              <a:off x="23417771" y="22076248"/>
-              <a:ext cx="2558389" cy="523220"/>
+              <a:off x="23417771" y="21980014"/>
+              <a:ext cx="2558389" cy="691030"/>
             </a:xfrm>
             <a:prstGeom prst="rect">
               <a:avLst/>
@@ -12230,7 +13898,7 @@
             <a:lstStyle/>
             <a:p>
               <a:r>
-                <a:rPr lang="en-US" sz="2800" dirty="0"/>
+                <a:rPr lang="en-US" sz="2400" dirty="0"/>
                 <a:t>0.5</a:t>
               </a:r>
             </a:p>
@@ -12238,10 +13906,10 @@
         </p:sp>
         <p:sp>
           <p:nvSpPr>
-            <p:cNvPr id="31" name="TextBox 30">
+            <p:cNvPr id="142" name="TextBox 141">
               <a:extLst>
                 <a:ext uri="{FF2B5EF4-FFF2-40B4-BE49-F238E27FC236}">
-                  <a16:creationId xmlns:a16="http://schemas.microsoft.com/office/drawing/2014/main" id="{0055CF02-0767-7164-B828-672256B7AB3F}"/>
+                  <a16:creationId xmlns:a16="http://schemas.microsoft.com/office/drawing/2014/main" id="{49B2B976-1933-8800-8B79-CED795CEE529}"/>
                 </a:ext>
               </a:extLst>
             </p:cNvPr>
@@ -12250,8 +13918,8 @@
           </p:nvSpPr>
           <p:spPr>
             <a:xfrm>
-              <a:off x="23417771" y="17263687"/>
-              <a:ext cx="2558389" cy="523220"/>
+              <a:off x="23417771" y="17185271"/>
+              <a:ext cx="2558389" cy="691030"/>
             </a:xfrm>
             <a:prstGeom prst="rect">
               <a:avLst/>
@@ -12265,7 +13933,7 @@
             <a:lstStyle/>
             <a:p>
               <a:r>
-                <a:rPr lang="en-US" sz="2800" dirty="0"/>
+                <a:rPr lang="en-US" sz="2400" dirty="0"/>
                 <a:t>1</a:t>
               </a:r>
             </a:p>
@@ -12273,10 +13941,10 @@
         </p:sp>
         <p:sp>
           <p:nvSpPr>
-            <p:cNvPr id="32" name="TextBox 31">
+            <p:cNvPr id="143" name="TextBox 142">
               <a:extLst>
                 <a:ext uri="{FF2B5EF4-FFF2-40B4-BE49-F238E27FC236}">
-                  <a16:creationId xmlns:a16="http://schemas.microsoft.com/office/drawing/2014/main" id="{1E585F09-E9B6-685D-C6AF-4548A599AC14}"/>
+                  <a16:creationId xmlns:a16="http://schemas.microsoft.com/office/drawing/2014/main" id="{3044ECCD-6842-910B-4B6F-E46472B73C5F}"/>
                 </a:ext>
               </a:extLst>
             </p:cNvPr>
@@ -12285,8 +13953,8 @@
           </p:nvSpPr>
           <p:spPr>
             <a:xfrm>
-              <a:off x="23417771" y="19666558"/>
-              <a:ext cx="2558389" cy="523220"/>
+              <a:off x="23417771" y="19584577"/>
+              <a:ext cx="2558389" cy="691030"/>
             </a:xfrm>
             <a:prstGeom prst="rect">
               <a:avLst/>
@@ -12300,7 +13968,7 @@
             <a:lstStyle/>
             <a:p>
               <a:r>
-                <a:rPr lang="en-US" sz="2800" dirty="0"/>
+                <a:rPr lang="en-US" sz="2400" dirty="0"/>
                 <a:t>0.75</a:t>
               </a:r>
             </a:p>
@@ -12308,10 +13976,10 @@
         </p:sp>
         <p:cxnSp>
           <p:nvCxnSpPr>
-            <p:cNvPr id="36" name="Straight Connector 35">
+            <p:cNvPr id="144" name="Straight Connector 143">
               <a:extLst>
                 <a:ext uri="{FF2B5EF4-FFF2-40B4-BE49-F238E27FC236}">
-                  <a16:creationId xmlns:a16="http://schemas.microsoft.com/office/drawing/2014/main" id="{F925DE2B-3912-76F3-4A37-3D8C79509457}"/>
+                  <a16:creationId xmlns:a16="http://schemas.microsoft.com/office/drawing/2014/main" id="{DEB058D9-3C8D-6528-72FE-B32F304565E2}"/>
                 </a:ext>
               </a:extLst>
             </p:cNvPr>
@@ -12351,10 +14019,10 @@
         </p:cxnSp>
         <p:cxnSp>
           <p:nvCxnSpPr>
-            <p:cNvPr id="37" name="Straight Connector 36">
+            <p:cNvPr id="145" name="Straight Connector 144">
               <a:extLst>
                 <a:ext uri="{FF2B5EF4-FFF2-40B4-BE49-F238E27FC236}">
-                  <a16:creationId xmlns:a16="http://schemas.microsoft.com/office/drawing/2014/main" id="{09CD5C8E-6819-D2FD-9545-20E3CAA52F78}"/>
+                  <a16:creationId xmlns:a16="http://schemas.microsoft.com/office/drawing/2014/main" id="{0A5F47FC-428B-F306-77A3-FED44CD5E6FE}"/>
                 </a:ext>
               </a:extLst>
             </p:cNvPr>
@@ -12365,8 +14033,8 @@
           </p:nvCxnSpPr>
           <p:spPr>
             <a:xfrm flipH="1" flipV="1">
-              <a:off x="23324665" y="22331623"/>
-              <a:ext cx="121683" cy="1472"/>
+              <a:off x="23324665" y="22320931"/>
+              <a:ext cx="121683" cy="1471"/>
             </a:xfrm>
             <a:prstGeom prst="line">
               <a:avLst/>
@@ -12394,10 +14062,10 @@
         </p:cxnSp>
         <p:cxnSp>
           <p:nvCxnSpPr>
-            <p:cNvPr id="38" name="Straight Connector 37">
+            <p:cNvPr id="146" name="Straight Connector 145">
               <a:extLst>
                 <a:ext uri="{FF2B5EF4-FFF2-40B4-BE49-F238E27FC236}">
-                  <a16:creationId xmlns:a16="http://schemas.microsoft.com/office/drawing/2014/main" id="{58E73957-CDD6-8595-AF56-C2F372B4B59A}"/>
+                  <a16:creationId xmlns:a16="http://schemas.microsoft.com/office/drawing/2014/main" id="{4E5FCA45-73E6-C090-2556-C3CFC908CE40}"/>
                 </a:ext>
               </a:extLst>
             </p:cNvPr>
@@ -12408,7 +14076,7 @@
           </p:nvCxnSpPr>
           <p:spPr>
             <a:xfrm flipH="1">
-              <a:off x="23324665" y="17521595"/>
+              <a:off x="23324665" y="17532287"/>
               <a:ext cx="101441" cy="0"/>
             </a:xfrm>
             <a:prstGeom prst="line">
@@ -12437,10 +14105,10 @@
         </p:cxnSp>
         <p:cxnSp>
           <p:nvCxnSpPr>
-            <p:cNvPr id="39" name="Straight Connector 38">
+            <p:cNvPr id="147" name="Straight Connector 146">
               <a:extLst>
                 <a:ext uri="{FF2B5EF4-FFF2-40B4-BE49-F238E27FC236}">
-                  <a16:creationId xmlns:a16="http://schemas.microsoft.com/office/drawing/2014/main" id="{07658163-9C6C-CA9A-D04F-EECF626E101E}"/>
+                  <a16:creationId xmlns:a16="http://schemas.microsoft.com/office/drawing/2014/main" id="{0D52A1E5-DB15-DDB4-68E4-6BFD076B5145}"/>
                 </a:ext>
               </a:extLst>
             </p:cNvPr>
@@ -12479,672 +14147,105 @@
           </p:style>
         </p:cxnSp>
       </p:grpSp>
-      <p:sp>
-        <p:nvSpPr>
-          <p:cNvPr id="58" name="TextBox 57">
+      <p:grpSp>
+        <p:nvGrpSpPr>
+          <p:cNvPr id="151" name="Group 150">
             <a:extLst>
               <a:ext uri="{FF2B5EF4-FFF2-40B4-BE49-F238E27FC236}">
-                <a16:creationId xmlns:a16="http://schemas.microsoft.com/office/drawing/2014/main" id="{DF3C7C23-0E6A-1BF3-9FBD-284C919E247D}"/>
+                <a16:creationId xmlns:a16="http://schemas.microsoft.com/office/drawing/2014/main" id="{C7BB1B4A-64F2-2028-EFD0-21FF8CEA7346}"/>
               </a:ext>
             </a:extLst>
           </p:cNvPr>
-          <p:cNvSpPr txBox="1"/>
+          <p:cNvGrpSpPr/>
           <p:nvPr/>
-        </p:nvSpPr>
-        <p:spPr>
+        </p:nvGrpSpPr>
+        <p:grpSpPr>
           <a:xfrm>
-            <a:off x="10624653" y="16139598"/>
-            <a:ext cx="1998359" cy="461665"/>
+            <a:off x="17732575" y="14436406"/>
+            <a:ext cx="3057795" cy="1876909"/>
+            <a:chOff x="21083291" y="13827276"/>
+            <a:chExt cx="2396007" cy="1470696"/>
           </a:xfrm>
-          <a:prstGeom prst="rect">
-            <a:avLst/>
-          </a:prstGeom>
-          <a:noFill/>
-        </p:spPr>
-        <p:txBody>
-          <a:bodyPr wrap="square" rtlCol="0">
-            <a:spAutoFit/>
-          </a:bodyPr>
-          <a:lstStyle/>
-          <a:p>
-            <a:pPr algn="r"/>
-            <a:r>
-              <a:rPr lang="el-GR" sz="2400" dirty="0"/>
-              <a:t>β</a:t>
-            </a:r>
-            <a:r>
-              <a:rPr lang="en-US" sz="2400" dirty="0"/>
-              <a:t> for R</a:t>
-            </a:r>
-            <a:r>
-              <a:rPr lang="en-US" sz="2400" baseline="30000" dirty="0"/>
-              <a:t>2</a:t>
-            </a:r>
-            <a:endParaRPr lang="en-US" sz="2400" dirty="0"/>
-          </a:p>
-        </p:txBody>
-      </p:sp>
-      <p:sp>
-        <p:nvSpPr>
-          <p:cNvPr id="59" name="TextBox 58">
-            <a:extLst>
-              <a:ext uri="{FF2B5EF4-FFF2-40B4-BE49-F238E27FC236}">
-                <a16:creationId xmlns:a16="http://schemas.microsoft.com/office/drawing/2014/main" id="{BBDA2782-FAD7-9AFC-3FC7-008C8A43F4D8}"/>
-              </a:ext>
-            </a:extLst>
-          </p:cNvPr>
-          <p:cNvSpPr txBox="1"/>
-          <p:nvPr/>
-        </p:nvSpPr>
-        <p:spPr>
-          <a:xfrm>
-            <a:off x="10624653" y="18799070"/>
-            <a:ext cx="1998359" cy="461665"/>
-          </a:xfrm>
-          <a:prstGeom prst="rect">
-            <a:avLst/>
-          </a:prstGeom>
-          <a:noFill/>
-        </p:spPr>
-        <p:txBody>
-          <a:bodyPr wrap="square" rtlCol="0">
-            <a:spAutoFit/>
-          </a:bodyPr>
-          <a:lstStyle/>
-          <a:p>
-            <a:pPr algn="r"/>
-            <a:r>
-              <a:rPr lang="el-GR" sz="2400" dirty="0"/>
-              <a:t>β</a:t>
-            </a:r>
-            <a:r>
-              <a:rPr lang="en-US" sz="2400" dirty="0"/>
-              <a:t> for –(Gini)</a:t>
-            </a:r>
-          </a:p>
-        </p:txBody>
-      </p:sp>
-      <p:sp>
-        <p:nvSpPr>
-          <p:cNvPr id="60" name="TextBox 59">
-            <a:extLst>
-              <a:ext uri="{FF2B5EF4-FFF2-40B4-BE49-F238E27FC236}">
-                <a16:creationId xmlns:a16="http://schemas.microsoft.com/office/drawing/2014/main" id="{F79E864C-80CD-1A5C-B394-9095DC307C63}"/>
-              </a:ext>
-            </a:extLst>
-          </p:cNvPr>
-          <p:cNvSpPr txBox="1"/>
-          <p:nvPr/>
-        </p:nvSpPr>
-        <p:spPr>
-          <a:xfrm>
-            <a:off x="10624653" y="21293206"/>
-            <a:ext cx="1998359" cy="461665"/>
-          </a:xfrm>
-          <a:prstGeom prst="rect">
-            <a:avLst/>
-          </a:prstGeom>
-          <a:noFill/>
-        </p:spPr>
-        <p:txBody>
-          <a:bodyPr wrap="square" rtlCol="0">
-            <a:spAutoFit/>
-          </a:bodyPr>
-          <a:lstStyle/>
-          <a:p>
-            <a:pPr algn="r"/>
-            <a:r>
-              <a:rPr lang="el-GR" sz="2400" dirty="0"/>
-              <a:t>β</a:t>
-            </a:r>
-            <a:r>
-              <a:rPr lang="en-US" sz="2400" dirty="0"/>
-              <a:t> for –(CV)</a:t>
-            </a:r>
-          </a:p>
-        </p:txBody>
-      </p:sp>
-      <p:sp>
-        <p:nvSpPr>
-          <p:cNvPr id="61" name="TextBox 60">
-            <a:extLst>
-              <a:ext uri="{FF2B5EF4-FFF2-40B4-BE49-F238E27FC236}">
-                <a16:creationId xmlns:a16="http://schemas.microsoft.com/office/drawing/2014/main" id="{E6FD011E-6546-45B3-7429-DDF6526884F9}"/>
-              </a:ext>
-            </a:extLst>
-          </p:cNvPr>
-          <p:cNvSpPr txBox="1"/>
-          <p:nvPr/>
-        </p:nvSpPr>
-        <p:spPr>
-          <a:xfrm>
-            <a:off x="12369735" y="15223005"/>
-            <a:ext cx="861062" cy="369332"/>
-          </a:xfrm>
-          <a:prstGeom prst="rect">
-            <a:avLst/>
-          </a:prstGeom>
-          <a:noFill/>
-        </p:spPr>
-        <p:txBody>
-          <a:bodyPr wrap="square" rtlCol="0">
-            <a:spAutoFit/>
-          </a:bodyPr>
-          <a:lstStyle/>
-          <a:p>
-            <a:pPr algn="r"/>
-            <a:r>
-              <a:rPr lang="en-US" sz="1800" dirty="0"/>
-              <a:t>1.0</a:t>
-            </a:r>
-          </a:p>
-        </p:txBody>
-      </p:sp>
-      <p:sp>
-        <p:nvSpPr>
-          <p:cNvPr id="62" name="TextBox 61">
-            <a:extLst>
-              <a:ext uri="{FF2B5EF4-FFF2-40B4-BE49-F238E27FC236}">
-                <a16:creationId xmlns:a16="http://schemas.microsoft.com/office/drawing/2014/main" id="{2A597800-069A-45D0-E4C3-DE02AA45F396}"/>
-              </a:ext>
-            </a:extLst>
-          </p:cNvPr>
-          <p:cNvSpPr txBox="1"/>
-          <p:nvPr/>
-        </p:nvSpPr>
-        <p:spPr>
-          <a:xfrm>
-            <a:off x="12369735" y="15704018"/>
-            <a:ext cx="861062" cy="369332"/>
-          </a:xfrm>
-          <a:prstGeom prst="rect">
-            <a:avLst/>
-          </a:prstGeom>
-          <a:noFill/>
-        </p:spPr>
-        <p:txBody>
-          <a:bodyPr wrap="square" rtlCol="0">
-            <a:spAutoFit/>
-          </a:bodyPr>
-          <a:lstStyle/>
-          <a:p>
-            <a:pPr algn="r"/>
-            <a:r>
-              <a:rPr lang="en-US" sz="1800" dirty="0"/>
-              <a:t>0.5</a:t>
-            </a:r>
-          </a:p>
-        </p:txBody>
-      </p:sp>
-      <p:sp>
-        <p:nvSpPr>
-          <p:cNvPr id="63" name="TextBox 62">
-            <a:extLst>
-              <a:ext uri="{FF2B5EF4-FFF2-40B4-BE49-F238E27FC236}">
-                <a16:creationId xmlns:a16="http://schemas.microsoft.com/office/drawing/2014/main" id="{40910ACF-0103-E550-1F30-10D8D876E5A5}"/>
-              </a:ext>
-            </a:extLst>
-          </p:cNvPr>
-          <p:cNvSpPr txBox="1"/>
-          <p:nvPr/>
-        </p:nvSpPr>
-        <p:spPr>
-          <a:xfrm>
-            <a:off x="12369735" y="16184150"/>
-            <a:ext cx="861062" cy="369332"/>
-          </a:xfrm>
-          <a:prstGeom prst="rect">
-            <a:avLst/>
-          </a:prstGeom>
-          <a:noFill/>
-        </p:spPr>
-        <p:txBody>
-          <a:bodyPr wrap="square" rtlCol="0">
-            <a:spAutoFit/>
-          </a:bodyPr>
-          <a:lstStyle/>
-          <a:p>
-            <a:pPr algn="r"/>
-            <a:r>
-              <a:rPr lang="en-US" sz="1800" dirty="0"/>
-              <a:t>0</a:t>
-            </a:r>
-          </a:p>
-        </p:txBody>
-      </p:sp>
-      <p:sp>
-        <p:nvSpPr>
-          <p:cNvPr id="64" name="TextBox 63">
-            <a:extLst>
-              <a:ext uri="{FF2B5EF4-FFF2-40B4-BE49-F238E27FC236}">
-                <a16:creationId xmlns:a16="http://schemas.microsoft.com/office/drawing/2014/main" id="{C494FEE6-FA2C-AB7C-2DA4-8E4757EEA227}"/>
-              </a:ext>
-            </a:extLst>
-          </p:cNvPr>
-          <p:cNvSpPr txBox="1"/>
-          <p:nvPr/>
-        </p:nvSpPr>
-        <p:spPr>
-          <a:xfrm>
-            <a:off x="12369736" y="16666813"/>
-            <a:ext cx="861062" cy="369332"/>
-          </a:xfrm>
-          <a:prstGeom prst="rect">
-            <a:avLst/>
-          </a:prstGeom>
-          <a:noFill/>
-        </p:spPr>
-        <p:txBody>
-          <a:bodyPr wrap="square" rtlCol="0">
-            <a:spAutoFit/>
-          </a:bodyPr>
-          <a:lstStyle/>
-          <a:p>
-            <a:pPr algn="r"/>
-            <a:r>
-              <a:rPr lang="en-US" sz="1800" dirty="0"/>
-              <a:t>-0.5</a:t>
-            </a:r>
-          </a:p>
-        </p:txBody>
-      </p:sp>
-      <p:sp>
-        <p:nvSpPr>
-          <p:cNvPr id="65" name="TextBox 64">
-            <a:extLst>
-              <a:ext uri="{FF2B5EF4-FFF2-40B4-BE49-F238E27FC236}">
-                <a16:creationId xmlns:a16="http://schemas.microsoft.com/office/drawing/2014/main" id="{69ED0ED5-D192-9011-BD12-923DD8978146}"/>
-              </a:ext>
-            </a:extLst>
-          </p:cNvPr>
-          <p:cNvSpPr txBox="1"/>
-          <p:nvPr/>
-        </p:nvSpPr>
-        <p:spPr>
-          <a:xfrm>
-            <a:off x="12369735" y="17146160"/>
-            <a:ext cx="861062" cy="369332"/>
-          </a:xfrm>
-          <a:prstGeom prst="rect">
-            <a:avLst/>
-          </a:prstGeom>
-          <a:noFill/>
-        </p:spPr>
-        <p:txBody>
-          <a:bodyPr wrap="square" rtlCol="0">
-            <a:spAutoFit/>
-          </a:bodyPr>
-          <a:lstStyle/>
-          <a:p>
-            <a:pPr algn="r"/>
-            <a:r>
-              <a:rPr lang="en-US" sz="1800" dirty="0"/>
-              <a:t>-1.0</a:t>
-            </a:r>
-          </a:p>
-        </p:txBody>
-      </p:sp>
-      <p:sp>
-        <p:nvSpPr>
-          <p:cNvPr id="66" name="TextBox 65">
-            <a:extLst>
-              <a:ext uri="{FF2B5EF4-FFF2-40B4-BE49-F238E27FC236}">
-                <a16:creationId xmlns:a16="http://schemas.microsoft.com/office/drawing/2014/main" id="{0FB3F52B-635E-4EEE-B0E3-3E38ECCFB8AD}"/>
-              </a:ext>
-            </a:extLst>
-          </p:cNvPr>
-          <p:cNvSpPr txBox="1"/>
-          <p:nvPr/>
-        </p:nvSpPr>
-        <p:spPr>
-          <a:xfrm>
-            <a:off x="12369737" y="17937075"/>
-            <a:ext cx="861062" cy="369332"/>
-          </a:xfrm>
-          <a:prstGeom prst="rect">
-            <a:avLst/>
-          </a:prstGeom>
-          <a:noFill/>
-        </p:spPr>
-        <p:txBody>
-          <a:bodyPr wrap="square" rtlCol="0">
-            <a:spAutoFit/>
-          </a:bodyPr>
-          <a:lstStyle/>
-          <a:p>
-            <a:pPr algn="r"/>
-            <a:r>
-              <a:rPr lang="en-US" sz="1800" dirty="0"/>
-              <a:t>0.6</a:t>
-            </a:r>
-          </a:p>
-        </p:txBody>
-      </p:sp>
-      <p:sp>
-        <p:nvSpPr>
-          <p:cNvPr id="67" name="TextBox 66">
-            <a:extLst>
-              <a:ext uri="{FF2B5EF4-FFF2-40B4-BE49-F238E27FC236}">
-                <a16:creationId xmlns:a16="http://schemas.microsoft.com/office/drawing/2014/main" id="{79424CB2-CAA9-2EA9-467B-95F5CE9DDB48}"/>
-              </a:ext>
-            </a:extLst>
-          </p:cNvPr>
-          <p:cNvSpPr txBox="1"/>
-          <p:nvPr/>
-        </p:nvSpPr>
-        <p:spPr>
-          <a:xfrm>
-            <a:off x="12369736" y="18394274"/>
-            <a:ext cx="861062" cy="369332"/>
-          </a:xfrm>
-          <a:prstGeom prst="rect">
-            <a:avLst/>
-          </a:prstGeom>
-          <a:noFill/>
-        </p:spPr>
-        <p:txBody>
-          <a:bodyPr wrap="square" rtlCol="0">
-            <a:spAutoFit/>
-          </a:bodyPr>
-          <a:lstStyle/>
-          <a:p>
-            <a:pPr algn="r"/>
-            <a:r>
-              <a:rPr lang="en-US" sz="1800" dirty="0"/>
-              <a:t>0.4</a:t>
-            </a:r>
-          </a:p>
-        </p:txBody>
-      </p:sp>
-      <p:sp>
-        <p:nvSpPr>
-          <p:cNvPr id="68" name="TextBox 67">
-            <a:extLst>
-              <a:ext uri="{FF2B5EF4-FFF2-40B4-BE49-F238E27FC236}">
-                <a16:creationId xmlns:a16="http://schemas.microsoft.com/office/drawing/2014/main" id="{0A229F9A-8079-59C8-B453-86BB4DC89A0E}"/>
-              </a:ext>
-            </a:extLst>
-          </p:cNvPr>
-          <p:cNvSpPr txBox="1"/>
-          <p:nvPr/>
-        </p:nvSpPr>
-        <p:spPr>
-          <a:xfrm>
-            <a:off x="12369735" y="18846484"/>
-            <a:ext cx="861062" cy="369332"/>
-          </a:xfrm>
-          <a:prstGeom prst="rect">
-            <a:avLst/>
-          </a:prstGeom>
-          <a:noFill/>
-        </p:spPr>
-        <p:txBody>
-          <a:bodyPr wrap="square" rtlCol="0">
-            <a:spAutoFit/>
-          </a:bodyPr>
-          <a:lstStyle/>
-          <a:p>
-            <a:pPr algn="r"/>
-            <a:r>
-              <a:rPr lang="en-US" sz="1800" dirty="0"/>
-              <a:t>0.2</a:t>
-            </a:r>
-          </a:p>
-        </p:txBody>
-      </p:sp>
-      <p:sp>
-        <p:nvSpPr>
-          <p:cNvPr id="69" name="TextBox 68">
-            <a:extLst>
-              <a:ext uri="{FF2B5EF4-FFF2-40B4-BE49-F238E27FC236}">
-                <a16:creationId xmlns:a16="http://schemas.microsoft.com/office/drawing/2014/main" id="{30A32C92-47E5-C759-5A1D-4BA57A407AD9}"/>
-              </a:ext>
-            </a:extLst>
-          </p:cNvPr>
-          <p:cNvSpPr txBox="1"/>
-          <p:nvPr/>
-        </p:nvSpPr>
-        <p:spPr>
-          <a:xfrm>
-            <a:off x="12369731" y="19305183"/>
-            <a:ext cx="861062" cy="369332"/>
-          </a:xfrm>
-          <a:prstGeom prst="rect">
-            <a:avLst/>
-          </a:prstGeom>
-          <a:noFill/>
-        </p:spPr>
-        <p:txBody>
-          <a:bodyPr wrap="square" rtlCol="0">
-            <a:spAutoFit/>
-          </a:bodyPr>
-          <a:lstStyle/>
-          <a:p>
-            <a:pPr algn="r"/>
-            <a:r>
-              <a:rPr lang="en-US" sz="1800" dirty="0"/>
-              <a:t>0</a:t>
-            </a:r>
-          </a:p>
-        </p:txBody>
-      </p:sp>
-      <p:sp>
-        <p:nvSpPr>
-          <p:cNvPr id="70" name="TextBox 69">
-            <a:extLst>
-              <a:ext uri="{FF2B5EF4-FFF2-40B4-BE49-F238E27FC236}">
-                <a16:creationId xmlns:a16="http://schemas.microsoft.com/office/drawing/2014/main" id="{B07768D0-A0C9-09DA-116E-88C301827119}"/>
-              </a:ext>
-            </a:extLst>
-          </p:cNvPr>
-          <p:cNvSpPr txBox="1"/>
-          <p:nvPr/>
-        </p:nvSpPr>
-        <p:spPr>
-          <a:xfrm>
-            <a:off x="12369735" y="19758921"/>
-            <a:ext cx="861062" cy="369332"/>
-          </a:xfrm>
-          <a:prstGeom prst="rect">
-            <a:avLst/>
-          </a:prstGeom>
-          <a:noFill/>
-        </p:spPr>
-        <p:txBody>
-          <a:bodyPr wrap="square" rtlCol="0">
-            <a:spAutoFit/>
-          </a:bodyPr>
-          <a:lstStyle/>
-          <a:p>
-            <a:pPr algn="r"/>
-            <a:r>
-              <a:rPr lang="en-US" sz="1800" dirty="0"/>
-              <a:t>-0.2</a:t>
-            </a:r>
-          </a:p>
-        </p:txBody>
-      </p:sp>
-      <p:sp>
-        <p:nvSpPr>
-          <p:cNvPr id="71" name="TextBox 70">
-            <a:extLst>
-              <a:ext uri="{FF2B5EF4-FFF2-40B4-BE49-F238E27FC236}">
-                <a16:creationId xmlns:a16="http://schemas.microsoft.com/office/drawing/2014/main" id="{C3D0958A-8D6B-FD90-D559-E3BEBF1BE574}"/>
-              </a:ext>
-            </a:extLst>
-          </p:cNvPr>
-          <p:cNvSpPr txBox="1"/>
-          <p:nvPr/>
-        </p:nvSpPr>
-        <p:spPr>
-          <a:xfrm>
-            <a:off x="12369731" y="20415726"/>
-            <a:ext cx="861062" cy="369332"/>
-          </a:xfrm>
-          <a:prstGeom prst="rect">
-            <a:avLst/>
-          </a:prstGeom>
-          <a:noFill/>
-        </p:spPr>
-        <p:txBody>
-          <a:bodyPr wrap="square" rtlCol="0">
-            <a:spAutoFit/>
-          </a:bodyPr>
-          <a:lstStyle/>
-          <a:p>
-            <a:pPr algn="r"/>
-            <a:r>
-              <a:rPr lang="en-US" sz="1800" dirty="0"/>
-              <a:t>1.5</a:t>
-            </a:r>
-          </a:p>
-        </p:txBody>
-      </p:sp>
-      <p:sp>
-        <p:nvSpPr>
-          <p:cNvPr id="72" name="TextBox 71">
-            <a:extLst>
-              <a:ext uri="{FF2B5EF4-FFF2-40B4-BE49-F238E27FC236}">
-                <a16:creationId xmlns:a16="http://schemas.microsoft.com/office/drawing/2014/main" id="{E54CC8AC-EF0F-6370-3217-6AAC50EF9316}"/>
-              </a:ext>
-            </a:extLst>
-          </p:cNvPr>
-          <p:cNvSpPr txBox="1"/>
-          <p:nvPr/>
-        </p:nvSpPr>
-        <p:spPr>
-          <a:xfrm>
-            <a:off x="12370299" y="20878204"/>
-            <a:ext cx="861062" cy="369332"/>
-          </a:xfrm>
-          <a:prstGeom prst="rect">
-            <a:avLst/>
-          </a:prstGeom>
-          <a:noFill/>
-        </p:spPr>
-        <p:txBody>
-          <a:bodyPr wrap="square" rtlCol="0">
-            <a:spAutoFit/>
-          </a:bodyPr>
-          <a:lstStyle/>
-          <a:p>
-            <a:pPr algn="r"/>
-            <a:r>
-              <a:rPr lang="en-US" sz="1800" dirty="0"/>
-              <a:t>1.0</a:t>
-            </a:r>
-          </a:p>
-        </p:txBody>
-      </p:sp>
-      <p:sp>
-        <p:nvSpPr>
-          <p:cNvPr id="73" name="TextBox 72">
-            <a:extLst>
-              <a:ext uri="{FF2B5EF4-FFF2-40B4-BE49-F238E27FC236}">
-                <a16:creationId xmlns:a16="http://schemas.microsoft.com/office/drawing/2014/main" id="{ED8E5704-BBD8-887B-D43A-830BBE116271}"/>
-              </a:ext>
-            </a:extLst>
-          </p:cNvPr>
-          <p:cNvSpPr txBox="1"/>
-          <p:nvPr/>
-        </p:nvSpPr>
-        <p:spPr>
-          <a:xfrm>
-            <a:off x="12369731" y="21341603"/>
-            <a:ext cx="861062" cy="369332"/>
-          </a:xfrm>
-          <a:prstGeom prst="rect">
-            <a:avLst/>
-          </a:prstGeom>
-          <a:noFill/>
-        </p:spPr>
-        <p:txBody>
-          <a:bodyPr wrap="square" rtlCol="0">
-            <a:spAutoFit/>
-          </a:bodyPr>
-          <a:lstStyle/>
-          <a:p>
-            <a:pPr algn="r"/>
-            <a:r>
-              <a:rPr lang="en-US" sz="1800" dirty="0"/>
-              <a:t>0.5</a:t>
-            </a:r>
-          </a:p>
-        </p:txBody>
-      </p:sp>
-      <p:sp>
-        <p:nvSpPr>
-          <p:cNvPr id="74" name="TextBox 73">
-            <a:extLst>
-              <a:ext uri="{FF2B5EF4-FFF2-40B4-BE49-F238E27FC236}">
-                <a16:creationId xmlns:a16="http://schemas.microsoft.com/office/drawing/2014/main" id="{204DFBF2-51AA-63C7-8319-27EC152B7D05}"/>
-              </a:ext>
-            </a:extLst>
-          </p:cNvPr>
-          <p:cNvSpPr txBox="1"/>
-          <p:nvPr/>
-        </p:nvSpPr>
-        <p:spPr>
-          <a:xfrm>
-            <a:off x="12369731" y="21799319"/>
-            <a:ext cx="861062" cy="369332"/>
-          </a:xfrm>
-          <a:prstGeom prst="rect">
-            <a:avLst/>
-          </a:prstGeom>
-          <a:noFill/>
-        </p:spPr>
-        <p:txBody>
-          <a:bodyPr wrap="square" rtlCol="0">
-            <a:spAutoFit/>
-          </a:bodyPr>
-          <a:lstStyle/>
-          <a:p>
-            <a:pPr algn="r"/>
-            <a:r>
-              <a:rPr lang="en-US" sz="1800" dirty="0"/>
-              <a:t>0</a:t>
-            </a:r>
-          </a:p>
-        </p:txBody>
-      </p:sp>
-      <p:sp>
-        <p:nvSpPr>
-          <p:cNvPr id="75" name="TextBox 74">
-            <a:extLst>
-              <a:ext uri="{FF2B5EF4-FFF2-40B4-BE49-F238E27FC236}">
-                <a16:creationId xmlns:a16="http://schemas.microsoft.com/office/drawing/2014/main" id="{9EE774FA-7633-1EED-0F35-A1381F4A3F96}"/>
-              </a:ext>
-            </a:extLst>
-          </p:cNvPr>
-          <p:cNvSpPr txBox="1"/>
-          <p:nvPr/>
-        </p:nvSpPr>
-        <p:spPr>
-          <a:xfrm>
-            <a:off x="12369733" y="22262980"/>
-            <a:ext cx="861062" cy="369332"/>
-          </a:xfrm>
-          <a:prstGeom prst="rect">
-            <a:avLst/>
-          </a:prstGeom>
-          <a:noFill/>
-        </p:spPr>
-        <p:txBody>
-          <a:bodyPr wrap="square" rtlCol="0">
-            <a:spAutoFit/>
-          </a:bodyPr>
-          <a:lstStyle/>
-          <a:p>
-            <a:pPr algn="r"/>
-            <a:r>
-              <a:rPr lang="en-US" sz="1800" dirty="0"/>
-              <a:t>-0.5</a:t>
-            </a:r>
-          </a:p>
-        </p:txBody>
-      </p:sp>
+        </p:grpSpPr>
+        <p:pic>
+          <p:nvPicPr>
+            <p:cNvPr id="149" name="Picture 148">
+              <a:extLst>
+                <a:ext uri="{FF2B5EF4-FFF2-40B4-BE49-F238E27FC236}">
+                  <a16:creationId xmlns:a16="http://schemas.microsoft.com/office/drawing/2014/main" id="{E23572A4-07A5-5DE9-157A-E8DB826D190C}"/>
+                </a:ext>
+              </a:extLst>
+            </p:cNvPr>
+            <p:cNvPicPr>
+              <a:picLocks noChangeAspect="1"/>
+            </p:cNvPicPr>
+            <p:nvPr/>
+          </p:nvPicPr>
+          <p:blipFill>
+            <a:blip r:embed="rId8"/>
+            <a:srcRect l="72582" t="21697" r="10049" b="63999"/>
+            <a:stretch>
+              <a:fillRect/>
+            </a:stretch>
+          </p:blipFill>
+          <p:spPr>
+            <a:xfrm>
+              <a:off x="21083291" y="14447849"/>
+              <a:ext cx="1811622" cy="850123"/>
+            </a:xfrm>
+            <a:prstGeom prst="rect">
+              <a:avLst/>
+            </a:prstGeom>
+          </p:spPr>
+        </p:pic>
+        <p:sp>
+          <p:nvSpPr>
+            <p:cNvPr id="150" name="TextBox 149">
+              <a:extLst>
+                <a:ext uri="{FF2B5EF4-FFF2-40B4-BE49-F238E27FC236}">
+                  <a16:creationId xmlns:a16="http://schemas.microsoft.com/office/drawing/2014/main" id="{B70387CD-52FF-7C12-5E65-D1FFD32ECA44}"/>
+                </a:ext>
+              </a:extLst>
+            </p:cNvPr>
+            <p:cNvSpPr txBox="1"/>
+            <p:nvPr/>
+          </p:nvSpPr>
+          <p:spPr>
+            <a:xfrm>
+              <a:off x="21439680" y="13827276"/>
+              <a:ext cx="2039618" cy="554681"/>
+            </a:xfrm>
+            <a:prstGeom prst="rect">
+              <a:avLst/>
+            </a:prstGeom>
+            <a:noFill/>
+          </p:spPr>
+          <p:txBody>
+            <a:bodyPr wrap="square" rtlCol="0">
+              <a:spAutoFit/>
+            </a:bodyPr>
+            <a:lstStyle/>
+            <a:p>
+              <a:r>
+                <a:rPr lang="en-US" sz="2000" dirty="0"/>
+                <a:t>Response</a:t>
+              </a:r>
+            </a:p>
+            <a:p>
+              <a:r>
+                <a:rPr lang="en-US" sz="2000" dirty="0"/>
+                <a:t>metric</a:t>
+              </a:r>
+            </a:p>
+          </p:txBody>
+        </p:sp>
+      </p:grpSp>
     </p:spTree>
+    <p:extLst>
+      <p:ext uri="{BB962C8B-B14F-4D97-AF65-F5344CB8AC3E}">
+        <p14:creationId xmlns:p14="http://schemas.microsoft.com/office/powerpoint/2010/main" val="138087873"/>
+      </p:ext>
+    </p:extLst>
   </p:cSld>
   <p:clrMapOvr>
     <a:masterClrMapping/>

--- a/figures/fig6/fig6.pptx
+++ b/figures/fig6/fig6.pptx
@@ -12025,1769 +12025,12 @@
           <a:chExt cx="0" cy="0"/>
         </a:xfrm>
       </p:grpSpPr>
-      <p:pic>
-        <p:nvPicPr>
-          <p:cNvPr id="153" name="Picture 152">
+      <p:grpSp>
+        <p:nvGrpSpPr>
+          <p:cNvPr id="2" name="Group 1">
             <a:extLst>
               <a:ext uri="{FF2B5EF4-FFF2-40B4-BE49-F238E27FC236}">
-                <a16:creationId xmlns:a16="http://schemas.microsoft.com/office/drawing/2014/main" id="{E924589F-BEE0-7847-629E-44909FBDECBD}"/>
-              </a:ext>
-            </a:extLst>
-          </p:cNvPr>
-          <p:cNvPicPr>
-            <a:picLocks noChangeAspect="1"/>
-          </p:cNvPicPr>
-          <p:nvPr/>
-        </p:nvPicPr>
-        <p:blipFill>
-          <a:blip r:embed="rId3"/>
-          <a:srcRect l="11009" t="13366" r="24228" b="21763"/>
-          <a:stretch>
-            <a:fillRect/>
-          </a:stretch>
-        </p:blipFill>
-        <p:spPr>
-          <a:xfrm>
-            <a:off x="7596741" y="14309131"/>
-            <a:ext cx="4743402" cy="2364826"/>
-          </a:xfrm>
-          <a:prstGeom prst="rect">
-            <a:avLst/>
-          </a:prstGeom>
-        </p:spPr>
-      </p:pic>
-      <p:pic>
-        <p:nvPicPr>
-          <p:cNvPr id="155" name="Picture 154">
-            <a:extLst>
-              <a:ext uri="{FF2B5EF4-FFF2-40B4-BE49-F238E27FC236}">
-                <a16:creationId xmlns:a16="http://schemas.microsoft.com/office/drawing/2014/main" id="{EF4121B5-3F06-3233-812C-BE22CEB9956D}"/>
-              </a:ext>
-            </a:extLst>
-          </p:cNvPr>
-          <p:cNvPicPr>
-            <a:picLocks noChangeAspect="1"/>
-          </p:cNvPicPr>
-          <p:nvPr/>
-        </p:nvPicPr>
-        <p:blipFill>
-          <a:blip r:embed="rId4"/>
-          <a:srcRect l="11033" t="14256" r="24637" b="20873"/>
-          <a:stretch>
-            <a:fillRect/>
-          </a:stretch>
-        </p:blipFill>
-        <p:spPr>
-          <a:xfrm>
-            <a:off x="13183335" y="14339973"/>
-            <a:ext cx="4711741" cy="2364826"/>
-          </a:xfrm>
-          <a:prstGeom prst="rect">
-            <a:avLst/>
-          </a:prstGeom>
-        </p:spPr>
-      </p:pic>
-      <p:pic>
-        <p:nvPicPr>
-          <p:cNvPr id="157" name="Picture 156">
-            <a:extLst>
-              <a:ext uri="{FF2B5EF4-FFF2-40B4-BE49-F238E27FC236}">
-                <a16:creationId xmlns:a16="http://schemas.microsoft.com/office/drawing/2014/main" id="{28B9251D-1C65-944C-38F5-1B496BB423E4}"/>
-              </a:ext>
-            </a:extLst>
-          </p:cNvPr>
-          <p:cNvPicPr>
-            <a:picLocks noChangeAspect="1"/>
-          </p:cNvPicPr>
-          <p:nvPr/>
-        </p:nvPicPr>
-        <p:blipFill>
-          <a:blip r:embed="rId5"/>
-          <a:srcRect l="11032" t="14265" r="24174" b="20891"/>
-          <a:stretch>
-            <a:fillRect/>
-          </a:stretch>
-        </p:blipFill>
-        <p:spPr>
-          <a:xfrm>
-            <a:off x="13183335" y="17454855"/>
-            <a:ext cx="4745695" cy="2363844"/>
-          </a:xfrm>
-          <a:prstGeom prst="rect">
-            <a:avLst/>
-          </a:prstGeom>
-        </p:spPr>
-      </p:pic>
-      <p:pic>
-        <p:nvPicPr>
-          <p:cNvPr id="159" name="Picture 158">
-            <a:extLst>
-              <a:ext uri="{FF2B5EF4-FFF2-40B4-BE49-F238E27FC236}">
-                <a16:creationId xmlns:a16="http://schemas.microsoft.com/office/drawing/2014/main" id="{549BE2EB-98EE-ADC3-BADB-D736E57D32AD}"/>
-              </a:ext>
-            </a:extLst>
-          </p:cNvPr>
-          <p:cNvPicPr>
-            <a:picLocks noChangeAspect="1"/>
-          </p:cNvPicPr>
-          <p:nvPr/>
-        </p:nvPicPr>
-        <p:blipFill>
-          <a:blip r:embed="rId6"/>
-          <a:srcRect l="11010" t="14222" r="24390" b="20906"/>
-          <a:stretch>
-            <a:fillRect/>
-          </a:stretch>
-        </p:blipFill>
-        <p:spPr>
-          <a:xfrm>
-            <a:off x="7596741" y="17454855"/>
-            <a:ext cx="4731495" cy="2364826"/>
-          </a:xfrm>
-          <a:prstGeom prst="rect">
-            <a:avLst/>
-          </a:prstGeom>
-        </p:spPr>
-      </p:pic>
-      <p:sp>
-        <p:nvSpPr>
-          <p:cNvPr id="20" name="TextBox 19">
-            <a:extLst>
-              <a:ext uri="{FF2B5EF4-FFF2-40B4-BE49-F238E27FC236}">
-                <a16:creationId xmlns:a16="http://schemas.microsoft.com/office/drawing/2014/main" id="{2F2EA852-FACC-800C-4A89-E45C5B32CFD2}"/>
-              </a:ext>
-            </a:extLst>
-          </p:cNvPr>
-          <p:cNvSpPr txBox="1"/>
-          <p:nvPr/>
-        </p:nvSpPr>
-        <p:spPr>
-          <a:xfrm>
-            <a:off x="3808483" y="15157644"/>
-            <a:ext cx="3178103" cy="400110"/>
-          </a:xfrm>
-          <a:prstGeom prst="rect">
-            <a:avLst/>
-          </a:prstGeom>
-          <a:noFill/>
-        </p:spPr>
-        <p:txBody>
-          <a:bodyPr wrap="square" rtlCol="0">
-            <a:spAutoFit/>
-          </a:bodyPr>
-          <a:lstStyle/>
-          <a:p>
-            <a:pPr algn="r"/>
-            <a:r>
-              <a:rPr lang="en-US" sz="2000" dirty="0"/>
-              <a:t>Sign-aligned </a:t>
-            </a:r>
-            <a:r>
-              <a:rPr lang="el-GR" sz="2000" dirty="0"/>
-              <a:t>β</a:t>
-            </a:r>
-            <a:r>
-              <a:rPr lang="en-US" sz="2000" dirty="0"/>
-              <a:t> </a:t>
-            </a:r>
-          </a:p>
-        </p:txBody>
-      </p:sp>
-      <p:sp>
-        <p:nvSpPr>
-          <p:cNvPr id="82" name="TextBox 81">
-            <a:extLst>
-              <a:ext uri="{FF2B5EF4-FFF2-40B4-BE49-F238E27FC236}">
-                <a16:creationId xmlns:a16="http://schemas.microsoft.com/office/drawing/2014/main" id="{3A20B51A-108D-838D-8A37-4F68A113ABBA}"/>
-              </a:ext>
-            </a:extLst>
-          </p:cNvPr>
-          <p:cNvSpPr txBox="1"/>
-          <p:nvPr/>
-        </p:nvSpPr>
-        <p:spPr>
-          <a:xfrm>
-            <a:off x="12573179" y="14934157"/>
-            <a:ext cx="610163" cy="353943"/>
-          </a:xfrm>
-          <a:prstGeom prst="rect">
-            <a:avLst/>
-          </a:prstGeom>
-          <a:noFill/>
-        </p:spPr>
-        <p:txBody>
-          <a:bodyPr wrap="square" rtlCol="0">
-            <a:spAutoFit/>
-          </a:bodyPr>
-          <a:lstStyle/>
-          <a:p>
-            <a:pPr algn="r"/>
-            <a:r>
-              <a:rPr lang="en-US" sz="1700" dirty="0"/>
-              <a:t>0.5</a:t>
-            </a:r>
-          </a:p>
-        </p:txBody>
-      </p:sp>
-      <p:sp>
-        <p:nvSpPr>
-          <p:cNvPr id="22" name="TextBox 21">
-            <a:extLst>
-              <a:ext uri="{FF2B5EF4-FFF2-40B4-BE49-F238E27FC236}">
-                <a16:creationId xmlns:a16="http://schemas.microsoft.com/office/drawing/2014/main" id="{B2377443-FA5A-3B21-56E3-113829CA37C9}"/>
-              </a:ext>
-            </a:extLst>
-          </p:cNvPr>
-          <p:cNvSpPr txBox="1"/>
-          <p:nvPr/>
-        </p:nvSpPr>
-        <p:spPr>
-          <a:xfrm>
-            <a:off x="6986588" y="14391323"/>
-            <a:ext cx="610163" cy="353943"/>
-          </a:xfrm>
-          <a:prstGeom prst="rect">
-            <a:avLst/>
-          </a:prstGeom>
-          <a:noFill/>
-        </p:spPr>
-        <p:txBody>
-          <a:bodyPr wrap="square" rtlCol="0">
-            <a:spAutoFit/>
-          </a:bodyPr>
-          <a:lstStyle/>
-          <a:p>
-            <a:pPr algn="r"/>
-            <a:r>
-              <a:rPr lang="en-US" sz="1700" dirty="0"/>
-              <a:t>1.5</a:t>
-            </a:r>
-          </a:p>
-        </p:txBody>
-      </p:sp>
-      <p:sp>
-        <p:nvSpPr>
-          <p:cNvPr id="27" name="TextBox 26">
-            <a:extLst>
-              <a:ext uri="{FF2B5EF4-FFF2-40B4-BE49-F238E27FC236}">
-                <a16:creationId xmlns:a16="http://schemas.microsoft.com/office/drawing/2014/main" id="{24F791D7-178E-4AD7-026F-5C3E2EDA136D}"/>
-              </a:ext>
-            </a:extLst>
-          </p:cNvPr>
-          <p:cNvSpPr txBox="1"/>
-          <p:nvPr/>
-        </p:nvSpPr>
-        <p:spPr>
-          <a:xfrm>
-            <a:off x="6986588" y="14931776"/>
-            <a:ext cx="610163" cy="353943"/>
-          </a:xfrm>
-          <a:prstGeom prst="rect">
-            <a:avLst/>
-          </a:prstGeom>
-          <a:noFill/>
-        </p:spPr>
-        <p:txBody>
-          <a:bodyPr wrap="square" rtlCol="0">
-            <a:spAutoFit/>
-          </a:bodyPr>
-          <a:lstStyle/>
-          <a:p>
-            <a:pPr algn="r"/>
-            <a:r>
-              <a:rPr lang="en-US" sz="1700" dirty="0"/>
-              <a:t>1</a:t>
-            </a:r>
-          </a:p>
-        </p:txBody>
-      </p:sp>
-      <p:sp>
-        <p:nvSpPr>
-          <p:cNvPr id="28" name="TextBox 27">
-            <a:extLst>
-              <a:ext uri="{FF2B5EF4-FFF2-40B4-BE49-F238E27FC236}">
-                <a16:creationId xmlns:a16="http://schemas.microsoft.com/office/drawing/2014/main" id="{FE004D9D-D8D8-9DE9-2684-1F0613C8AF3D}"/>
-              </a:ext>
-            </a:extLst>
-          </p:cNvPr>
-          <p:cNvSpPr txBox="1"/>
-          <p:nvPr/>
-        </p:nvSpPr>
-        <p:spPr>
-          <a:xfrm>
-            <a:off x="6986587" y="15472569"/>
-            <a:ext cx="610163" cy="353943"/>
-          </a:xfrm>
-          <a:prstGeom prst="rect">
-            <a:avLst/>
-          </a:prstGeom>
-          <a:noFill/>
-        </p:spPr>
-        <p:txBody>
-          <a:bodyPr wrap="square" rtlCol="0">
-            <a:spAutoFit/>
-          </a:bodyPr>
-          <a:lstStyle/>
-          <a:p>
-            <a:pPr algn="r"/>
-            <a:r>
-              <a:rPr lang="en-US" sz="1700" dirty="0"/>
-              <a:t>0.5</a:t>
-            </a:r>
-          </a:p>
-        </p:txBody>
-      </p:sp>
-      <p:sp>
-        <p:nvSpPr>
-          <p:cNvPr id="29" name="TextBox 28">
-            <a:extLst>
-              <a:ext uri="{FF2B5EF4-FFF2-40B4-BE49-F238E27FC236}">
-                <a16:creationId xmlns:a16="http://schemas.microsoft.com/office/drawing/2014/main" id="{5A6264A1-431A-69E2-CF50-96B767CFE2D8}"/>
-              </a:ext>
-            </a:extLst>
-          </p:cNvPr>
-          <p:cNvSpPr txBox="1"/>
-          <p:nvPr/>
-        </p:nvSpPr>
-        <p:spPr>
-          <a:xfrm>
-            <a:off x="6986589" y="16013113"/>
-            <a:ext cx="610163" cy="353943"/>
-          </a:xfrm>
-          <a:prstGeom prst="rect">
-            <a:avLst/>
-          </a:prstGeom>
-          <a:noFill/>
-        </p:spPr>
-        <p:txBody>
-          <a:bodyPr wrap="square" rtlCol="0">
-            <a:spAutoFit/>
-          </a:bodyPr>
-          <a:lstStyle/>
-          <a:p>
-            <a:pPr algn="r"/>
-            <a:r>
-              <a:rPr lang="en-US" sz="1700" dirty="0"/>
-              <a:t>0</a:t>
-            </a:r>
-          </a:p>
-        </p:txBody>
-      </p:sp>
-      <p:sp>
-        <p:nvSpPr>
-          <p:cNvPr id="33" name="TextBox 32">
-            <a:extLst>
-              <a:ext uri="{FF2B5EF4-FFF2-40B4-BE49-F238E27FC236}">
-                <a16:creationId xmlns:a16="http://schemas.microsoft.com/office/drawing/2014/main" id="{9D3036E3-F38E-42CA-6838-4810968CC4D1}"/>
-              </a:ext>
-            </a:extLst>
-          </p:cNvPr>
-          <p:cNvSpPr txBox="1"/>
-          <p:nvPr/>
-        </p:nvSpPr>
-        <p:spPr>
-          <a:xfrm>
-            <a:off x="6986590" y="17463294"/>
-            <a:ext cx="610163" cy="353943"/>
-          </a:xfrm>
-          <a:prstGeom prst="rect">
-            <a:avLst/>
-          </a:prstGeom>
-          <a:noFill/>
-        </p:spPr>
-        <p:txBody>
-          <a:bodyPr wrap="square" rtlCol="0">
-            <a:spAutoFit/>
-          </a:bodyPr>
-          <a:lstStyle/>
-          <a:p>
-            <a:pPr algn="r"/>
-            <a:r>
-              <a:rPr lang="en-US" sz="1700" dirty="0"/>
-              <a:t>0.8</a:t>
-            </a:r>
-          </a:p>
-        </p:txBody>
-      </p:sp>
-      <p:sp>
-        <p:nvSpPr>
-          <p:cNvPr id="34" name="TextBox 33">
-            <a:extLst>
-              <a:ext uri="{FF2B5EF4-FFF2-40B4-BE49-F238E27FC236}">
-                <a16:creationId xmlns:a16="http://schemas.microsoft.com/office/drawing/2014/main" id="{471E1563-E2D1-9D4D-75E4-8B7428CEC032}"/>
-              </a:ext>
-            </a:extLst>
-          </p:cNvPr>
-          <p:cNvSpPr txBox="1"/>
-          <p:nvPr/>
-        </p:nvSpPr>
-        <p:spPr>
-          <a:xfrm>
-            <a:off x="6986590" y="17892130"/>
-            <a:ext cx="610163" cy="353943"/>
-          </a:xfrm>
-          <a:prstGeom prst="rect">
-            <a:avLst/>
-          </a:prstGeom>
-          <a:noFill/>
-        </p:spPr>
-        <p:txBody>
-          <a:bodyPr wrap="square" rtlCol="0">
-            <a:spAutoFit/>
-          </a:bodyPr>
-          <a:lstStyle/>
-          <a:p>
-            <a:pPr algn="r"/>
-            <a:r>
-              <a:rPr lang="en-US" sz="1700" dirty="0"/>
-              <a:t>0.6</a:t>
-            </a:r>
-          </a:p>
-        </p:txBody>
-      </p:sp>
-      <p:sp>
-        <p:nvSpPr>
-          <p:cNvPr id="35" name="TextBox 34">
-            <a:extLst>
-              <a:ext uri="{FF2B5EF4-FFF2-40B4-BE49-F238E27FC236}">
-                <a16:creationId xmlns:a16="http://schemas.microsoft.com/office/drawing/2014/main" id="{060C52B8-0EEA-6FE1-43C5-89D9C32443C1}"/>
-              </a:ext>
-            </a:extLst>
-          </p:cNvPr>
-          <p:cNvSpPr txBox="1"/>
-          <p:nvPr/>
-        </p:nvSpPr>
-        <p:spPr>
-          <a:xfrm>
-            <a:off x="6986592" y="18323136"/>
-            <a:ext cx="610163" cy="353943"/>
-          </a:xfrm>
-          <a:prstGeom prst="rect">
-            <a:avLst/>
-          </a:prstGeom>
-          <a:noFill/>
-        </p:spPr>
-        <p:txBody>
-          <a:bodyPr wrap="square" rtlCol="0">
-            <a:spAutoFit/>
-          </a:bodyPr>
-          <a:lstStyle/>
-          <a:p>
-            <a:pPr algn="r"/>
-            <a:r>
-              <a:rPr lang="en-US" sz="1700" dirty="0"/>
-              <a:t>0.4</a:t>
-            </a:r>
-          </a:p>
-        </p:txBody>
-      </p:sp>
-      <p:sp>
-        <p:nvSpPr>
-          <p:cNvPr id="40" name="TextBox 39">
-            <a:extLst>
-              <a:ext uri="{FF2B5EF4-FFF2-40B4-BE49-F238E27FC236}">
-                <a16:creationId xmlns:a16="http://schemas.microsoft.com/office/drawing/2014/main" id="{F8712D38-3D4C-C2B8-FF52-8AF53D81F801}"/>
-              </a:ext>
-            </a:extLst>
-          </p:cNvPr>
-          <p:cNvSpPr txBox="1"/>
-          <p:nvPr/>
-        </p:nvSpPr>
-        <p:spPr>
-          <a:xfrm>
-            <a:off x="6986591" y="18755797"/>
-            <a:ext cx="610163" cy="353943"/>
-          </a:xfrm>
-          <a:prstGeom prst="rect">
-            <a:avLst/>
-          </a:prstGeom>
-          <a:noFill/>
-        </p:spPr>
-        <p:txBody>
-          <a:bodyPr wrap="square" rtlCol="0">
-            <a:spAutoFit/>
-          </a:bodyPr>
-          <a:lstStyle/>
-          <a:p>
-            <a:pPr algn="r"/>
-            <a:r>
-              <a:rPr lang="en-US" sz="1700" dirty="0"/>
-              <a:t>0.2</a:t>
-            </a:r>
-          </a:p>
-        </p:txBody>
-      </p:sp>
-      <p:sp>
-        <p:nvSpPr>
-          <p:cNvPr id="41" name="TextBox 40">
-            <a:extLst>
-              <a:ext uri="{FF2B5EF4-FFF2-40B4-BE49-F238E27FC236}">
-                <a16:creationId xmlns:a16="http://schemas.microsoft.com/office/drawing/2014/main" id="{3D6A42BA-85D2-0010-D74F-52337FD5F058}"/>
-              </a:ext>
-            </a:extLst>
-          </p:cNvPr>
-          <p:cNvSpPr txBox="1"/>
-          <p:nvPr/>
-        </p:nvSpPr>
-        <p:spPr>
-          <a:xfrm>
-            <a:off x="6986586" y="19185359"/>
-            <a:ext cx="610163" cy="353943"/>
-          </a:xfrm>
-          <a:prstGeom prst="rect">
-            <a:avLst/>
-          </a:prstGeom>
-          <a:noFill/>
-        </p:spPr>
-        <p:txBody>
-          <a:bodyPr wrap="square" rtlCol="0">
-            <a:spAutoFit/>
-          </a:bodyPr>
-          <a:lstStyle/>
-          <a:p>
-            <a:pPr algn="r"/>
-            <a:r>
-              <a:rPr lang="en-US" sz="1700" dirty="0"/>
-              <a:t>0</a:t>
-            </a:r>
-          </a:p>
-        </p:txBody>
-      </p:sp>
-      <p:sp>
-        <p:nvSpPr>
-          <p:cNvPr id="42" name="TextBox 41">
-            <a:extLst>
-              <a:ext uri="{FF2B5EF4-FFF2-40B4-BE49-F238E27FC236}">
-                <a16:creationId xmlns:a16="http://schemas.microsoft.com/office/drawing/2014/main" id="{58E54E5A-42BA-961A-3269-7B3F9C2E808C}"/>
-              </a:ext>
-            </a:extLst>
-          </p:cNvPr>
-          <p:cNvSpPr txBox="1"/>
-          <p:nvPr/>
-        </p:nvSpPr>
-        <p:spPr>
-          <a:xfrm>
-            <a:off x="7667626" y="19785437"/>
-            <a:ext cx="409575" cy="353943"/>
-          </a:xfrm>
-          <a:prstGeom prst="rect">
-            <a:avLst/>
-          </a:prstGeom>
-          <a:noFill/>
-        </p:spPr>
-        <p:txBody>
-          <a:bodyPr wrap="square" rtlCol="0">
-            <a:spAutoFit/>
-          </a:bodyPr>
-          <a:lstStyle/>
-          <a:p>
-            <a:pPr algn="ctr"/>
-            <a:r>
-              <a:rPr lang="en-US" sz="1700" dirty="0"/>
-              <a:t>2</a:t>
-            </a:r>
-          </a:p>
-        </p:txBody>
-      </p:sp>
-      <p:sp>
-        <p:nvSpPr>
-          <p:cNvPr id="43" name="TextBox 42">
-            <a:extLst>
-              <a:ext uri="{FF2B5EF4-FFF2-40B4-BE49-F238E27FC236}">
-                <a16:creationId xmlns:a16="http://schemas.microsoft.com/office/drawing/2014/main" id="{A0AA1698-EF4A-0068-DF0A-F1EAB2FCF439}"/>
-              </a:ext>
-            </a:extLst>
-          </p:cNvPr>
-          <p:cNvSpPr txBox="1"/>
-          <p:nvPr/>
-        </p:nvSpPr>
-        <p:spPr>
-          <a:xfrm>
-            <a:off x="8139114" y="19785437"/>
-            <a:ext cx="409575" cy="353943"/>
-          </a:xfrm>
-          <a:prstGeom prst="rect">
-            <a:avLst/>
-          </a:prstGeom>
-          <a:noFill/>
-        </p:spPr>
-        <p:txBody>
-          <a:bodyPr wrap="square" rtlCol="0">
-            <a:spAutoFit/>
-          </a:bodyPr>
-          <a:lstStyle/>
-          <a:p>
-            <a:pPr algn="ctr"/>
-            <a:r>
-              <a:rPr lang="en-US" sz="1700" dirty="0"/>
-              <a:t>4</a:t>
-            </a:r>
-          </a:p>
-        </p:txBody>
-      </p:sp>
-      <p:sp>
-        <p:nvSpPr>
-          <p:cNvPr id="44" name="TextBox 43">
-            <a:extLst>
-              <a:ext uri="{FF2B5EF4-FFF2-40B4-BE49-F238E27FC236}">
-                <a16:creationId xmlns:a16="http://schemas.microsoft.com/office/drawing/2014/main" id="{DF32341A-CC33-D9AD-8D4A-89E32BE78EC2}"/>
-              </a:ext>
-            </a:extLst>
-          </p:cNvPr>
-          <p:cNvSpPr txBox="1"/>
-          <p:nvPr/>
-        </p:nvSpPr>
-        <p:spPr>
-          <a:xfrm>
-            <a:off x="8610602" y="19785437"/>
-            <a:ext cx="409575" cy="353943"/>
-          </a:xfrm>
-          <a:prstGeom prst="rect">
-            <a:avLst/>
-          </a:prstGeom>
-          <a:noFill/>
-        </p:spPr>
-        <p:txBody>
-          <a:bodyPr wrap="square" rtlCol="0">
-            <a:spAutoFit/>
-          </a:bodyPr>
-          <a:lstStyle/>
-          <a:p>
-            <a:pPr algn="ctr"/>
-            <a:r>
-              <a:rPr lang="en-US" sz="1700" dirty="0"/>
-              <a:t>6</a:t>
-            </a:r>
-          </a:p>
-        </p:txBody>
-      </p:sp>
-      <p:sp>
-        <p:nvSpPr>
-          <p:cNvPr id="45" name="TextBox 44">
-            <a:extLst>
-              <a:ext uri="{FF2B5EF4-FFF2-40B4-BE49-F238E27FC236}">
-                <a16:creationId xmlns:a16="http://schemas.microsoft.com/office/drawing/2014/main" id="{A88F19DA-CEEB-CB24-C0E1-8208BA61A3ED}"/>
-              </a:ext>
-            </a:extLst>
-          </p:cNvPr>
-          <p:cNvSpPr txBox="1"/>
-          <p:nvPr/>
-        </p:nvSpPr>
-        <p:spPr>
-          <a:xfrm>
-            <a:off x="9084471" y="19785437"/>
-            <a:ext cx="409575" cy="353943"/>
-          </a:xfrm>
-          <a:prstGeom prst="rect">
-            <a:avLst/>
-          </a:prstGeom>
-          <a:noFill/>
-        </p:spPr>
-        <p:txBody>
-          <a:bodyPr wrap="square" rtlCol="0">
-            <a:spAutoFit/>
-          </a:bodyPr>
-          <a:lstStyle/>
-          <a:p>
-            <a:pPr algn="ctr"/>
-            <a:r>
-              <a:rPr lang="en-US" sz="1700" dirty="0"/>
-              <a:t>8</a:t>
-            </a:r>
-          </a:p>
-        </p:txBody>
-      </p:sp>
-      <p:sp>
-        <p:nvSpPr>
-          <p:cNvPr id="46" name="TextBox 45">
-            <a:extLst>
-              <a:ext uri="{FF2B5EF4-FFF2-40B4-BE49-F238E27FC236}">
-                <a16:creationId xmlns:a16="http://schemas.microsoft.com/office/drawing/2014/main" id="{75FBE407-9526-1888-A0DF-2A41E0556D7A}"/>
-              </a:ext>
-            </a:extLst>
-          </p:cNvPr>
-          <p:cNvSpPr txBox="1"/>
-          <p:nvPr/>
-        </p:nvSpPr>
-        <p:spPr>
-          <a:xfrm>
-            <a:off x="9535989" y="19785437"/>
-            <a:ext cx="448592" cy="353943"/>
-          </a:xfrm>
-          <a:prstGeom prst="rect">
-            <a:avLst/>
-          </a:prstGeom>
-          <a:noFill/>
-        </p:spPr>
-        <p:txBody>
-          <a:bodyPr wrap="square" rtlCol="0">
-            <a:spAutoFit/>
-          </a:bodyPr>
-          <a:lstStyle/>
-          <a:p>
-            <a:pPr algn="ctr"/>
-            <a:r>
-              <a:rPr lang="en-US" sz="1700" dirty="0"/>
-              <a:t>10</a:t>
-            </a:r>
-          </a:p>
-        </p:txBody>
-      </p:sp>
-      <p:sp>
-        <p:nvSpPr>
-          <p:cNvPr id="47" name="TextBox 46">
-            <a:extLst>
-              <a:ext uri="{FF2B5EF4-FFF2-40B4-BE49-F238E27FC236}">
-                <a16:creationId xmlns:a16="http://schemas.microsoft.com/office/drawing/2014/main" id="{B913B91D-B99D-C05F-0BAD-48CD345A016C}"/>
-              </a:ext>
-            </a:extLst>
-          </p:cNvPr>
-          <p:cNvSpPr txBox="1"/>
-          <p:nvPr/>
-        </p:nvSpPr>
-        <p:spPr>
-          <a:xfrm>
-            <a:off x="10007476" y="19785437"/>
-            <a:ext cx="448592" cy="353943"/>
-          </a:xfrm>
-          <a:prstGeom prst="rect">
-            <a:avLst/>
-          </a:prstGeom>
-          <a:noFill/>
-        </p:spPr>
-        <p:txBody>
-          <a:bodyPr wrap="square" rtlCol="0">
-            <a:spAutoFit/>
-          </a:bodyPr>
-          <a:lstStyle/>
-          <a:p>
-            <a:pPr algn="ctr"/>
-            <a:r>
-              <a:rPr lang="en-US" sz="1700" dirty="0"/>
-              <a:t>12</a:t>
-            </a:r>
-          </a:p>
-        </p:txBody>
-      </p:sp>
-      <p:sp>
-        <p:nvSpPr>
-          <p:cNvPr id="48" name="TextBox 47">
-            <a:extLst>
-              <a:ext uri="{FF2B5EF4-FFF2-40B4-BE49-F238E27FC236}">
-                <a16:creationId xmlns:a16="http://schemas.microsoft.com/office/drawing/2014/main" id="{4CCFB58B-B2D9-E620-BE98-4626FD49553B}"/>
-              </a:ext>
-            </a:extLst>
-          </p:cNvPr>
-          <p:cNvSpPr txBox="1"/>
-          <p:nvPr/>
-        </p:nvSpPr>
-        <p:spPr>
-          <a:xfrm>
-            <a:off x="10478963" y="19785437"/>
-            <a:ext cx="448592" cy="353943"/>
-          </a:xfrm>
-          <a:prstGeom prst="rect">
-            <a:avLst/>
-          </a:prstGeom>
-          <a:noFill/>
-        </p:spPr>
-        <p:txBody>
-          <a:bodyPr wrap="square" rtlCol="0">
-            <a:spAutoFit/>
-          </a:bodyPr>
-          <a:lstStyle/>
-          <a:p>
-            <a:pPr algn="ctr"/>
-            <a:r>
-              <a:rPr lang="en-US" sz="1700" dirty="0"/>
-              <a:t>14</a:t>
-            </a:r>
-          </a:p>
-        </p:txBody>
-      </p:sp>
-      <p:sp>
-        <p:nvSpPr>
-          <p:cNvPr id="49" name="TextBox 48">
-            <a:extLst>
-              <a:ext uri="{FF2B5EF4-FFF2-40B4-BE49-F238E27FC236}">
-                <a16:creationId xmlns:a16="http://schemas.microsoft.com/office/drawing/2014/main" id="{F61746E6-58B0-4625-D634-6615C4A163BF}"/>
-              </a:ext>
-            </a:extLst>
-          </p:cNvPr>
-          <p:cNvSpPr txBox="1"/>
-          <p:nvPr/>
-        </p:nvSpPr>
-        <p:spPr>
-          <a:xfrm>
-            <a:off x="10949992" y="19785306"/>
-            <a:ext cx="448592" cy="353943"/>
-          </a:xfrm>
-          <a:prstGeom prst="rect">
-            <a:avLst/>
-          </a:prstGeom>
-          <a:noFill/>
-        </p:spPr>
-        <p:txBody>
-          <a:bodyPr wrap="square" rtlCol="0">
-            <a:spAutoFit/>
-          </a:bodyPr>
-          <a:lstStyle/>
-          <a:p>
-            <a:pPr algn="ctr"/>
-            <a:r>
-              <a:rPr lang="en-US" sz="1700" dirty="0"/>
-              <a:t>16</a:t>
-            </a:r>
-          </a:p>
-        </p:txBody>
-      </p:sp>
-      <p:sp>
-        <p:nvSpPr>
-          <p:cNvPr id="50" name="TextBox 49">
-            <a:extLst>
-              <a:ext uri="{FF2B5EF4-FFF2-40B4-BE49-F238E27FC236}">
-                <a16:creationId xmlns:a16="http://schemas.microsoft.com/office/drawing/2014/main" id="{2320AA32-611B-013F-2D95-6605F91767B2}"/>
-              </a:ext>
-            </a:extLst>
-          </p:cNvPr>
-          <p:cNvSpPr txBox="1"/>
-          <p:nvPr/>
-        </p:nvSpPr>
-        <p:spPr>
-          <a:xfrm>
-            <a:off x="11420518" y="19785306"/>
-            <a:ext cx="448592" cy="353943"/>
-          </a:xfrm>
-          <a:prstGeom prst="rect">
-            <a:avLst/>
-          </a:prstGeom>
-          <a:noFill/>
-        </p:spPr>
-        <p:txBody>
-          <a:bodyPr wrap="square" rtlCol="0">
-            <a:spAutoFit/>
-          </a:bodyPr>
-          <a:lstStyle/>
-          <a:p>
-            <a:pPr algn="ctr"/>
-            <a:r>
-              <a:rPr lang="en-US" sz="1700" dirty="0"/>
-              <a:t>18</a:t>
-            </a:r>
-          </a:p>
-        </p:txBody>
-      </p:sp>
-      <p:sp>
-        <p:nvSpPr>
-          <p:cNvPr id="51" name="TextBox 50">
-            <a:extLst>
-              <a:ext uri="{FF2B5EF4-FFF2-40B4-BE49-F238E27FC236}">
-                <a16:creationId xmlns:a16="http://schemas.microsoft.com/office/drawing/2014/main" id="{40D132F6-E45E-5F45-D6AD-4E9741027D71}"/>
-              </a:ext>
-            </a:extLst>
-          </p:cNvPr>
-          <p:cNvSpPr txBox="1"/>
-          <p:nvPr/>
-        </p:nvSpPr>
-        <p:spPr>
-          <a:xfrm>
-            <a:off x="11891551" y="19785306"/>
-            <a:ext cx="448592" cy="353943"/>
-          </a:xfrm>
-          <a:prstGeom prst="rect">
-            <a:avLst/>
-          </a:prstGeom>
-          <a:noFill/>
-        </p:spPr>
-        <p:txBody>
-          <a:bodyPr wrap="square" rtlCol="0">
-            <a:spAutoFit/>
-          </a:bodyPr>
-          <a:lstStyle/>
-          <a:p>
-            <a:pPr algn="ctr"/>
-            <a:r>
-              <a:rPr lang="en-US" sz="1700" dirty="0"/>
-              <a:t>20</a:t>
-            </a:r>
-          </a:p>
-        </p:txBody>
-      </p:sp>
-      <p:sp>
-        <p:nvSpPr>
-          <p:cNvPr id="52" name="TextBox 51">
-            <a:extLst>
-              <a:ext uri="{FF2B5EF4-FFF2-40B4-BE49-F238E27FC236}">
-                <a16:creationId xmlns:a16="http://schemas.microsoft.com/office/drawing/2014/main" id="{8E77A68D-2F50-2A3B-3606-45CF3B1EF216}"/>
-              </a:ext>
-            </a:extLst>
-          </p:cNvPr>
-          <p:cNvSpPr txBox="1"/>
-          <p:nvPr/>
-        </p:nvSpPr>
-        <p:spPr>
-          <a:xfrm>
-            <a:off x="13256513" y="19785306"/>
-            <a:ext cx="409575" cy="353943"/>
-          </a:xfrm>
-          <a:prstGeom prst="rect">
-            <a:avLst/>
-          </a:prstGeom>
-          <a:noFill/>
-        </p:spPr>
-        <p:txBody>
-          <a:bodyPr wrap="square" rtlCol="0">
-            <a:spAutoFit/>
-          </a:bodyPr>
-          <a:lstStyle/>
-          <a:p>
-            <a:pPr algn="ctr"/>
-            <a:r>
-              <a:rPr lang="en-US" sz="1700" dirty="0"/>
-              <a:t>2</a:t>
-            </a:r>
-          </a:p>
-        </p:txBody>
-      </p:sp>
-      <p:sp>
-        <p:nvSpPr>
-          <p:cNvPr id="53" name="TextBox 52">
-            <a:extLst>
-              <a:ext uri="{FF2B5EF4-FFF2-40B4-BE49-F238E27FC236}">
-                <a16:creationId xmlns:a16="http://schemas.microsoft.com/office/drawing/2014/main" id="{50427FF1-00DC-B79B-96A1-197168DAAEDF}"/>
-              </a:ext>
-            </a:extLst>
-          </p:cNvPr>
-          <p:cNvSpPr txBox="1"/>
-          <p:nvPr/>
-        </p:nvSpPr>
-        <p:spPr>
-          <a:xfrm>
-            <a:off x="13728001" y="19785306"/>
-            <a:ext cx="409575" cy="353943"/>
-          </a:xfrm>
-          <a:prstGeom prst="rect">
-            <a:avLst/>
-          </a:prstGeom>
-          <a:noFill/>
-        </p:spPr>
-        <p:txBody>
-          <a:bodyPr wrap="square" rtlCol="0">
-            <a:spAutoFit/>
-          </a:bodyPr>
-          <a:lstStyle/>
-          <a:p>
-            <a:pPr algn="ctr"/>
-            <a:r>
-              <a:rPr lang="en-US" sz="1700" dirty="0"/>
-              <a:t>4</a:t>
-            </a:r>
-          </a:p>
-        </p:txBody>
-      </p:sp>
-      <p:sp>
-        <p:nvSpPr>
-          <p:cNvPr id="54" name="TextBox 53">
-            <a:extLst>
-              <a:ext uri="{FF2B5EF4-FFF2-40B4-BE49-F238E27FC236}">
-                <a16:creationId xmlns:a16="http://schemas.microsoft.com/office/drawing/2014/main" id="{246F7FF8-E5A4-596D-74A1-0A4EC80F9A8C}"/>
-              </a:ext>
-            </a:extLst>
-          </p:cNvPr>
-          <p:cNvSpPr txBox="1"/>
-          <p:nvPr/>
-        </p:nvSpPr>
-        <p:spPr>
-          <a:xfrm>
-            <a:off x="14197108" y="19785306"/>
-            <a:ext cx="409575" cy="353943"/>
-          </a:xfrm>
-          <a:prstGeom prst="rect">
-            <a:avLst/>
-          </a:prstGeom>
-          <a:noFill/>
-        </p:spPr>
-        <p:txBody>
-          <a:bodyPr wrap="square" rtlCol="0">
-            <a:spAutoFit/>
-          </a:bodyPr>
-          <a:lstStyle/>
-          <a:p>
-            <a:pPr algn="ctr"/>
-            <a:r>
-              <a:rPr lang="en-US" sz="1700" dirty="0"/>
-              <a:t>6</a:t>
-            </a:r>
-          </a:p>
-        </p:txBody>
-      </p:sp>
-      <p:sp>
-        <p:nvSpPr>
-          <p:cNvPr id="55" name="TextBox 54">
-            <a:extLst>
-              <a:ext uri="{FF2B5EF4-FFF2-40B4-BE49-F238E27FC236}">
-                <a16:creationId xmlns:a16="http://schemas.microsoft.com/office/drawing/2014/main" id="{0CC4B3A4-C8E7-703A-9C1A-C7047CD324B6}"/>
-              </a:ext>
-            </a:extLst>
-          </p:cNvPr>
-          <p:cNvSpPr txBox="1"/>
-          <p:nvPr/>
-        </p:nvSpPr>
-        <p:spPr>
-          <a:xfrm>
-            <a:off x="14670977" y="19785306"/>
-            <a:ext cx="409575" cy="353943"/>
-          </a:xfrm>
-          <a:prstGeom prst="rect">
-            <a:avLst/>
-          </a:prstGeom>
-          <a:noFill/>
-        </p:spPr>
-        <p:txBody>
-          <a:bodyPr wrap="square" rtlCol="0">
-            <a:spAutoFit/>
-          </a:bodyPr>
-          <a:lstStyle/>
-          <a:p>
-            <a:pPr algn="ctr"/>
-            <a:r>
-              <a:rPr lang="en-US" sz="1700" dirty="0"/>
-              <a:t>8</a:t>
-            </a:r>
-          </a:p>
-        </p:txBody>
-      </p:sp>
-      <p:sp>
-        <p:nvSpPr>
-          <p:cNvPr id="57" name="TextBox 56">
-            <a:extLst>
-              <a:ext uri="{FF2B5EF4-FFF2-40B4-BE49-F238E27FC236}">
-                <a16:creationId xmlns:a16="http://schemas.microsoft.com/office/drawing/2014/main" id="{42A41D43-7F03-6E08-547C-C69E4E65356A}"/>
-              </a:ext>
-            </a:extLst>
-          </p:cNvPr>
-          <p:cNvSpPr txBox="1"/>
-          <p:nvPr/>
-        </p:nvSpPr>
-        <p:spPr>
-          <a:xfrm>
-            <a:off x="15122495" y="19785306"/>
-            <a:ext cx="448592" cy="353943"/>
-          </a:xfrm>
-          <a:prstGeom prst="rect">
-            <a:avLst/>
-          </a:prstGeom>
-          <a:noFill/>
-        </p:spPr>
-        <p:txBody>
-          <a:bodyPr wrap="square" rtlCol="0">
-            <a:spAutoFit/>
-          </a:bodyPr>
-          <a:lstStyle/>
-          <a:p>
-            <a:pPr algn="ctr"/>
-            <a:r>
-              <a:rPr lang="en-US" sz="1700" dirty="0"/>
-              <a:t>10</a:t>
-            </a:r>
-          </a:p>
-        </p:txBody>
-      </p:sp>
-      <p:sp>
-        <p:nvSpPr>
-          <p:cNvPr id="76" name="TextBox 75">
-            <a:extLst>
-              <a:ext uri="{FF2B5EF4-FFF2-40B4-BE49-F238E27FC236}">
-                <a16:creationId xmlns:a16="http://schemas.microsoft.com/office/drawing/2014/main" id="{A8E9DAC3-1D30-D93A-A21F-37DA937F2546}"/>
-              </a:ext>
-            </a:extLst>
-          </p:cNvPr>
-          <p:cNvSpPr txBox="1"/>
-          <p:nvPr/>
-        </p:nvSpPr>
-        <p:spPr>
-          <a:xfrm>
-            <a:off x="15593982" y="19785306"/>
-            <a:ext cx="448592" cy="353943"/>
-          </a:xfrm>
-          <a:prstGeom prst="rect">
-            <a:avLst/>
-          </a:prstGeom>
-          <a:noFill/>
-        </p:spPr>
-        <p:txBody>
-          <a:bodyPr wrap="square" rtlCol="0">
-            <a:spAutoFit/>
-          </a:bodyPr>
-          <a:lstStyle/>
-          <a:p>
-            <a:pPr algn="ctr"/>
-            <a:r>
-              <a:rPr lang="en-US" sz="1700" dirty="0"/>
-              <a:t>12</a:t>
-            </a:r>
-          </a:p>
-        </p:txBody>
-      </p:sp>
-      <p:sp>
-        <p:nvSpPr>
-          <p:cNvPr id="77" name="TextBox 76">
-            <a:extLst>
-              <a:ext uri="{FF2B5EF4-FFF2-40B4-BE49-F238E27FC236}">
-                <a16:creationId xmlns:a16="http://schemas.microsoft.com/office/drawing/2014/main" id="{0E07A0BD-9205-75A6-0E15-8D42DD00E8F1}"/>
-              </a:ext>
-            </a:extLst>
-          </p:cNvPr>
-          <p:cNvSpPr txBox="1"/>
-          <p:nvPr/>
-        </p:nvSpPr>
-        <p:spPr>
-          <a:xfrm>
-            <a:off x="16065469" y="19785306"/>
-            <a:ext cx="448592" cy="353943"/>
-          </a:xfrm>
-          <a:prstGeom prst="rect">
-            <a:avLst/>
-          </a:prstGeom>
-          <a:noFill/>
-        </p:spPr>
-        <p:txBody>
-          <a:bodyPr wrap="square" rtlCol="0">
-            <a:spAutoFit/>
-          </a:bodyPr>
-          <a:lstStyle/>
-          <a:p>
-            <a:pPr algn="ctr"/>
-            <a:r>
-              <a:rPr lang="en-US" sz="1700" dirty="0"/>
-              <a:t>14</a:t>
-            </a:r>
-          </a:p>
-        </p:txBody>
-      </p:sp>
-      <p:sp>
-        <p:nvSpPr>
-          <p:cNvPr id="78" name="TextBox 77">
-            <a:extLst>
-              <a:ext uri="{FF2B5EF4-FFF2-40B4-BE49-F238E27FC236}">
-                <a16:creationId xmlns:a16="http://schemas.microsoft.com/office/drawing/2014/main" id="{F6C98EFF-6C39-FED3-D7C4-A93F258F82C4}"/>
-              </a:ext>
-            </a:extLst>
-          </p:cNvPr>
-          <p:cNvSpPr txBox="1"/>
-          <p:nvPr/>
-        </p:nvSpPr>
-        <p:spPr>
-          <a:xfrm>
-            <a:off x="16536498" y="19785175"/>
-            <a:ext cx="448592" cy="353943"/>
-          </a:xfrm>
-          <a:prstGeom prst="rect">
-            <a:avLst/>
-          </a:prstGeom>
-          <a:noFill/>
-        </p:spPr>
-        <p:txBody>
-          <a:bodyPr wrap="square" rtlCol="0">
-            <a:spAutoFit/>
-          </a:bodyPr>
-          <a:lstStyle/>
-          <a:p>
-            <a:pPr algn="ctr"/>
-            <a:r>
-              <a:rPr lang="en-US" sz="1700" dirty="0"/>
-              <a:t>16</a:t>
-            </a:r>
-          </a:p>
-        </p:txBody>
-      </p:sp>
-      <p:sp>
-        <p:nvSpPr>
-          <p:cNvPr id="79" name="TextBox 78">
-            <a:extLst>
-              <a:ext uri="{FF2B5EF4-FFF2-40B4-BE49-F238E27FC236}">
-                <a16:creationId xmlns:a16="http://schemas.microsoft.com/office/drawing/2014/main" id="{6305F5BC-6DB7-AD97-A63A-EB460317C2D0}"/>
-              </a:ext>
-            </a:extLst>
-          </p:cNvPr>
-          <p:cNvSpPr txBox="1"/>
-          <p:nvPr/>
-        </p:nvSpPr>
-        <p:spPr>
-          <a:xfrm>
-            <a:off x="17007024" y="19785175"/>
-            <a:ext cx="448592" cy="353943"/>
-          </a:xfrm>
-          <a:prstGeom prst="rect">
-            <a:avLst/>
-          </a:prstGeom>
-          <a:noFill/>
-        </p:spPr>
-        <p:txBody>
-          <a:bodyPr wrap="square" rtlCol="0">
-            <a:spAutoFit/>
-          </a:bodyPr>
-          <a:lstStyle/>
-          <a:p>
-            <a:pPr algn="ctr"/>
-            <a:r>
-              <a:rPr lang="en-US" sz="1700" dirty="0"/>
-              <a:t>18</a:t>
-            </a:r>
-          </a:p>
-        </p:txBody>
-      </p:sp>
-      <p:sp>
-        <p:nvSpPr>
-          <p:cNvPr id="80" name="TextBox 79">
-            <a:extLst>
-              <a:ext uri="{FF2B5EF4-FFF2-40B4-BE49-F238E27FC236}">
-                <a16:creationId xmlns:a16="http://schemas.microsoft.com/office/drawing/2014/main" id="{3893787A-A067-E4EF-B62C-D18D1AFE8A19}"/>
-              </a:ext>
-            </a:extLst>
-          </p:cNvPr>
-          <p:cNvSpPr txBox="1"/>
-          <p:nvPr/>
-        </p:nvSpPr>
-        <p:spPr>
-          <a:xfrm>
-            <a:off x="17480438" y="19785175"/>
-            <a:ext cx="448592" cy="353943"/>
-          </a:xfrm>
-          <a:prstGeom prst="rect">
-            <a:avLst/>
-          </a:prstGeom>
-          <a:noFill/>
-        </p:spPr>
-        <p:txBody>
-          <a:bodyPr wrap="square" rtlCol="0">
-            <a:spAutoFit/>
-          </a:bodyPr>
-          <a:lstStyle/>
-          <a:p>
-            <a:pPr algn="ctr"/>
-            <a:r>
-              <a:rPr lang="en-US" sz="1700" dirty="0"/>
-              <a:t>20</a:t>
-            </a:r>
-          </a:p>
-        </p:txBody>
-      </p:sp>
-      <p:sp>
-        <p:nvSpPr>
-          <p:cNvPr id="81" name="TextBox 80">
-            <a:extLst>
-              <a:ext uri="{FF2B5EF4-FFF2-40B4-BE49-F238E27FC236}">
-                <a16:creationId xmlns:a16="http://schemas.microsoft.com/office/drawing/2014/main" id="{648C43FC-8E6E-89E6-F377-289C540004D6}"/>
-              </a:ext>
-            </a:extLst>
-          </p:cNvPr>
-          <p:cNvSpPr txBox="1"/>
-          <p:nvPr/>
-        </p:nvSpPr>
-        <p:spPr>
-          <a:xfrm>
-            <a:off x="12573180" y="14516123"/>
-            <a:ext cx="610163" cy="353943"/>
-          </a:xfrm>
-          <a:prstGeom prst="rect">
-            <a:avLst/>
-          </a:prstGeom>
-          <a:noFill/>
-        </p:spPr>
-        <p:txBody>
-          <a:bodyPr wrap="square" rtlCol="0">
-            <a:spAutoFit/>
-          </a:bodyPr>
-          <a:lstStyle/>
-          <a:p>
-            <a:pPr algn="r"/>
-            <a:r>
-              <a:rPr lang="en-US" sz="1700" dirty="0"/>
-              <a:t>1</a:t>
-            </a:r>
-          </a:p>
-        </p:txBody>
-      </p:sp>
-      <p:sp>
-        <p:nvSpPr>
-          <p:cNvPr id="83" name="TextBox 82">
-            <a:extLst>
-              <a:ext uri="{FF2B5EF4-FFF2-40B4-BE49-F238E27FC236}">
-                <a16:creationId xmlns:a16="http://schemas.microsoft.com/office/drawing/2014/main" id="{5D7C3265-3258-8236-A72F-A70834E02E64}"/>
-              </a:ext>
-            </a:extLst>
-          </p:cNvPr>
-          <p:cNvSpPr txBox="1"/>
-          <p:nvPr/>
-        </p:nvSpPr>
-        <p:spPr>
-          <a:xfrm>
-            <a:off x="12573177" y="15353202"/>
-            <a:ext cx="610163" cy="353943"/>
-          </a:xfrm>
-          <a:prstGeom prst="rect">
-            <a:avLst/>
-          </a:prstGeom>
-          <a:noFill/>
-        </p:spPr>
-        <p:txBody>
-          <a:bodyPr wrap="square" rtlCol="0">
-            <a:spAutoFit/>
-          </a:bodyPr>
-          <a:lstStyle/>
-          <a:p>
-            <a:pPr algn="r"/>
-            <a:r>
-              <a:rPr lang="en-US" sz="1700" dirty="0"/>
-              <a:t>0</a:t>
-            </a:r>
-          </a:p>
-        </p:txBody>
-      </p:sp>
-      <p:sp>
-        <p:nvSpPr>
-          <p:cNvPr id="84" name="TextBox 83">
-            <a:extLst>
-              <a:ext uri="{FF2B5EF4-FFF2-40B4-BE49-F238E27FC236}">
-                <a16:creationId xmlns:a16="http://schemas.microsoft.com/office/drawing/2014/main" id="{A94E758C-5A17-8A37-5B4D-ACA27F2C2531}"/>
-              </a:ext>
-            </a:extLst>
-          </p:cNvPr>
-          <p:cNvSpPr txBox="1"/>
-          <p:nvPr/>
-        </p:nvSpPr>
-        <p:spPr>
-          <a:xfrm>
-            <a:off x="12573175" y="15769301"/>
-            <a:ext cx="610163" cy="353943"/>
-          </a:xfrm>
-          <a:prstGeom prst="rect">
-            <a:avLst/>
-          </a:prstGeom>
-          <a:noFill/>
-        </p:spPr>
-        <p:txBody>
-          <a:bodyPr wrap="square" rtlCol="0">
-            <a:spAutoFit/>
-          </a:bodyPr>
-          <a:lstStyle/>
-          <a:p>
-            <a:pPr algn="r"/>
-            <a:r>
-              <a:rPr lang="en-US" sz="1700" dirty="0"/>
-              <a:t>-0.5</a:t>
-            </a:r>
-          </a:p>
-        </p:txBody>
-      </p:sp>
-      <p:sp>
-        <p:nvSpPr>
-          <p:cNvPr id="85" name="TextBox 84">
-            <a:extLst>
-              <a:ext uri="{FF2B5EF4-FFF2-40B4-BE49-F238E27FC236}">
-                <a16:creationId xmlns:a16="http://schemas.microsoft.com/office/drawing/2014/main" id="{9EEC0DD0-05E5-6047-8E13-3B53C45DC57D}"/>
-              </a:ext>
-            </a:extLst>
-          </p:cNvPr>
-          <p:cNvSpPr txBox="1"/>
-          <p:nvPr/>
-        </p:nvSpPr>
-        <p:spPr>
-          <a:xfrm>
-            <a:off x="12573175" y="16182573"/>
-            <a:ext cx="610163" cy="353943"/>
-          </a:xfrm>
-          <a:prstGeom prst="rect">
-            <a:avLst/>
-          </a:prstGeom>
-          <a:noFill/>
-        </p:spPr>
-        <p:txBody>
-          <a:bodyPr wrap="square" rtlCol="0">
-            <a:spAutoFit/>
-          </a:bodyPr>
-          <a:lstStyle/>
-          <a:p>
-            <a:pPr algn="r"/>
-            <a:r>
-              <a:rPr lang="en-US" sz="1700" dirty="0"/>
-              <a:t>-1.0</a:t>
-            </a:r>
-          </a:p>
-        </p:txBody>
-      </p:sp>
-      <p:sp>
-        <p:nvSpPr>
-          <p:cNvPr id="86" name="TextBox 85">
-            <a:extLst>
-              <a:ext uri="{FF2B5EF4-FFF2-40B4-BE49-F238E27FC236}">
-                <a16:creationId xmlns:a16="http://schemas.microsoft.com/office/drawing/2014/main" id="{6FFCAC7F-C389-22B3-82AE-3999CD0FA05C}"/>
-              </a:ext>
-            </a:extLst>
-          </p:cNvPr>
-          <p:cNvSpPr txBox="1"/>
-          <p:nvPr/>
-        </p:nvSpPr>
-        <p:spPr>
-          <a:xfrm>
-            <a:off x="12573175" y="17643090"/>
-            <a:ext cx="610163" cy="353943"/>
-          </a:xfrm>
-          <a:prstGeom prst="rect">
-            <a:avLst/>
-          </a:prstGeom>
-          <a:noFill/>
-        </p:spPr>
-        <p:txBody>
-          <a:bodyPr wrap="square" rtlCol="0">
-            <a:spAutoFit/>
-          </a:bodyPr>
-          <a:lstStyle/>
-          <a:p>
-            <a:pPr algn="r"/>
-            <a:r>
-              <a:rPr lang="en-US" sz="1700" dirty="0"/>
-              <a:t>0</a:t>
-            </a:r>
-          </a:p>
-        </p:txBody>
-      </p:sp>
-      <p:sp>
-        <p:nvSpPr>
-          <p:cNvPr id="87" name="TextBox 86">
-            <a:extLst>
-              <a:ext uri="{FF2B5EF4-FFF2-40B4-BE49-F238E27FC236}">
-                <a16:creationId xmlns:a16="http://schemas.microsoft.com/office/drawing/2014/main" id="{4C76EC0C-7B97-9540-A57C-E66DCFA0F2FC}"/>
-              </a:ext>
-            </a:extLst>
-          </p:cNvPr>
-          <p:cNvSpPr txBox="1"/>
-          <p:nvPr/>
-        </p:nvSpPr>
-        <p:spPr>
-          <a:xfrm>
-            <a:off x="12573174" y="18068714"/>
-            <a:ext cx="610163" cy="353943"/>
-          </a:xfrm>
-          <a:prstGeom prst="rect">
-            <a:avLst/>
-          </a:prstGeom>
-          <a:noFill/>
-        </p:spPr>
-        <p:txBody>
-          <a:bodyPr wrap="square" rtlCol="0">
-            <a:spAutoFit/>
-          </a:bodyPr>
-          <a:lstStyle/>
-          <a:p>
-            <a:pPr algn="r"/>
-            <a:r>
-              <a:rPr lang="en-US" sz="1700" dirty="0"/>
-              <a:t>-0.2</a:t>
-            </a:r>
-          </a:p>
-        </p:txBody>
-      </p:sp>
-      <p:sp>
-        <p:nvSpPr>
-          <p:cNvPr id="88" name="TextBox 87">
-            <a:extLst>
-              <a:ext uri="{FF2B5EF4-FFF2-40B4-BE49-F238E27FC236}">
-                <a16:creationId xmlns:a16="http://schemas.microsoft.com/office/drawing/2014/main" id="{263661ED-E62E-6455-0367-72CF8B33BE98}"/>
-              </a:ext>
-            </a:extLst>
-          </p:cNvPr>
-          <p:cNvSpPr txBox="1"/>
-          <p:nvPr/>
-        </p:nvSpPr>
-        <p:spPr>
-          <a:xfrm>
-            <a:off x="12573174" y="18494338"/>
-            <a:ext cx="610163" cy="353943"/>
-          </a:xfrm>
-          <a:prstGeom prst="rect">
-            <a:avLst/>
-          </a:prstGeom>
-          <a:noFill/>
-        </p:spPr>
-        <p:txBody>
-          <a:bodyPr wrap="square" rtlCol="0">
-            <a:spAutoFit/>
-          </a:bodyPr>
-          <a:lstStyle/>
-          <a:p>
-            <a:pPr algn="r"/>
-            <a:r>
-              <a:rPr lang="en-US" sz="1700" dirty="0"/>
-              <a:t>-0.4</a:t>
-            </a:r>
-          </a:p>
-        </p:txBody>
-      </p:sp>
-      <p:sp>
-        <p:nvSpPr>
-          <p:cNvPr id="89" name="TextBox 88">
-            <a:extLst>
-              <a:ext uri="{FF2B5EF4-FFF2-40B4-BE49-F238E27FC236}">
-                <a16:creationId xmlns:a16="http://schemas.microsoft.com/office/drawing/2014/main" id="{C187CAB4-6E16-6774-0B6D-B30DD9663F08}"/>
-              </a:ext>
-            </a:extLst>
-          </p:cNvPr>
-          <p:cNvSpPr txBox="1"/>
-          <p:nvPr/>
-        </p:nvSpPr>
-        <p:spPr>
-          <a:xfrm>
-            <a:off x="12573173" y="18919962"/>
-            <a:ext cx="610163" cy="353943"/>
-          </a:xfrm>
-          <a:prstGeom prst="rect">
-            <a:avLst/>
-          </a:prstGeom>
-          <a:noFill/>
-        </p:spPr>
-        <p:txBody>
-          <a:bodyPr wrap="square" rtlCol="0">
-            <a:spAutoFit/>
-          </a:bodyPr>
-          <a:lstStyle/>
-          <a:p>
-            <a:pPr algn="r"/>
-            <a:r>
-              <a:rPr lang="en-US" sz="1700" dirty="0"/>
-              <a:t>-0.6</a:t>
-            </a:r>
-          </a:p>
-        </p:txBody>
-      </p:sp>
-      <p:sp>
-        <p:nvSpPr>
-          <p:cNvPr id="90" name="TextBox 89">
-            <a:extLst>
-              <a:ext uri="{FF2B5EF4-FFF2-40B4-BE49-F238E27FC236}">
-                <a16:creationId xmlns:a16="http://schemas.microsoft.com/office/drawing/2014/main" id="{527C2AA7-19CD-00AA-C172-28006368477D}"/>
-              </a:ext>
-            </a:extLst>
-          </p:cNvPr>
-          <p:cNvSpPr txBox="1"/>
-          <p:nvPr/>
-        </p:nvSpPr>
-        <p:spPr>
-          <a:xfrm>
-            <a:off x="12573172" y="19344562"/>
-            <a:ext cx="610163" cy="353943"/>
-          </a:xfrm>
-          <a:prstGeom prst="rect">
-            <a:avLst/>
-          </a:prstGeom>
-          <a:noFill/>
-        </p:spPr>
-        <p:txBody>
-          <a:bodyPr wrap="square" rtlCol="0">
-            <a:spAutoFit/>
-          </a:bodyPr>
-          <a:lstStyle/>
-          <a:p>
-            <a:pPr algn="r"/>
-            <a:r>
-              <a:rPr lang="en-US" sz="1700" dirty="0"/>
-              <a:t>-0.8</a:t>
-            </a:r>
-          </a:p>
-        </p:txBody>
-      </p:sp>
-      <p:sp>
-        <p:nvSpPr>
-          <p:cNvPr id="132" name="TextBox 131">
-            <a:extLst>
-              <a:ext uri="{FF2B5EF4-FFF2-40B4-BE49-F238E27FC236}">
-                <a16:creationId xmlns:a16="http://schemas.microsoft.com/office/drawing/2014/main" id="{62CA3510-64B6-00FE-5788-C7078ADEBC17}"/>
-              </a:ext>
-            </a:extLst>
-          </p:cNvPr>
-          <p:cNvSpPr txBox="1"/>
-          <p:nvPr/>
-        </p:nvSpPr>
-        <p:spPr>
-          <a:xfrm>
-            <a:off x="3808483" y="18386423"/>
-            <a:ext cx="3178103" cy="400110"/>
-          </a:xfrm>
-          <a:prstGeom prst="rect">
-            <a:avLst/>
-          </a:prstGeom>
-          <a:noFill/>
-        </p:spPr>
-        <p:txBody>
-          <a:bodyPr wrap="square" rtlCol="0">
-            <a:spAutoFit/>
-          </a:bodyPr>
-          <a:lstStyle/>
-          <a:p>
-            <a:pPr algn="r"/>
-            <a:r>
-              <a:rPr lang="en-US" sz="2000" dirty="0"/>
-              <a:t>Sign-aligned </a:t>
-            </a:r>
-            <a:r>
-              <a:rPr lang="el-GR" sz="2000" dirty="0"/>
-              <a:t>β</a:t>
-            </a:r>
-            <a:r>
-              <a:rPr lang="en-US" sz="2000" dirty="0"/>
-              <a:t> </a:t>
-            </a:r>
-          </a:p>
-        </p:txBody>
-      </p:sp>
-      <p:sp>
-        <p:nvSpPr>
-          <p:cNvPr id="133" name="TextBox 132">
-            <a:extLst>
-              <a:ext uri="{FF2B5EF4-FFF2-40B4-BE49-F238E27FC236}">
-                <a16:creationId xmlns:a16="http://schemas.microsoft.com/office/drawing/2014/main" id="{11EBAC9A-F984-E13B-A48C-4B04B126BC07}"/>
-              </a:ext>
-            </a:extLst>
-          </p:cNvPr>
-          <p:cNvSpPr txBox="1"/>
-          <p:nvPr/>
-        </p:nvSpPr>
-        <p:spPr>
-          <a:xfrm>
-            <a:off x="7705730" y="13939863"/>
-            <a:ext cx="3178103" cy="400110"/>
-          </a:xfrm>
-          <a:prstGeom prst="rect">
-            <a:avLst/>
-          </a:prstGeom>
-          <a:noFill/>
-        </p:spPr>
-        <p:txBody>
-          <a:bodyPr wrap="square" rtlCol="0">
-            <a:spAutoFit/>
-          </a:bodyPr>
-          <a:lstStyle/>
-          <a:p>
-            <a:r>
-              <a:rPr lang="en-US" sz="2000" dirty="0"/>
-              <a:t>All species</a:t>
-            </a:r>
-          </a:p>
-        </p:txBody>
-      </p:sp>
-      <p:sp>
-        <p:nvSpPr>
-          <p:cNvPr id="134" name="TextBox 133">
-            <a:extLst>
-              <a:ext uri="{FF2B5EF4-FFF2-40B4-BE49-F238E27FC236}">
-                <a16:creationId xmlns:a16="http://schemas.microsoft.com/office/drawing/2014/main" id="{D16B6794-628B-A93B-8936-1D3B849DC8F3}"/>
-              </a:ext>
-            </a:extLst>
-          </p:cNvPr>
-          <p:cNvSpPr txBox="1"/>
-          <p:nvPr/>
-        </p:nvSpPr>
-        <p:spPr>
-          <a:xfrm>
-            <a:off x="7708111" y="17054745"/>
-            <a:ext cx="3178103" cy="400110"/>
-          </a:xfrm>
-          <a:prstGeom prst="rect">
-            <a:avLst/>
-          </a:prstGeom>
-          <a:noFill/>
-        </p:spPr>
-        <p:txBody>
-          <a:bodyPr wrap="square" rtlCol="0">
-            <a:spAutoFit/>
-          </a:bodyPr>
-          <a:lstStyle/>
-          <a:p>
-            <a:r>
-              <a:rPr lang="en-US" sz="2000" dirty="0"/>
-              <a:t>Actinopterygii</a:t>
-            </a:r>
-          </a:p>
-        </p:txBody>
-      </p:sp>
-      <p:sp>
-        <p:nvSpPr>
-          <p:cNvPr id="135" name="TextBox 134">
-            <a:extLst>
-              <a:ext uri="{FF2B5EF4-FFF2-40B4-BE49-F238E27FC236}">
-                <a16:creationId xmlns:a16="http://schemas.microsoft.com/office/drawing/2014/main" id="{FFF9ADF3-DB4B-3E2F-4CCB-7DA42D750A00}"/>
-              </a:ext>
-            </a:extLst>
-          </p:cNvPr>
-          <p:cNvSpPr txBox="1"/>
-          <p:nvPr/>
-        </p:nvSpPr>
-        <p:spPr>
-          <a:xfrm>
-            <a:off x="13294613" y="17054745"/>
-            <a:ext cx="3178103" cy="400110"/>
-          </a:xfrm>
-          <a:prstGeom prst="rect">
-            <a:avLst/>
-          </a:prstGeom>
-          <a:noFill/>
-        </p:spPr>
-        <p:txBody>
-          <a:bodyPr wrap="square" rtlCol="0">
-            <a:spAutoFit/>
-          </a:bodyPr>
-          <a:lstStyle/>
-          <a:p>
-            <a:r>
-              <a:rPr lang="en-US" sz="2000" dirty="0" err="1"/>
-              <a:t>Sauropsida</a:t>
-            </a:r>
-            <a:endParaRPr lang="en-US" sz="2000" dirty="0"/>
-          </a:p>
-        </p:txBody>
-      </p:sp>
-      <p:sp>
-        <p:nvSpPr>
-          <p:cNvPr id="136" name="TextBox 135">
-            <a:extLst>
-              <a:ext uri="{FF2B5EF4-FFF2-40B4-BE49-F238E27FC236}">
-                <a16:creationId xmlns:a16="http://schemas.microsoft.com/office/drawing/2014/main" id="{28E01B4B-AF74-EF20-96F2-E0E0002A17DA}"/>
-              </a:ext>
-            </a:extLst>
-          </p:cNvPr>
-          <p:cNvSpPr txBox="1"/>
-          <p:nvPr/>
-        </p:nvSpPr>
-        <p:spPr>
-          <a:xfrm>
-            <a:off x="13294616" y="13940076"/>
-            <a:ext cx="3178103" cy="400110"/>
-          </a:xfrm>
-          <a:prstGeom prst="rect">
-            <a:avLst/>
-          </a:prstGeom>
-          <a:noFill/>
-        </p:spPr>
-        <p:txBody>
-          <a:bodyPr wrap="square" rtlCol="0">
-            <a:spAutoFit/>
-          </a:bodyPr>
-          <a:lstStyle/>
-          <a:p>
-            <a:r>
-              <a:rPr lang="en-US" sz="2000" dirty="0"/>
-              <a:t>Mammalia</a:t>
-            </a:r>
-          </a:p>
-        </p:txBody>
-      </p:sp>
-      <p:grpSp>
-        <p:nvGrpSpPr>
-          <p:cNvPr id="138" name="Group 137">
-            <a:extLst>
-              <a:ext uri="{FF2B5EF4-FFF2-40B4-BE49-F238E27FC236}">
-                <a16:creationId xmlns:a16="http://schemas.microsoft.com/office/drawing/2014/main" id="{FDA4FC55-BEF5-6F07-D982-6B0EF7270BF9}"/>
+                <a16:creationId xmlns:a16="http://schemas.microsoft.com/office/drawing/2014/main" id="{B7F6CE2C-C9A8-BF0A-F4BA-1F957B8287AF}"/>
               </a:ext>
             </a:extLst>
           </p:cNvPr>
@@ -13796,18 +12039,18 @@
         </p:nvGrpSpPr>
         <p:grpSpPr>
           <a:xfrm>
-            <a:off x="18120111" y="16442122"/>
-            <a:ext cx="3874327" cy="3664947"/>
-            <a:chOff x="22145625" y="17185271"/>
-            <a:chExt cx="3830535" cy="5485773"/>
+            <a:off x="3808483" y="13939863"/>
+            <a:ext cx="18185955" cy="6199517"/>
+            <a:chOff x="3808483" y="13939863"/>
+            <a:chExt cx="18185955" cy="6199517"/>
           </a:xfrm>
         </p:grpSpPr>
         <p:pic>
           <p:nvPicPr>
-            <p:cNvPr id="139" name="Picture 138">
+            <p:cNvPr id="153" name="Picture 152">
               <a:extLst>
                 <a:ext uri="{FF2B5EF4-FFF2-40B4-BE49-F238E27FC236}">
-                  <a16:creationId xmlns:a16="http://schemas.microsoft.com/office/drawing/2014/main" id="{A56DAF45-7265-3578-F18D-43185F762BDE}"/>
+                  <a16:creationId xmlns:a16="http://schemas.microsoft.com/office/drawing/2014/main" id="{E924589F-BEE0-7847-629E-44909FBDECBD}"/>
                 </a:ext>
               </a:extLst>
             </p:cNvPr>
@@ -13817,16 +12060,109 @@
             <p:nvPr/>
           </p:nvPicPr>
           <p:blipFill>
-            <a:blip r:embed="rId7"/>
-            <a:srcRect l="86803" t="70725" r="1325" b="27543"/>
+            <a:blip r:embed="rId3"/>
+            <a:srcRect l="11009" t="13366" r="24228" b="21763"/>
             <a:stretch>
               <a:fillRect/>
             </a:stretch>
           </p:blipFill>
           <p:spPr>
-            <a:xfrm rot="16200000">
-              <a:off x="20511085" y="19669265"/>
-              <a:ext cx="4848226" cy="520165"/>
+            <a:xfrm>
+              <a:off x="7596741" y="14309131"/>
+              <a:ext cx="4743402" cy="2364826"/>
+            </a:xfrm>
+            <a:prstGeom prst="rect">
+              <a:avLst/>
+            </a:prstGeom>
+          </p:spPr>
+        </p:pic>
+        <p:pic>
+          <p:nvPicPr>
+            <p:cNvPr id="155" name="Picture 154">
+              <a:extLst>
+                <a:ext uri="{FF2B5EF4-FFF2-40B4-BE49-F238E27FC236}">
+                  <a16:creationId xmlns:a16="http://schemas.microsoft.com/office/drawing/2014/main" id="{EF4121B5-3F06-3233-812C-BE22CEB9956D}"/>
+                </a:ext>
+              </a:extLst>
+            </p:cNvPr>
+            <p:cNvPicPr>
+              <a:picLocks noChangeAspect="1"/>
+            </p:cNvPicPr>
+            <p:nvPr/>
+          </p:nvPicPr>
+          <p:blipFill>
+            <a:blip r:embed="rId4"/>
+            <a:srcRect l="11033" t="14256" r="24637" b="20873"/>
+            <a:stretch>
+              <a:fillRect/>
+            </a:stretch>
+          </p:blipFill>
+          <p:spPr>
+            <a:xfrm>
+              <a:off x="13183335" y="14339973"/>
+              <a:ext cx="4711741" cy="2364826"/>
+            </a:xfrm>
+            <a:prstGeom prst="rect">
+              <a:avLst/>
+            </a:prstGeom>
+          </p:spPr>
+        </p:pic>
+        <p:pic>
+          <p:nvPicPr>
+            <p:cNvPr id="157" name="Picture 156">
+              <a:extLst>
+                <a:ext uri="{FF2B5EF4-FFF2-40B4-BE49-F238E27FC236}">
+                  <a16:creationId xmlns:a16="http://schemas.microsoft.com/office/drawing/2014/main" id="{28B9251D-1C65-944C-38F5-1B496BB423E4}"/>
+                </a:ext>
+              </a:extLst>
+            </p:cNvPr>
+            <p:cNvPicPr>
+              <a:picLocks noChangeAspect="1"/>
+            </p:cNvPicPr>
+            <p:nvPr/>
+          </p:nvPicPr>
+          <p:blipFill>
+            <a:blip r:embed="rId5"/>
+            <a:srcRect l="11032" t="14265" r="24174" b="20891"/>
+            <a:stretch>
+              <a:fillRect/>
+            </a:stretch>
+          </p:blipFill>
+          <p:spPr>
+            <a:xfrm>
+              <a:off x="13183335" y="17454855"/>
+              <a:ext cx="4745695" cy="2363844"/>
+            </a:xfrm>
+            <a:prstGeom prst="rect">
+              <a:avLst/>
+            </a:prstGeom>
+          </p:spPr>
+        </p:pic>
+        <p:pic>
+          <p:nvPicPr>
+            <p:cNvPr id="159" name="Picture 158">
+              <a:extLst>
+                <a:ext uri="{FF2B5EF4-FFF2-40B4-BE49-F238E27FC236}">
+                  <a16:creationId xmlns:a16="http://schemas.microsoft.com/office/drawing/2014/main" id="{549BE2EB-98EE-ADC3-BADB-D736E57D32AD}"/>
+                </a:ext>
+              </a:extLst>
+            </p:cNvPr>
+            <p:cNvPicPr>
+              <a:picLocks noChangeAspect="1"/>
+            </p:cNvPicPr>
+            <p:nvPr/>
+          </p:nvPicPr>
+          <p:blipFill>
+            <a:blip r:embed="rId6"/>
+            <a:srcRect l="11010" t="14222" r="24390" b="20906"/>
+            <a:stretch>
+              <a:fillRect/>
+            </a:stretch>
+          </p:blipFill>
+          <p:spPr>
+            <a:xfrm>
+              <a:off x="7596741" y="17454855"/>
+              <a:ext cx="4731495" cy="2364826"/>
             </a:xfrm>
             <a:prstGeom prst="rect">
               <a:avLst/>
@@ -13835,10 +12171,10 @@
         </p:pic>
         <p:sp>
           <p:nvSpPr>
-            <p:cNvPr id="140" name="TextBox 139">
+            <p:cNvPr id="20" name="TextBox 19">
               <a:extLst>
                 <a:ext uri="{FF2B5EF4-FFF2-40B4-BE49-F238E27FC236}">
-                  <a16:creationId xmlns:a16="http://schemas.microsoft.com/office/drawing/2014/main" id="{DD5FCBCC-31FC-40B1-2299-1441D36793A8}"/>
+                  <a16:creationId xmlns:a16="http://schemas.microsoft.com/office/drawing/2014/main" id="{2F2EA852-FACC-800C-4A89-E45C5B32CFD2}"/>
                 </a:ext>
               </a:extLst>
             </p:cNvPr>
@@ -13846,9 +12182,413 @@
             <p:nvPr/>
           </p:nvSpPr>
           <p:spPr>
-            <a:xfrm rot="16200000">
-              <a:off x="19936762" y="19744488"/>
-              <a:ext cx="4817836" cy="400110"/>
+            <a:xfrm>
+              <a:off x="3808483" y="15157644"/>
+              <a:ext cx="3178103" cy="400110"/>
+            </a:xfrm>
+            <a:prstGeom prst="rect">
+              <a:avLst/>
+            </a:prstGeom>
+            <a:noFill/>
+          </p:spPr>
+          <p:txBody>
+            <a:bodyPr wrap="square" rtlCol="0">
+              <a:spAutoFit/>
+            </a:bodyPr>
+            <a:lstStyle/>
+            <a:p>
+              <a:pPr algn="r"/>
+              <a:r>
+                <a:rPr lang="en-US" sz="2000" dirty="0"/>
+                <a:t>Sign-aligned </a:t>
+              </a:r>
+              <a:r>
+                <a:rPr lang="el-GR" sz="2000" dirty="0"/>
+                <a:t>β</a:t>
+              </a:r>
+              <a:r>
+                <a:rPr lang="en-US" sz="2000" dirty="0"/>
+                <a:t> </a:t>
+              </a:r>
+            </a:p>
+          </p:txBody>
+        </p:sp>
+        <p:sp>
+          <p:nvSpPr>
+            <p:cNvPr id="82" name="TextBox 81">
+              <a:extLst>
+                <a:ext uri="{FF2B5EF4-FFF2-40B4-BE49-F238E27FC236}">
+                  <a16:creationId xmlns:a16="http://schemas.microsoft.com/office/drawing/2014/main" id="{3A20B51A-108D-838D-8A37-4F68A113ABBA}"/>
+                </a:ext>
+              </a:extLst>
+            </p:cNvPr>
+            <p:cNvSpPr txBox="1"/>
+            <p:nvPr/>
+          </p:nvSpPr>
+          <p:spPr>
+            <a:xfrm>
+              <a:off x="12573179" y="14934157"/>
+              <a:ext cx="610163" cy="353943"/>
+            </a:xfrm>
+            <a:prstGeom prst="rect">
+              <a:avLst/>
+            </a:prstGeom>
+            <a:noFill/>
+          </p:spPr>
+          <p:txBody>
+            <a:bodyPr wrap="square" rtlCol="0">
+              <a:spAutoFit/>
+            </a:bodyPr>
+            <a:lstStyle/>
+            <a:p>
+              <a:pPr algn="r"/>
+              <a:r>
+                <a:rPr lang="en-US" sz="1700" dirty="0"/>
+                <a:t>0.5</a:t>
+              </a:r>
+            </a:p>
+          </p:txBody>
+        </p:sp>
+        <p:sp>
+          <p:nvSpPr>
+            <p:cNvPr id="22" name="TextBox 21">
+              <a:extLst>
+                <a:ext uri="{FF2B5EF4-FFF2-40B4-BE49-F238E27FC236}">
+                  <a16:creationId xmlns:a16="http://schemas.microsoft.com/office/drawing/2014/main" id="{B2377443-FA5A-3B21-56E3-113829CA37C9}"/>
+                </a:ext>
+              </a:extLst>
+            </p:cNvPr>
+            <p:cNvSpPr txBox="1"/>
+            <p:nvPr/>
+          </p:nvSpPr>
+          <p:spPr>
+            <a:xfrm>
+              <a:off x="6986588" y="14391323"/>
+              <a:ext cx="610163" cy="353943"/>
+            </a:xfrm>
+            <a:prstGeom prst="rect">
+              <a:avLst/>
+            </a:prstGeom>
+            <a:noFill/>
+          </p:spPr>
+          <p:txBody>
+            <a:bodyPr wrap="square" rtlCol="0">
+              <a:spAutoFit/>
+            </a:bodyPr>
+            <a:lstStyle/>
+            <a:p>
+              <a:pPr algn="r"/>
+              <a:r>
+                <a:rPr lang="en-US" sz="1700" dirty="0"/>
+                <a:t>1.5</a:t>
+              </a:r>
+            </a:p>
+          </p:txBody>
+        </p:sp>
+        <p:sp>
+          <p:nvSpPr>
+            <p:cNvPr id="27" name="TextBox 26">
+              <a:extLst>
+                <a:ext uri="{FF2B5EF4-FFF2-40B4-BE49-F238E27FC236}">
+                  <a16:creationId xmlns:a16="http://schemas.microsoft.com/office/drawing/2014/main" id="{24F791D7-178E-4AD7-026F-5C3E2EDA136D}"/>
+                </a:ext>
+              </a:extLst>
+            </p:cNvPr>
+            <p:cNvSpPr txBox="1"/>
+            <p:nvPr/>
+          </p:nvSpPr>
+          <p:spPr>
+            <a:xfrm>
+              <a:off x="6986588" y="14931776"/>
+              <a:ext cx="610163" cy="353943"/>
+            </a:xfrm>
+            <a:prstGeom prst="rect">
+              <a:avLst/>
+            </a:prstGeom>
+            <a:noFill/>
+          </p:spPr>
+          <p:txBody>
+            <a:bodyPr wrap="square" rtlCol="0">
+              <a:spAutoFit/>
+            </a:bodyPr>
+            <a:lstStyle/>
+            <a:p>
+              <a:pPr algn="r"/>
+              <a:r>
+                <a:rPr lang="en-US" sz="1700" dirty="0"/>
+                <a:t>1</a:t>
+              </a:r>
+            </a:p>
+          </p:txBody>
+        </p:sp>
+        <p:sp>
+          <p:nvSpPr>
+            <p:cNvPr id="28" name="TextBox 27">
+              <a:extLst>
+                <a:ext uri="{FF2B5EF4-FFF2-40B4-BE49-F238E27FC236}">
+                  <a16:creationId xmlns:a16="http://schemas.microsoft.com/office/drawing/2014/main" id="{FE004D9D-D8D8-9DE9-2684-1F0613C8AF3D}"/>
+                </a:ext>
+              </a:extLst>
+            </p:cNvPr>
+            <p:cNvSpPr txBox="1"/>
+            <p:nvPr/>
+          </p:nvSpPr>
+          <p:spPr>
+            <a:xfrm>
+              <a:off x="6986587" y="15472569"/>
+              <a:ext cx="610163" cy="353943"/>
+            </a:xfrm>
+            <a:prstGeom prst="rect">
+              <a:avLst/>
+            </a:prstGeom>
+            <a:noFill/>
+          </p:spPr>
+          <p:txBody>
+            <a:bodyPr wrap="square" rtlCol="0">
+              <a:spAutoFit/>
+            </a:bodyPr>
+            <a:lstStyle/>
+            <a:p>
+              <a:pPr algn="r"/>
+              <a:r>
+                <a:rPr lang="en-US" sz="1700" dirty="0"/>
+                <a:t>0.5</a:t>
+              </a:r>
+            </a:p>
+          </p:txBody>
+        </p:sp>
+        <p:sp>
+          <p:nvSpPr>
+            <p:cNvPr id="29" name="TextBox 28">
+              <a:extLst>
+                <a:ext uri="{FF2B5EF4-FFF2-40B4-BE49-F238E27FC236}">
+                  <a16:creationId xmlns:a16="http://schemas.microsoft.com/office/drawing/2014/main" id="{5A6264A1-431A-69E2-CF50-96B767CFE2D8}"/>
+                </a:ext>
+              </a:extLst>
+            </p:cNvPr>
+            <p:cNvSpPr txBox="1"/>
+            <p:nvPr/>
+          </p:nvSpPr>
+          <p:spPr>
+            <a:xfrm>
+              <a:off x="6986589" y="16013113"/>
+              <a:ext cx="610163" cy="353943"/>
+            </a:xfrm>
+            <a:prstGeom prst="rect">
+              <a:avLst/>
+            </a:prstGeom>
+            <a:noFill/>
+          </p:spPr>
+          <p:txBody>
+            <a:bodyPr wrap="square" rtlCol="0">
+              <a:spAutoFit/>
+            </a:bodyPr>
+            <a:lstStyle/>
+            <a:p>
+              <a:pPr algn="r"/>
+              <a:r>
+                <a:rPr lang="en-US" sz="1700" dirty="0"/>
+                <a:t>0</a:t>
+              </a:r>
+            </a:p>
+          </p:txBody>
+        </p:sp>
+        <p:sp>
+          <p:nvSpPr>
+            <p:cNvPr id="33" name="TextBox 32">
+              <a:extLst>
+                <a:ext uri="{FF2B5EF4-FFF2-40B4-BE49-F238E27FC236}">
+                  <a16:creationId xmlns:a16="http://schemas.microsoft.com/office/drawing/2014/main" id="{9D3036E3-F38E-42CA-6838-4810968CC4D1}"/>
+                </a:ext>
+              </a:extLst>
+            </p:cNvPr>
+            <p:cNvSpPr txBox="1"/>
+            <p:nvPr/>
+          </p:nvSpPr>
+          <p:spPr>
+            <a:xfrm>
+              <a:off x="6986590" y="17463294"/>
+              <a:ext cx="610163" cy="353943"/>
+            </a:xfrm>
+            <a:prstGeom prst="rect">
+              <a:avLst/>
+            </a:prstGeom>
+            <a:noFill/>
+          </p:spPr>
+          <p:txBody>
+            <a:bodyPr wrap="square" rtlCol="0">
+              <a:spAutoFit/>
+            </a:bodyPr>
+            <a:lstStyle/>
+            <a:p>
+              <a:pPr algn="r"/>
+              <a:r>
+                <a:rPr lang="en-US" sz="1700" dirty="0"/>
+                <a:t>0.8</a:t>
+              </a:r>
+            </a:p>
+          </p:txBody>
+        </p:sp>
+        <p:sp>
+          <p:nvSpPr>
+            <p:cNvPr id="34" name="TextBox 33">
+              <a:extLst>
+                <a:ext uri="{FF2B5EF4-FFF2-40B4-BE49-F238E27FC236}">
+                  <a16:creationId xmlns:a16="http://schemas.microsoft.com/office/drawing/2014/main" id="{471E1563-E2D1-9D4D-75E4-8B7428CEC032}"/>
+                </a:ext>
+              </a:extLst>
+            </p:cNvPr>
+            <p:cNvSpPr txBox="1"/>
+            <p:nvPr/>
+          </p:nvSpPr>
+          <p:spPr>
+            <a:xfrm>
+              <a:off x="6986590" y="17892130"/>
+              <a:ext cx="610163" cy="353943"/>
+            </a:xfrm>
+            <a:prstGeom prst="rect">
+              <a:avLst/>
+            </a:prstGeom>
+            <a:noFill/>
+          </p:spPr>
+          <p:txBody>
+            <a:bodyPr wrap="square" rtlCol="0">
+              <a:spAutoFit/>
+            </a:bodyPr>
+            <a:lstStyle/>
+            <a:p>
+              <a:pPr algn="r"/>
+              <a:r>
+                <a:rPr lang="en-US" sz="1700" dirty="0"/>
+                <a:t>0.6</a:t>
+              </a:r>
+            </a:p>
+          </p:txBody>
+        </p:sp>
+        <p:sp>
+          <p:nvSpPr>
+            <p:cNvPr id="35" name="TextBox 34">
+              <a:extLst>
+                <a:ext uri="{FF2B5EF4-FFF2-40B4-BE49-F238E27FC236}">
+                  <a16:creationId xmlns:a16="http://schemas.microsoft.com/office/drawing/2014/main" id="{060C52B8-0EEA-6FE1-43C5-89D9C32443C1}"/>
+                </a:ext>
+              </a:extLst>
+            </p:cNvPr>
+            <p:cNvSpPr txBox="1"/>
+            <p:nvPr/>
+          </p:nvSpPr>
+          <p:spPr>
+            <a:xfrm>
+              <a:off x="6986592" y="18323136"/>
+              <a:ext cx="610163" cy="353943"/>
+            </a:xfrm>
+            <a:prstGeom prst="rect">
+              <a:avLst/>
+            </a:prstGeom>
+            <a:noFill/>
+          </p:spPr>
+          <p:txBody>
+            <a:bodyPr wrap="square" rtlCol="0">
+              <a:spAutoFit/>
+            </a:bodyPr>
+            <a:lstStyle/>
+            <a:p>
+              <a:pPr algn="r"/>
+              <a:r>
+                <a:rPr lang="en-US" sz="1700" dirty="0"/>
+                <a:t>0.4</a:t>
+              </a:r>
+            </a:p>
+          </p:txBody>
+        </p:sp>
+        <p:sp>
+          <p:nvSpPr>
+            <p:cNvPr id="40" name="TextBox 39">
+              <a:extLst>
+                <a:ext uri="{FF2B5EF4-FFF2-40B4-BE49-F238E27FC236}">
+                  <a16:creationId xmlns:a16="http://schemas.microsoft.com/office/drawing/2014/main" id="{F8712D38-3D4C-C2B8-FF52-8AF53D81F801}"/>
+                </a:ext>
+              </a:extLst>
+            </p:cNvPr>
+            <p:cNvSpPr txBox="1"/>
+            <p:nvPr/>
+          </p:nvSpPr>
+          <p:spPr>
+            <a:xfrm>
+              <a:off x="6986591" y="18755797"/>
+              <a:ext cx="610163" cy="353943"/>
+            </a:xfrm>
+            <a:prstGeom prst="rect">
+              <a:avLst/>
+            </a:prstGeom>
+            <a:noFill/>
+          </p:spPr>
+          <p:txBody>
+            <a:bodyPr wrap="square" rtlCol="0">
+              <a:spAutoFit/>
+            </a:bodyPr>
+            <a:lstStyle/>
+            <a:p>
+              <a:pPr algn="r"/>
+              <a:r>
+                <a:rPr lang="en-US" sz="1700" dirty="0"/>
+                <a:t>0.2</a:t>
+              </a:r>
+            </a:p>
+          </p:txBody>
+        </p:sp>
+        <p:sp>
+          <p:nvSpPr>
+            <p:cNvPr id="41" name="TextBox 40">
+              <a:extLst>
+                <a:ext uri="{FF2B5EF4-FFF2-40B4-BE49-F238E27FC236}">
+                  <a16:creationId xmlns:a16="http://schemas.microsoft.com/office/drawing/2014/main" id="{3D6A42BA-85D2-0010-D74F-52337FD5F058}"/>
+                </a:ext>
+              </a:extLst>
+            </p:cNvPr>
+            <p:cNvSpPr txBox="1"/>
+            <p:nvPr/>
+          </p:nvSpPr>
+          <p:spPr>
+            <a:xfrm>
+              <a:off x="6986586" y="19185359"/>
+              <a:ext cx="610163" cy="353943"/>
+            </a:xfrm>
+            <a:prstGeom prst="rect">
+              <a:avLst/>
+            </a:prstGeom>
+            <a:noFill/>
+          </p:spPr>
+          <p:txBody>
+            <a:bodyPr wrap="square" rtlCol="0">
+              <a:spAutoFit/>
+            </a:bodyPr>
+            <a:lstStyle/>
+            <a:p>
+              <a:pPr algn="r"/>
+              <a:r>
+                <a:rPr lang="en-US" sz="1700" dirty="0"/>
+                <a:t>0</a:t>
+              </a:r>
+            </a:p>
+          </p:txBody>
+        </p:sp>
+        <p:sp>
+          <p:nvSpPr>
+            <p:cNvPr id="42" name="TextBox 41">
+              <a:extLst>
+                <a:ext uri="{FF2B5EF4-FFF2-40B4-BE49-F238E27FC236}">
+                  <a16:creationId xmlns:a16="http://schemas.microsoft.com/office/drawing/2014/main" id="{58E54E5A-42BA-961A-3269-7B3F9C2E808C}"/>
+                </a:ext>
+              </a:extLst>
+            </p:cNvPr>
+            <p:cNvSpPr txBox="1"/>
+            <p:nvPr/>
+          </p:nvSpPr>
+          <p:spPr>
+            <a:xfrm>
+              <a:off x="7667626" y="19785437"/>
+              <a:ext cx="409575" cy="353943"/>
             </a:xfrm>
             <a:prstGeom prst="rect">
               <a:avLst/>
@@ -13863,18 +12603,18 @@
             <a:p>
               <a:pPr algn="ctr"/>
               <a:r>
-                <a:rPr lang="en-US" sz="2000" dirty="0"/>
-                <a:t>Variable importance</a:t>
+                <a:rPr lang="en-US" sz="1700" dirty="0"/>
+                <a:t>2</a:t>
               </a:r>
             </a:p>
           </p:txBody>
         </p:sp>
         <p:sp>
           <p:nvSpPr>
-            <p:cNvPr id="141" name="TextBox 140">
+            <p:cNvPr id="43" name="TextBox 42">
               <a:extLst>
                 <a:ext uri="{FF2B5EF4-FFF2-40B4-BE49-F238E27FC236}">
-                  <a16:creationId xmlns:a16="http://schemas.microsoft.com/office/drawing/2014/main" id="{2C9E65C7-DCA7-6082-1316-8715C26AF260}"/>
+                  <a16:creationId xmlns:a16="http://schemas.microsoft.com/office/drawing/2014/main" id="{A0AA1698-EF4A-0068-DF0A-F1EAB2FCF439}"/>
                 </a:ext>
               </a:extLst>
             </p:cNvPr>
@@ -13883,8 +12623,8 @@
           </p:nvSpPr>
           <p:spPr>
             <a:xfrm>
-              <a:off x="23417771" y="21980014"/>
-              <a:ext cx="2558389" cy="691030"/>
+              <a:off x="8139114" y="19785437"/>
+              <a:ext cx="409575" cy="353943"/>
             </a:xfrm>
             <a:prstGeom prst="rect">
               <a:avLst/>
@@ -13897,19 +12637,20 @@
             </a:bodyPr>
             <a:lstStyle/>
             <a:p>
+              <a:pPr algn="ctr"/>
               <a:r>
-                <a:rPr lang="en-US" sz="2400" dirty="0"/>
-                <a:t>0.5</a:t>
+                <a:rPr lang="en-US" sz="1700" dirty="0"/>
+                <a:t>4</a:t>
               </a:r>
             </a:p>
           </p:txBody>
         </p:sp>
         <p:sp>
           <p:nvSpPr>
-            <p:cNvPr id="142" name="TextBox 141">
+            <p:cNvPr id="44" name="TextBox 43">
               <a:extLst>
                 <a:ext uri="{FF2B5EF4-FFF2-40B4-BE49-F238E27FC236}">
-                  <a16:creationId xmlns:a16="http://schemas.microsoft.com/office/drawing/2014/main" id="{49B2B976-1933-8800-8B79-CED795CEE529}"/>
+                  <a16:creationId xmlns:a16="http://schemas.microsoft.com/office/drawing/2014/main" id="{DF32341A-CC33-D9AD-8D4A-89E32BE78EC2}"/>
                 </a:ext>
               </a:extLst>
             </p:cNvPr>
@@ -13918,8 +12659,8 @@
           </p:nvSpPr>
           <p:spPr>
             <a:xfrm>
-              <a:off x="23417771" y="17185271"/>
-              <a:ext cx="2558389" cy="691030"/>
+              <a:off x="8610602" y="19785437"/>
+              <a:ext cx="409575" cy="353943"/>
             </a:xfrm>
             <a:prstGeom prst="rect">
               <a:avLst/>
@@ -13932,19 +12673,20 @@
             </a:bodyPr>
             <a:lstStyle/>
             <a:p>
+              <a:pPr algn="ctr"/>
               <a:r>
-                <a:rPr lang="en-US" sz="2400" dirty="0"/>
-                <a:t>1</a:t>
+                <a:rPr lang="en-US" sz="1700" dirty="0"/>
+                <a:t>6</a:t>
               </a:r>
             </a:p>
           </p:txBody>
         </p:sp>
         <p:sp>
           <p:nvSpPr>
-            <p:cNvPr id="143" name="TextBox 142">
+            <p:cNvPr id="45" name="TextBox 44">
               <a:extLst>
                 <a:ext uri="{FF2B5EF4-FFF2-40B4-BE49-F238E27FC236}">
-                  <a16:creationId xmlns:a16="http://schemas.microsoft.com/office/drawing/2014/main" id="{3044ECCD-6842-910B-4B6F-E46472B73C5F}"/>
+                  <a16:creationId xmlns:a16="http://schemas.microsoft.com/office/drawing/2014/main" id="{A88F19DA-CEEB-CB24-C0E1-8208BA61A3ED}"/>
                 </a:ext>
               </a:extLst>
             </p:cNvPr>
@@ -13953,8 +12695,8 @@
           </p:nvSpPr>
           <p:spPr>
             <a:xfrm>
-              <a:off x="23417771" y="19584577"/>
-              <a:ext cx="2558389" cy="691030"/>
+              <a:off x="9084471" y="19785437"/>
+              <a:ext cx="409575" cy="353943"/>
             </a:xfrm>
             <a:prstGeom prst="rect">
               <a:avLst/>
@@ -13967,243 +12709,20 @@
             </a:bodyPr>
             <a:lstStyle/>
             <a:p>
+              <a:pPr algn="ctr"/>
               <a:r>
-                <a:rPr lang="en-US" sz="2400" dirty="0"/>
-                <a:t>0.75</a:t>
+                <a:rPr lang="en-US" sz="1700" dirty="0"/>
+                <a:t>8</a:t>
               </a:r>
             </a:p>
           </p:txBody>
         </p:sp>
-        <p:cxnSp>
-          <p:nvCxnSpPr>
-            <p:cNvPr id="144" name="Straight Connector 143">
+        <p:sp>
+          <p:nvSpPr>
+            <p:cNvPr id="46" name="TextBox 45">
               <a:extLst>
                 <a:ext uri="{FF2B5EF4-FFF2-40B4-BE49-F238E27FC236}">
-                  <a16:creationId xmlns:a16="http://schemas.microsoft.com/office/drawing/2014/main" id="{DEB058D9-3C8D-6528-72FE-B32F304565E2}"/>
-                </a:ext>
-              </a:extLst>
-            </p:cNvPr>
-            <p:cNvCxnSpPr>
-              <a:cxnSpLocks/>
-            </p:cNvCxnSpPr>
-            <p:nvPr/>
-          </p:nvCxnSpPr>
-          <p:spPr>
-            <a:xfrm>
-              <a:off x="23307993" y="17503500"/>
-              <a:ext cx="0" cy="4846367"/>
-            </a:xfrm>
-            <a:prstGeom prst="line">
-              <a:avLst/>
-            </a:prstGeom>
-            <a:ln w="38100">
-              <a:solidFill>
-                <a:schemeClr val="tx1"/>
-              </a:solidFill>
-            </a:ln>
-          </p:spPr>
-          <p:style>
-            <a:lnRef idx="1">
-              <a:schemeClr val="accent1"/>
-            </a:lnRef>
-            <a:fillRef idx="0">
-              <a:schemeClr val="accent1"/>
-            </a:fillRef>
-            <a:effectRef idx="0">
-              <a:schemeClr val="accent1"/>
-            </a:effectRef>
-            <a:fontRef idx="minor">
-              <a:schemeClr val="tx1"/>
-            </a:fontRef>
-          </p:style>
-        </p:cxnSp>
-        <p:cxnSp>
-          <p:nvCxnSpPr>
-            <p:cNvPr id="145" name="Straight Connector 144">
-              <a:extLst>
-                <a:ext uri="{FF2B5EF4-FFF2-40B4-BE49-F238E27FC236}">
-                  <a16:creationId xmlns:a16="http://schemas.microsoft.com/office/drawing/2014/main" id="{0A5F47FC-428B-F306-77A3-FED44CD5E6FE}"/>
-                </a:ext>
-              </a:extLst>
-            </p:cNvPr>
-            <p:cNvCxnSpPr>
-              <a:cxnSpLocks/>
-            </p:cNvCxnSpPr>
-            <p:nvPr/>
-          </p:nvCxnSpPr>
-          <p:spPr>
-            <a:xfrm flipH="1" flipV="1">
-              <a:off x="23324665" y="22320931"/>
-              <a:ext cx="121683" cy="1471"/>
-            </a:xfrm>
-            <a:prstGeom prst="line">
-              <a:avLst/>
-            </a:prstGeom>
-            <a:ln w="38100">
-              <a:solidFill>
-                <a:schemeClr val="tx1"/>
-              </a:solidFill>
-            </a:ln>
-          </p:spPr>
-          <p:style>
-            <a:lnRef idx="1">
-              <a:schemeClr val="accent1"/>
-            </a:lnRef>
-            <a:fillRef idx="0">
-              <a:schemeClr val="accent1"/>
-            </a:fillRef>
-            <a:effectRef idx="0">
-              <a:schemeClr val="accent1"/>
-            </a:effectRef>
-            <a:fontRef idx="minor">
-              <a:schemeClr val="tx1"/>
-            </a:fontRef>
-          </p:style>
-        </p:cxnSp>
-        <p:cxnSp>
-          <p:nvCxnSpPr>
-            <p:cNvPr id="146" name="Straight Connector 145">
-              <a:extLst>
-                <a:ext uri="{FF2B5EF4-FFF2-40B4-BE49-F238E27FC236}">
-                  <a16:creationId xmlns:a16="http://schemas.microsoft.com/office/drawing/2014/main" id="{4E5FCA45-73E6-C090-2556-C3CFC908CE40}"/>
-                </a:ext>
-              </a:extLst>
-            </p:cNvPr>
-            <p:cNvCxnSpPr>
-              <a:cxnSpLocks/>
-            </p:cNvCxnSpPr>
-            <p:nvPr/>
-          </p:nvCxnSpPr>
-          <p:spPr>
-            <a:xfrm flipH="1">
-              <a:off x="23324665" y="17532287"/>
-              <a:ext cx="101441" cy="0"/>
-            </a:xfrm>
-            <a:prstGeom prst="line">
-              <a:avLst/>
-            </a:prstGeom>
-            <a:ln w="38100">
-              <a:solidFill>
-                <a:schemeClr val="tx1"/>
-              </a:solidFill>
-            </a:ln>
-          </p:spPr>
-          <p:style>
-            <a:lnRef idx="1">
-              <a:schemeClr val="accent1"/>
-            </a:lnRef>
-            <a:fillRef idx="0">
-              <a:schemeClr val="accent1"/>
-            </a:fillRef>
-            <a:effectRef idx="0">
-              <a:schemeClr val="accent1"/>
-            </a:effectRef>
-            <a:fontRef idx="minor">
-              <a:schemeClr val="tx1"/>
-            </a:fontRef>
-          </p:style>
-        </p:cxnSp>
-        <p:cxnSp>
-          <p:nvCxnSpPr>
-            <p:cNvPr id="147" name="Straight Connector 146">
-              <a:extLst>
-                <a:ext uri="{FF2B5EF4-FFF2-40B4-BE49-F238E27FC236}">
-                  <a16:creationId xmlns:a16="http://schemas.microsoft.com/office/drawing/2014/main" id="{0D52A1E5-DB15-DDB4-68E4-6BFD076B5145}"/>
-                </a:ext>
-              </a:extLst>
-            </p:cNvPr>
-            <p:cNvCxnSpPr>
-              <a:cxnSpLocks/>
-            </p:cNvCxnSpPr>
-            <p:nvPr/>
-          </p:nvCxnSpPr>
-          <p:spPr>
-            <a:xfrm flipH="1">
-              <a:off x="23324663" y="19926681"/>
-              <a:ext cx="101441" cy="0"/>
-            </a:xfrm>
-            <a:prstGeom prst="line">
-              <a:avLst/>
-            </a:prstGeom>
-            <a:ln w="38100">
-              <a:solidFill>
-                <a:schemeClr val="tx1"/>
-              </a:solidFill>
-            </a:ln>
-          </p:spPr>
-          <p:style>
-            <a:lnRef idx="1">
-              <a:schemeClr val="accent1"/>
-            </a:lnRef>
-            <a:fillRef idx="0">
-              <a:schemeClr val="accent1"/>
-            </a:fillRef>
-            <a:effectRef idx="0">
-              <a:schemeClr val="accent1"/>
-            </a:effectRef>
-            <a:fontRef idx="minor">
-              <a:schemeClr val="tx1"/>
-            </a:fontRef>
-          </p:style>
-        </p:cxnSp>
-      </p:grpSp>
-      <p:grpSp>
-        <p:nvGrpSpPr>
-          <p:cNvPr id="151" name="Group 150">
-            <a:extLst>
-              <a:ext uri="{FF2B5EF4-FFF2-40B4-BE49-F238E27FC236}">
-                <a16:creationId xmlns:a16="http://schemas.microsoft.com/office/drawing/2014/main" id="{C7BB1B4A-64F2-2028-EFD0-21FF8CEA7346}"/>
-              </a:ext>
-            </a:extLst>
-          </p:cNvPr>
-          <p:cNvGrpSpPr/>
-          <p:nvPr/>
-        </p:nvGrpSpPr>
-        <p:grpSpPr>
-          <a:xfrm>
-            <a:off x="17732575" y="14436406"/>
-            <a:ext cx="3057795" cy="1876909"/>
-            <a:chOff x="21083291" y="13827276"/>
-            <a:chExt cx="2396007" cy="1470696"/>
-          </a:xfrm>
-        </p:grpSpPr>
-        <p:pic>
-          <p:nvPicPr>
-            <p:cNvPr id="149" name="Picture 148">
-              <a:extLst>
-                <a:ext uri="{FF2B5EF4-FFF2-40B4-BE49-F238E27FC236}">
-                  <a16:creationId xmlns:a16="http://schemas.microsoft.com/office/drawing/2014/main" id="{E23572A4-07A5-5DE9-157A-E8DB826D190C}"/>
-                </a:ext>
-              </a:extLst>
-            </p:cNvPr>
-            <p:cNvPicPr>
-              <a:picLocks noChangeAspect="1"/>
-            </p:cNvPicPr>
-            <p:nvPr/>
-          </p:nvPicPr>
-          <p:blipFill>
-            <a:blip r:embed="rId8"/>
-            <a:srcRect l="72582" t="21697" r="10049" b="63999"/>
-            <a:stretch>
-              <a:fillRect/>
-            </a:stretch>
-          </p:blipFill>
-          <p:spPr>
-            <a:xfrm>
-              <a:off x="21083291" y="14447849"/>
-              <a:ext cx="1811622" cy="850123"/>
-            </a:xfrm>
-            <a:prstGeom prst="rect">
-              <a:avLst/>
-            </a:prstGeom>
-          </p:spPr>
-        </p:pic>
-        <p:sp>
-          <p:nvSpPr>
-            <p:cNvPr id="150" name="TextBox 149">
-              <a:extLst>
-                <a:ext uri="{FF2B5EF4-FFF2-40B4-BE49-F238E27FC236}">
-                  <a16:creationId xmlns:a16="http://schemas.microsoft.com/office/drawing/2014/main" id="{B70387CD-52FF-7C12-5E65-D1FFD32ECA44}"/>
+                  <a16:creationId xmlns:a16="http://schemas.microsoft.com/office/drawing/2014/main" id="{75FBE407-9526-1888-A0DF-2A41E0556D7A}"/>
                 </a:ext>
               </a:extLst>
             </p:cNvPr>
@@ -14212,8 +12731,952 @@
           </p:nvSpPr>
           <p:spPr>
             <a:xfrm>
-              <a:off x="21439680" y="13827276"/>
-              <a:ext cx="2039618" cy="554681"/>
+              <a:off x="9535989" y="19785437"/>
+              <a:ext cx="448592" cy="353943"/>
+            </a:xfrm>
+            <a:prstGeom prst="rect">
+              <a:avLst/>
+            </a:prstGeom>
+            <a:noFill/>
+          </p:spPr>
+          <p:txBody>
+            <a:bodyPr wrap="square" rtlCol="0">
+              <a:spAutoFit/>
+            </a:bodyPr>
+            <a:lstStyle/>
+            <a:p>
+              <a:pPr algn="ctr"/>
+              <a:r>
+                <a:rPr lang="en-US" sz="1700" dirty="0"/>
+                <a:t>10</a:t>
+              </a:r>
+            </a:p>
+          </p:txBody>
+        </p:sp>
+        <p:sp>
+          <p:nvSpPr>
+            <p:cNvPr id="47" name="TextBox 46">
+              <a:extLst>
+                <a:ext uri="{FF2B5EF4-FFF2-40B4-BE49-F238E27FC236}">
+                  <a16:creationId xmlns:a16="http://schemas.microsoft.com/office/drawing/2014/main" id="{B913B91D-B99D-C05F-0BAD-48CD345A016C}"/>
+                </a:ext>
+              </a:extLst>
+            </p:cNvPr>
+            <p:cNvSpPr txBox="1"/>
+            <p:nvPr/>
+          </p:nvSpPr>
+          <p:spPr>
+            <a:xfrm>
+              <a:off x="10007476" y="19785437"/>
+              <a:ext cx="448592" cy="353943"/>
+            </a:xfrm>
+            <a:prstGeom prst="rect">
+              <a:avLst/>
+            </a:prstGeom>
+            <a:noFill/>
+          </p:spPr>
+          <p:txBody>
+            <a:bodyPr wrap="square" rtlCol="0">
+              <a:spAutoFit/>
+            </a:bodyPr>
+            <a:lstStyle/>
+            <a:p>
+              <a:pPr algn="ctr"/>
+              <a:r>
+                <a:rPr lang="en-US" sz="1700" dirty="0"/>
+                <a:t>12</a:t>
+              </a:r>
+            </a:p>
+          </p:txBody>
+        </p:sp>
+        <p:sp>
+          <p:nvSpPr>
+            <p:cNvPr id="48" name="TextBox 47">
+              <a:extLst>
+                <a:ext uri="{FF2B5EF4-FFF2-40B4-BE49-F238E27FC236}">
+                  <a16:creationId xmlns:a16="http://schemas.microsoft.com/office/drawing/2014/main" id="{4CCFB58B-B2D9-E620-BE98-4626FD49553B}"/>
+                </a:ext>
+              </a:extLst>
+            </p:cNvPr>
+            <p:cNvSpPr txBox="1"/>
+            <p:nvPr/>
+          </p:nvSpPr>
+          <p:spPr>
+            <a:xfrm>
+              <a:off x="10478963" y="19785437"/>
+              <a:ext cx="448592" cy="353943"/>
+            </a:xfrm>
+            <a:prstGeom prst="rect">
+              <a:avLst/>
+            </a:prstGeom>
+            <a:noFill/>
+          </p:spPr>
+          <p:txBody>
+            <a:bodyPr wrap="square" rtlCol="0">
+              <a:spAutoFit/>
+            </a:bodyPr>
+            <a:lstStyle/>
+            <a:p>
+              <a:pPr algn="ctr"/>
+              <a:r>
+                <a:rPr lang="en-US" sz="1700" dirty="0"/>
+                <a:t>14</a:t>
+              </a:r>
+            </a:p>
+          </p:txBody>
+        </p:sp>
+        <p:sp>
+          <p:nvSpPr>
+            <p:cNvPr id="49" name="TextBox 48">
+              <a:extLst>
+                <a:ext uri="{FF2B5EF4-FFF2-40B4-BE49-F238E27FC236}">
+                  <a16:creationId xmlns:a16="http://schemas.microsoft.com/office/drawing/2014/main" id="{F61746E6-58B0-4625-D634-6615C4A163BF}"/>
+                </a:ext>
+              </a:extLst>
+            </p:cNvPr>
+            <p:cNvSpPr txBox="1"/>
+            <p:nvPr/>
+          </p:nvSpPr>
+          <p:spPr>
+            <a:xfrm>
+              <a:off x="10949992" y="19785306"/>
+              <a:ext cx="448592" cy="353943"/>
+            </a:xfrm>
+            <a:prstGeom prst="rect">
+              <a:avLst/>
+            </a:prstGeom>
+            <a:noFill/>
+          </p:spPr>
+          <p:txBody>
+            <a:bodyPr wrap="square" rtlCol="0">
+              <a:spAutoFit/>
+            </a:bodyPr>
+            <a:lstStyle/>
+            <a:p>
+              <a:pPr algn="ctr"/>
+              <a:r>
+                <a:rPr lang="en-US" sz="1700" dirty="0"/>
+                <a:t>16</a:t>
+              </a:r>
+            </a:p>
+          </p:txBody>
+        </p:sp>
+        <p:sp>
+          <p:nvSpPr>
+            <p:cNvPr id="50" name="TextBox 49">
+              <a:extLst>
+                <a:ext uri="{FF2B5EF4-FFF2-40B4-BE49-F238E27FC236}">
+                  <a16:creationId xmlns:a16="http://schemas.microsoft.com/office/drawing/2014/main" id="{2320AA32-611B-013F-2D95-6605F91767B2}"/>
+                </a:ext>
+              </a:extLst>
+            </p:cNvPr>
+            <p:cNvSpPr txBox="1"/>
+            <p:nvPr/>
+          </p:nvSpPr>
+          <p:spPr>
+            <a:xfrm>
+              <a:off x="11420518" y="19785306"/>
+              <a:ext cx="448592" cy="353943"/>
+            </a:xfrm>
+            <a:prstGeom prst="rect">
+              <a:avLst/>
+            </a:prstGeom>
+            <a:noFill/>
+          </p:spPr>
+          <p:txBody>
+            <a:bodyPr wrap="square" rtlCol="0">
+              <a:spAutoFit/>
+            </a:bodyPr>
+            <a:lstStyle/>
+            <a:p>
+              <a:pPr algn="ctr"/>
+              <a:r>
+                <a:rPr lang="en-US" sz="1700" dirty="0"/>
+                <a:t>18</a:t>
+              </a:r>
+            </a:p>
+          </p:txBody>
+        </p:sp>
+        <p:sp>
+          <p:nvSpPr>
+            <p:cNvPr id="51" name="TextBox 50">
+              <a:extLst>
+                <a:ext uri="{FF2B5EF4-FFF2-40B4-BE49-F238E27FC236}">
+                  <a16:creationId xmlns:a16="http://schemas.microsoft.com/office/drawing/2014/main" id="{40D132F6-E45E-5F45-D6AD-4E9741027D71}"/>
+                </a:ext>
+              </a:extLst>
+            </p:cNvPr>
+            <p:cNvSpPr txBox="1"/>
+            <p:nvPr/>
+          </p:nvSpPr>
+          <p:spPr>
+            <a:xfrm>
+              <a:off x="11891551" y="19785306"/>
+              <a:ext cx="448592" cy="353943"/>
+            </a:xfrm>
+            <a:prstGeom prst="rect">
+              <a:avLst/>
+            </a:prstGeom>
+            <a:noFill/>
+          </p:spPr>
+          <p:txBody>
+            <a:bodyPr wrap="square" rtlCol="0">
+              <a:spAutoFit/>
+            </a:bodyPr>
+            <a:lstStyle/>
+            <a:p>
+              <a:pPr algn="ctr"/>
+              <a:r>
+                <a:rPr lang="en-US" sz="1700" dirty="0"/>
+                <a:t>20</a:t>
+              </a:r>
+            </a:p>
+          </p:txBody>
+        </p:sp>
+        <p:sp>
+          <p:nvSpPr>
+            <p:cNvPr id="52" name="TextBox 51">
+              <a:extLst>
+                <a:ext uri="{FF2B5EF4-FFF2-40B4-BE49-F238E27FC236}">
+                  <a16:creationId xmlns:a16="http://schemas.microsoft.com/office/drawing/2014/main" id="{8E77A68D-2F50-2A3B-3606-45CF3B1EF216}"/>
+                </a:ext>
+              </a:extLst>
+            </p:cNvPr>
+            <p:cNvSpPr txBox="1"/>
+            <p:nvPr/>
+          </p:nvSpPr>
+          <p:spPr>
+            <a:xfrm>
+              <a:off x="13256513" y="19785306"/>
+              <a:ext cx="409575" cy="353943"/>
+            </a:xfrm>
+            <a:prstGeom prst="rect">
+              <a:avLst/>
+            </a:prstGeom>
+            <a:noFill/>
+          </p:spPr>
+          <p:txBody>
+            <a:bodyPr wrap="square" rtlCol="0">
+              <a:spAutoFit/>
+            </a:bodyPr>
+            <a:lstStyle/>
+            <a:p>
+              <a:pPr algn="ctr"/>
+              <a:r>
+                <a:rPr lang="en-US" sz="1700" dirty="0"/>
+                <a:t>2</a:t>
+              </a:r>
+            </a:p>
+          </p:txBody>
+        </p:sp>
+        <p:sp>
+          <p:nvSpPr>
+            <p:cNvPr id="53" name="TextBox 52">
+              <a:extLst>
+                <a:ext uri="{FF2B5EF4-FFF2-40B4-BE49-F238E27FC236}">
+                  <a16:creationId xmlns:a16="http://schemas.microsoft.com/office/drawing/2014/main" id="{50427FF1-00DC-B79B-96A1-197168DAAEDF}"/>
+                </a:ext>
+              </a:extLst>
+            </p:cNvPr>
+            <p:cNvSpPr txBox="1"/>
+            <p:nvPr/>
+          </p:nvSpPr>
+          <p:spPr>
+            <a:xfrm>
+              <a:off x="13728001" y="19785306"/>
+              <a:ext cx="409575" cy="353943"/>
+            </a:xfrm>
+            <a:prstGeom prst="rect">
+              <a:avLst/>
+            </a:prstGeom>
+            <a:noFill/>
+          </p:spPr>
+          <p:txBody>
+            <a:bodyPr wrap="square" rtlCol="0">
+              <a:spAutoFit/>
+            </a:bodyPr>
+            <a:lstStyle/>
+            <a:p>
+              <a:pPr algn="ctr"/>
+              <a:r>
+                <a:rPr lang="en-US" sz="1700" dirty="0"/>
+                <a:t>4</a:t>
+              </a:r>
+            </a:p>
+          </p:txBody>
+        </p:sp>
+        <p:sp>
+          <p:nvSpPr>
+            <p:cNvPr id="54" name="TextBox 53">
+              <a:extLst>
+                <a:ext uri="{FF2B5EF4-FFF2-40B4-BE49-F238E27FC236}">
+                  <a16:creationId xmlns:a16="http://schemas.microsoft.com/office/drawing/2014/main" id="{246F7FF8-E5A4-596D-74A1-0A4EC80F9A8C}"/>
+                </a:ext>
+              </a:extLst>
+            </p:cNvPr>
+            <p:cNvSpPr txBox="1"/>
+            <p:nvPr/>
+          </p:nvSpPr>
+          <p:spPr>
+            <a:xfrm>
+              <a:off x="14197108" y="19785306"/>
+              <a:ext cx="409575" cy="353943"/>
+            </a:xfrm>
+            <a:prstGeom prst="rect">
+              <a:avLst/>
+            </a:prstGeom>
+            <a:noFill/>
+          </p:spPr>
+          <p:txBody>
+            <a:bodyPr wrap="square" rtlCol="0">
+              <a:spAutoFit/>
+            </a:bodyPr>
+            <a:lstStyle/>
+            <a:p>
+              <a:pPr algn="ctr"/>
+              <a:r>
+                <a:rPr lang="en-US" sz="1700" dirty="0"/>
+                <a:t>6</a:t>
+              </a:r>
+            </a:p>
+          </p:txBody>
+        </p:sp>
+        <p:sp>
+          <p:nvSpPr>
+            <p:cNvPr id="55" name="TextBox 54">
+              <a:extLst>
+                <a:ext uri="{FF2B5EF4-FFF2-40B4-BE49-F238E27FC236}">
+                  <a16:creationId xmlns:a16="http://schemas.microsoft.com/office/drawing/2014/main" id="{0CC4B3A4-C8E7-703A-9C1A-C7047CD324B6}"/>
+                </a:ext>
+              </a:extLst>
+            </p:cNvPr>
+            <p:cNvSpPr txBox="1"/>
+            <p:nvPr/>
+          </p:nvSpPr>
+          <p:spPr>
+            <a:xfrm>
+              <a:off x="14670977" y="19785306"/>
+              <a:ext cx="409575" cy="353943"/>
+            </a:xfrm>
+            <a:prstGeom prst="rect">
+              <a:avLst/>
+            </a:prstGeom>
+            <a:noFill/>
+          </p:spPr>
+          <p:txBody>
+            <a:bodyPr wrap="square" rtlCol="0">
+              <a:spAutoFit/>
+            </a:bodyPr>
+            <a:lstStyle/>
+            <a:p>
+              <a:pPr algn="ctr"/>
+              <a:r>
+                <a:rPr lang="en-US" sz="1700" dirty="0"/>
+                <a:t>8</a:t>
+              </a:r>
+            </a:p>
+          </p:txBody>
+        </p:sp>
+        <p:sp>
+          <p:nvSpPr>
+            <p:cNvPr id="57" name="TextBox 56">
+              <a:extLst>
+                <a:ext uri="{FF2B5EF4-FFF2-40B4-BE49-F238E27FC236}">
+                  <a16:creationId xmlns:a16="http://schemas.microsoft.com/office/drawing/2014/main" id="{42A41D43-7F03-6E08-547C-C69E4E65356A}"/>
+                </a:ext>
+              </a:extLst>
+            </p:cNvPr>
+            <p:cNvSpPr txBox="1"/>
+            <p:nvPr/>
+          </p:nvSpPr>
+          <p:spPr>
+            <a:xfrm>
+              <a:off x="15122495" y="19785306"/>
+              <a:ext cx="448592" cy="353943"/>
+            </a:xfrm>
+            <a:prstGeom prst="rect">
+              <a:avLst/>
+            </a:prstGeom>
+            <a:noFill/>
+          </p:spPr>
+          <p:txBody>
+            <a:bodyPr wrap="square" rtlCol="0">
+              <a:spAutoFit/>
+            </a:bodyPr>
+            <a:lstStyle/>
+            <a:p>
+              <a:pPr algn="ctr"/>
+              <a:r>
+                <a:rPr lang="en-US" sz="1700" dirty="0"/>
+                <a:t>10</a:t>
+              </a:r>
+            </a:p>
+          </p:txBody>
+        </p:sp>
+        <p:sp>
+          <p:nvSpPr>
+            <p:cNvPr id="76" name="TextBox 75">
+              <a:extLst>
+                <a:ext uri="{FF2B5EF4-FFF2-40B4-BE49-F238E27FC236}">
+                  <a16:creationId xmlns:a16="http://schemas.microsoft.com/office/drawing/2014/main" id="{A8E9DAC3-1D30-D93A-A21F-37DA937F2546}"/>
+                </a:ext>
+              </a:extLst>
+            </p:cNvPr>
+            <p:cNvSpPr txBox="1"/>
+            <p:nvPr/>
+          </p:nvSpPr>
+          <p:spPr>
+            <a:xfrm>
+              <a:off x="15593982" y="19785306"/>
+              <a:ext cx="448592" cy="353943"/>
+            </a:xfrm>
+            <a:prstGeom prst="rect">
+              <a:avLst/>
+            </a:prstGeom>
+            <a:noFill/>
+          </p:spPr>
+          <p:txBody>
+            <a:bodyPr wrap="square" rtlCol="0">
+              <a:spAutoFit/>
+            </a:bodyPr>
+            <a:lstStyle/>
+            <a:p>
+              <a:pPr algn="ctr"/>
+              <a:r>
+                <a:rPr lang="en-US" sz="1700" dirty="0"/>
+                <a:t>12</a:t>
+              </a:r>
+            </a:p>
+          </p:txBody>
+        </p:sp>
+        <p:sp>
+          <p:nvSpPr>
+            <p:cNvPr id="77" name="TextBox 76">
+              <a:extLst>
+                <a:ext uri="{FF2B5EF4-FFF2-40B4-BE49-F238E27FC236}">
+                  <a16:creationId xmlns:a16="http://schemas.microsoft.com/office/drawing/2014/main" id="{0E07A0BD-9205-75A6-0E15-8D42DD00E8F1}"/>
+                </a:ext>
+              </a:extLst>
+            </p:cNvPr>
+            <p:cNvSpPr txBox="1"/>
+            <p:nvPr/>
+          </p:nvSpPr>
+          <p:spPr>
+            <a:xfrm>
+              <a:off x="16065469" y="19785306"/>
+              <a:ext cx="448592" cy="353943"/>
+            </a:xfrm>
+            <a:prstGeom prst="rect">
+              <a:avLst/>
+            </a:prstGeom>
+            <a:noFill/>
+          </p:spPr>
+          <p:txBody>
+            <a:bodyPr wrap="square" rtlCol="0">
+              <a:spAutoFit/>
+            </a:bodyPr>
+            <a:lstStyle/>
+            <a:p>
+              <a:pPr algn="ctr"/>
+              <a:r>
+                <a:rPr lang="en-US" sz="1700" dirty="0"/>
+                <a:t>14</a:t>
+              </a:r>
+            </a:p>
+          </p:txBody>
+        </p:sp>
+        <p:sp>
+          <p:nvSpPr>
+            <p:cNvPr id="78" name="TextBox 77">
+              <a:extLst>
+                <a:ext uri="{FF2B5EF4-FFF2-40B4-BE49-F238E27FC236}">
+                  <a16:creationId xmlns:a16="http://schemas.microsoft.com/office/drawing/2014/main" id="{F6C98EFF-6C39-FED3-D7C4-A93F258F82C4}"/>
+                </a:ext>
+              </a:extLst>
+            </p:cNvPr>
+            <p:cNvSpPr txBox="1"/>
+            <p:nvPr/>
+          </p:nvSpPr>
+          <p:spPr>
+            <a:xfrm>
+              <a:off x="16536498" y="19785175"/>
+              <a:ext cx="448592" cy="353943"/>
+            </a:xfrm>
+            <a:prstGeom prst="rect">
+              <a:avLst/>
+            </a:prstGeom>
+            <a:noFill/>
+          </p:spPr>
+          <p:txBody>
+            <a:bodyPr wrap="square" rtlCol="0">
+              <a:spAutoFit/>
+            </a:bodyPr>
+            <a:lstStyle/>
+            <a:p>
+              <a:pPr algn="ctr"/>
+              <a:r>
+                <a:rPr lang="en-US" sz="1700" dirty="0"/>
+                <a:t>16</a:t>
+              </a:r>
+            </a:p>
+          </p:txBody>
+        </p:sp>
+        <p:sp>
+          <p:nvSpPr>
+            <p:cNvPr id="79" name="TextBox 78">
+              <a:extLst>
+                <a:ext uri="{FF2B5EF4-FFF2-40B4-BE49-F238E27FC236}">
+                  <a16:creationId xmlns:a16="http://schemas.microsoft.com/office/drawing/2014/main" id="{6305F5BC-6DB7-AD97-A63A-EB460317C2D0}"/>
+                </a:ext>
+              </a:extLst>
+            </p:cNvPr>
+            <p:cNvSpPr txBox="1"/>
+            <p:nvPr/>
+          </p:nvSpPr>
+          <p:spPr>
+            <a:xfrm>
+              <a:off x="17007024" y="19785175"/>
+              <a:ext cx="448592" cy="353943"/>
+            </a:xfrm>
+            <a:prstGeom prst="rect">
+              <a:avLst/>
+            </a:prstGeom>
+            <a:noFill/>
+          </p:spPr>
+          <p:txBody>
+            <a:bodyPr wrap="square" rtlCol="0">
+              <a:spAutoFit/>
+            </a:bodyPr>
+            <a:lstStyle/>
+            <a:p>
+              <a:pPr algn="ctr"/>
+              <a:r>
+                <a:rPr lang="en-US" sz="1700" dirty="0"/>
+                <a:t>18</a:t>
+              </a:r>
+            </a:p>
+          </p:txBody>
+        </p:sp>
+        <p:sp>
+          <p:nvSpPr>
+            <p:cNvPr id="80" name="TextBox 79">
+              <a:extLst>
+                <a:ext uri="{FF2B5EF4-FFF2-40B4-BE49-F238E27FC236}">
+                  <a16:creationId xmlns:a16="http://schemas.microsoft.com/office/drawing/2014/main" id="{3893787A-A067-E4EF-B62C-D18D1AFE8A19}"/>
+                </a:ext>
+              </a:extLst>
+            </p:cNvPr>
+            <p:cNvSpPr txBox="1"/>
+            <p:nvPr/>
+          </p:nvSpPr>
+          <p:spPr>
+            <a:xfrm>
+              <a:off x="17480438" y="19785175"/>
+              <a:ext cx="448592" cy="353943"/>
+            </a:xfrm>
+            <a:prstGeom prst="rect">
+              <a:avLst/>
+            </a:prstGeom>
+            <a:noFill/>
+          </p:spPr>
+          <p:txBody>
+            <a:bodyPr wrap="square" rtlCol="0">
+              <a:spAutoFit/>
+            </a:bodyPr>
+            <a:lstStyle/>
+            <a:p>
+              <a:pPr algn="ctr"/>
+              <a:r>
+                <a:rPr lang="en-US" sz="1700" dirty="0"/>
+                <a:t>20</a:t>
+              </a:r>
+            </a:p>
+          </p:txBody>
+        </p:sp>
+        <p:sp>
+          <p:nvSpPr>
+            <p:cNvPr id="81" name="TextBox 80">
+              <a:extLst>
+                <a:ext uri="{FF2B5EF4-FFF2-40B4-BE49-F238E27FC236}">
+                  <a16:creationId xmlns:a16="http://schemas.microsoft.com/office/drawing/2014/main" id="{648C43FC-8E6E-89E6-F377-289C540004D6}"/>
+                </a:ext>
+              </a:extLst>
+            </p:cNvPr>
+            <p:cNvSpPr txBox="1"/>
+            <p:nvPr/>
+          </p:nvSpPr>
+          <p:spPr>
+            <a:xfrm>
+              <a:off x="12573180" y="14516123"/>
+              <a:ext cx="610163" cy="353943"/>
+            </a:xfrm>
+            <a:prstGeom prst="rect">
+              <a:avLst/>
+            </a:prstGeom>
+            <a:noFill/>
+          </p:spPr>
+          <p:txBody>
+            <a:bodyPr wrap="square" rtlCol="0">
+              <a:spAutoFit/>
+            </a:bodyPr>
+            <a:lstStyle/>
+            <a:p>
+              <a:pPr algn="r"/>
+              <a:r>
+                <a:rPr lang="en-US" sz="1700" dirty="0"/>
+                <a:t>1</a:t>
+              </a:r>
+            </a:p>
+          </p:txBody>
+        </p:sp>
+        <p:sp>
+          <p:nvSpPr>
+            <p:cNvPr id="83" name="TextBox 82">
+              <a:extLst>
+                <a:ext uri="{FF2B5EF4-FFF2-40B4-BE49-F238E27FC236}">
+                  <a16:creationId xmlns:a16="http://schemas.microsoft.com/office/drawing/2014/main" id="{5D7C3265-3258-8236-A72F-A70834E02E64}"/>
+                </a:ext>
+              </a:extLst>
+            </p:cNvPr>
+            <p:cNvSpPr txBox="1"/>
+            <p:nvPr/>
+          </p:nvSpPr>
+          <p:spPr>
+            <a:xfrm>
+              <a:off x="12573177" y="15353202"/>
+              <a:ext cx="610163" cy="353943"/>
+            </a:xfrm>
+            <a:prstGeom prst="rect">
+              <a:avLst/>
+            </a:prstGeom>
+            <a:noFill/>
+          </p:spPr>
+          <p:txBody>
+            <a:bodyPr wrap="square" rtlCol="0">
+              <a:spAutoFit/>
+            </a:bodyPr>
+            <a:lstStyle/>
+            <a:p>
+              <a:pPr algn="r"/>
+              <a:r>
+                <a:rPr lang="en-US" sz="1700" dirty="0"/>
+                <a:t>0</a:t>
+              </a:r>
+            </a:p>
+          </p:txBody>
+        </p:sp>
+        <p:sp>
+          <p:nvSpPr>
+            <p:cNvPr id="84" name="TextBox 83">
+              <a:extLst>
+                <a:ext uri="{FF2B5EF4-FFF2-40B4-BE49-F238E27FC236}">
+                  <a16:creationId xmlns:a16="http://schemas.microsoft.com/office/drawing/2014/main" id="{A94E758C-5A17-8A37-5B4D-ACA27F2C2531}"/>
+                </a:ext>
+              </a:extLst>
+            </p:cNvPr>
+            <p:cNvSpPr txBox="1"/>
+            <p:nvPr/>
+          </p:nvSpPr>
+          <p:spPr>
+            <a:xfrm>
+              <a:off x="12573175" y="15769301"/>
+              <a:ext cx="610163" cy="353943"/>
+            </a:xfrm>
+            <a:prstGeom prst="rect">
+              <a:avLst/>
+            </a:prstGeom>
+            <a:noFill/>
+          </p:spPr>
+          <p:txBody>
+            <a:bodyPr wrap="square" rtlCol="0">
+              <a:spAutoFit/>
+            </a:bodyPr>
+            <a:lstStyle/>
+            <a:p>
+              <a:pPr algn="r"/>
+              <a:r>
+                <a:rPr lang="en-US" sz="1700" dirty="0"/>
+                <a:t>-0.5</a:t>
+              </a:r>
+            </a:p>
+          </p:txBody>
+        </p:sp>
+        <p:sp>
+          <p:nvSpPr>
+            <p:cNvPr id="85" name="TextBox 84">
+              <a:extLst>
+                <a:ext uri="{FF2B5EF4-FFF2-40B4-BE49-F238E27FC236}">
+                  <a16:creationId xmlns:a16="http://schemas.microsoft.com/office/drawing/2014/main" id="{9EEC0DD0-05E5-6047-8E13-3B53C45DC57D}"/>
+                </a:ext>
+              </a:extLst>
+            </p:cNvPr>
+            <p:cNvSpPr txBox="1"/>
+            <p:nvPr/>
+          </p:nvSpPr>
+          <p:spPr>
+            <a:xfrm>
+              <a:off x="12573175" y="16182573"/>
+              <a:ext cx="610163" cy="353943"/>
+            </a:xfrm>
+            <a:prstGeom prst="rect">
+              <a:avLst/>
+            </a:prstGeom>
+            <a:noFill/>
+          </p:spPr>
+          <p:txBody>
+            <a:bodyPr wrap="square" rtlCol="0">
+              <a:spAutoFit/>
+            </a:bodyPr>
+            <a:lstStyle/>
+            <a:p>
+              <a:pPr algn="r"/>
+              <a:r>
+                <a:rPr lang="en-US" sz="1700" dirty="0"/>
+                <a:t>-1.0</a:t>
+              </a:r>
+            </a:p>
+          </p:txBody>
+        </p:sp>
+        <p:sp>
+          <p:nvSpPr>
+            <p:cNvPr id="86" name="TextBox 85">
+              <a:extLst>
+                <a:ext uri="{FF2B5EF4-FFF2-40B4-BE49-F238E27FC236}">
+                  <a16:creationId xmlns:a16="http://schemas.microsoft.com/office/drawing/2014/main" id="{6FFCAC7F-C389-22B3-82AE-3999CD0FA05C}"/>
+                </a:ext>
+              </a:extLst>
+            </p:cNvPr>
+            <p:cNvSpPr txBox="1"/>
+            <p:nvPr/>
+          </p:nvSpPr>
+          <p:spPr>
+            <a:xfrm>
+              <a:off x="12573175" y="17643090"/>
+              <a:ext cx="610163" cy="353943"/>
+            </a:xfrm>
+            <a:prstGeom prst="rect">
+              <a:avLst/>
+            </a:prstGeom>
+            <a:noFill/>
+          </p:spPr>
+          <p:txBody>
+            <a:bodyPr wrap="square" rtlCol="0">
+              <a:spAutoFit/>
+            </a:bodyPr>
+            <a:lstStyle/>
+            <a:p>
+              <a:pPr algn="r"/>
+              <a:r>
+                <a:rPr lang="en-US" sz="1700" dirty="0"/>
+                <a:t>0</a:t>
+              </a:r>
+            </a:p>
+          </p:txBody>
+        </p:sp>
+        <p:sp>
+          <p:nvSpPr>
+            <p:cNvPr id="87" name="TextBox 86">
+              <a:extLst>
+                <a:ext uri="{FF2B5EF4-FFF2-40B4-BE49-F238E27FC236}">
+                  <a16:creationId xmlns:a16="http://schemas.microsoft.com/office/drawing/2014/main" id="{4C76EC0C-7B97-9540-A57C-E66DCFA0F2FC}"/>
+                </a:ext>
+              </a:extLst>
+            </p:cNvPr>
+            <p:cNvSpPr txBox="1"/>
+            <p:nvPr/>
+          </p:nvSpPr>
+          <p:spPr>
+            <a:xfrm>
+              <a:off x="12573174" y="18068714"/>
+              <a:ext cx="610163" cy="353943"/>
+            </a:xfrm>
+            <a:prstGeom prst="rect">
+              <a:avLst/>
+            </a:prstGeom>
+            <a:noFill/>
+          </p:spPr>
+          <p:txBody>
+            <a:bodyPr wrap="square" rtlCol="0">
+              <a:spAutoFit/>
+            </a:bodyPr>
+            <a:lstStyle/>
+            <a:p>
+              <a:pPr algn="r"/>
+              <a:r>
+                <a:rPr lang="en-US" sz="1700" dirty="0"/>
+                <a:t>-0.2</a:t>
+              </a:r>
+            </a:p>
+          </p:txBody>
+        </p:sp>
+        <p:sp>
+          <p:nvSpPr>
+            <p:cNvPr id="88" name="TextBox 87">
+              <a:extLst>
+                <a:ext uri="{FF2B5EF4-FFF2-40B4-BE49-F238E27FC236}">
+                  <a16:creationId xmlns:a16="http://schemas.microsoft.com/office/drawing/2014/main" id="{263661ED-E62E-6455-0367-72CF8B33BE98}"/>
+                </a:ext>
+              </a:extLst>
+            </p:cNvPr>
+            <p:cNvSpPr txBox="1"/>
+            <p:nvPr/>
+          </p:nvSpPr>
+          <p:spPr>
+            <a:xfrm>
+              <a:off x="12573174" y="18494338"/>
+              <a:ext cx="610163" cy="353943"/>
+            </a:xfrm>
+            <a:prstGeom prst="rect">
+              <a:avLst/>
+            </a:prstGeom>
+            <a:noFill/>
+          </p:spPr>
+          <p:txBody>
+            <a:bodyPr wrap="square" rtlCol="0">
+              <a:spAutoFit/>
+            </a:bodyPr>
+            <a:lstStyle/>
+            <a:p>
+              <a:pPr algn="r"/>
+              <a:r>
+                <a:rPr lang="en-US" sz="1700" dirty="0"/>
+                <a:t>-0.4</a:t>
+              </a:r>
+            </a:p>
+          </p:txBody>
+        </p:sp>
+        <p:sp>
+          <p:nvSpPr>
+            <p:cNvPr id="89" name="TextBox 88">
+              <a:extLst>
+                <a:ext uri="{FF2B5EF4-FFF2-40B4-BE49-F238E27FC236}">
+                  <a16:creationId xmlns:a16="http://schemas.microsoft.com/office/drawing/2014/main" id="{C187CAB4-6E16-6774-0B6D-B30DD9663F08}"/>
+                </a:ext>
+              </a:extLst>
+            </p:cNvPr>
+            <p:cNvSpPr txBox="1"/>
+            <p:nvPr/>
+          </p:nvSpPr>
+          <p:spPr>
+            <a:xfrm>
+              <a:off x="12573173" y="18919962"/>
+              <a:ext cx="610163" cy="353943"/>
+            </a:xfrm>
+            <a:prstGeom prst="rect">
+              <a:avLst/>
+            </a:prstGeom>
+            <a:noFill/>
+          </p:spPr>
+          <p:txBody>
+            <a:bodyPr wrap="square" rtlCol="0">
+              <a:spAutoFit/>
+            </a:bodyPr>
+            <a:lstStyle/>
+            <a:p>
+              <a:pPr algn="r"/>
+              <a:r>
+                <a:rPr lang="en-US" sz="1700" dirty="0"/>
+                <a:t>-0.6</a:t>
+              </a:r>
+            </a:p>
+          </p:txBody>
+        </p:sp>
+        <p:sp>
+          <p:nvSpPr>
+            <p:cNvPr id="90" name="TextBox 89">
+              <a:extLst>
+                <a:ext uri="{FF2B5EF4-FFF2-40B4-BE49-F238E27FC236}">
+                  <a16:creationId xmlns:a16="http://schemas.microsoft.com/office/drawing/2014/main" id="{527C2AA7-19CD-00AA-C172-28006368477D}"/>
+                </a:ext>
+              </a:extLst>
+            </p:cNvPr>
+            <p:cNvSpPr txBox="1"/>
+            <p:nvPr/>
+          </p:nvSpPr>
+          <p:spPr>
+            <a:xfrm>
+              <a:off x="12573172" y="19344562"/>
+              <a:ext cx="610163" cy="353943"/>
+            </a:xfrm>
+            <a:prstGeom prst="rect">
+              <a:avLst/>
+            </a:prstGeom>
+            <a:noFill/>
+          </p:spPr>
+          <p:txBody>
+            <a:bodyPr wrap="square" rtlCol="0">
+              <a:spAutoFit/>
+            </a:bodyPr>
+            <a:lstStyle/>
+            <a:p>
+              <a:pPr algn="r"/>
+              <a:r>
+                <a:rPr lang="en-US" sz="1700" dirty="0"/>
+                <a:t>-0.8</a:t>
+              </a:r>
+            </a:p>
+          </p:txBody>
+        </p:sp>
+        <p:sp>
+          <p:nvSpPr>
+            <p:cNvPr id="132" name="TextBox 131">
+              <a:extLst>
+                <a:ext uri="{FF2B5EF4-FFF2-40B4-BE49-F238E27FC236}">
+                  <a16:creationId xmlns:a16="http://schemas.microsoft.com/office/drawing/2014/main" id="{62CA3510-64B6-00FE-5788-C7078ADEBC17}"/>
+                </a:ext>
+              </a:extLst>
+            </p:cNvPr>
+            <p:cNvSpPr txBox="1"/>
+            <p:nvPr/>
+          </p:nvSpPr>
+          <p:spPr>
+            <a:xfrm>
+              <a:off x="3808483" y="18386423"/>
+              <a:ext cx="3178103" cy="400110"/>
+            </a:xfrm>
+            <a:prstGeom prst="rect">
+              <a:avLst/>
+            </a:prstGeom>
+            <a:noFill/>
+          </p:spPr>
+          <p:txBody>
+            <a:bodyPr wrap="square" rtlCol="0">
+              <a:spAutoFit/>
+            </a:bodyPr>
+            <a:lstStyle/>
+            <a:p>
+              <a:pPr algn="r"/>
+              <a:r>
+                <a:rPr lang="en-US" sz="2000" dirty="0"/>
+                <a:t>Sign-aligned </a:t>
+              </a:r>
+              <a:r>
+                <a:rPr lang="el-GR" sz="2000" dirty="0"/>
+                <a:t>β</a:t>
+              </a:r>
+              <a:r>
+                <a:rPr lang="en-US" sz="2000" dirty="0"/>
+                <a:t> </a:t>
+              </a:r>
+            </a:p>
+          </p:txBody>
+        </p:sp>
+        <p:sp>
+          <p:nvSpPr>
+            <p:cNvPr id="133" name="TextBox 132">
+              <a:extLst>
+                <a:ext uri="{FF2B5EF4-FFF2-40B4-BE49-F238E27FC236}">
+                  <a16:creationId xmlns:a16="http://schemas.microsoft.com/office/drawing/2014/main" id="{11EBAC9A-F984-E13B-A48C-4B04B126BC07}"/>
+                </a:ext>
+              </a:extLst>
+            </p:cNvPr>
+            <p:cNvSpPr txBox="1"/>
+            <p:nvPr/>
+          </p:nvSpPr>
+          <p:spPr>
+            <a:xfrm>
+              <a:off x="7705730" y="13939863"/>
+              <a:ext cx="3178103" cy="400110"/>
             </a:xfrm>
             <a:prstGeom prst="rect">
               <a:avLst/>
@@ -14228,17 +13691,575 @@
             <a:p>
               <a:r>
                 <a:rPr lang="en-US" sz="2000" dirty="0"/>
-                <a:t>Response</a:t>
-              </a:r>
-            </a:p>
-            <a:p>
-              <a:r>
-                <a:rPr lang="en-US" sz="2000" dirty="0"/>
-                <a:t>metric</a:t>
+                <a:t>All species</a:t>
               </a:r>
             </a:p>
           </p:txBody>
         </p:sp>
+        <p:sp>
+          <p:nvSpPr>
+            <p:cNvPr id="134" name="TextBox 133">
+              <a:extLst>
+                <a:ext uri="{FF2B5EF4-FFF2-40B4-BE49-F238E27FC236}">
+                  <a16:creationId xmlns:a16="http://schemas.microsoft.com/office/drawing/2014/main" id="{D16B6794-628B-A93B-8936-1D3B849DC8F3}"/>
+                </a:ext>
+              </a:extLst>
+            </p:cNvPr>
+            <p:cNvSpPr txBox="1"/>
+            <p:nvPr/>
+          </p:nvSpPr>
+          <p:spPr>
+            <a:xfrm>
+              <a:off x="7708111" y="17054745"/>
+              <a:ext cx="3178103" cy="400110"/>
+            </a:xfrm>
+            <a:prstGeom prst="rect">
+              <a:avLst/>
+            </a:prstGeom>
+            <a:noFill/>
+          </p:spPr>
+          <p:txBody>
+            <a:bodyPr wrap="square" rtlCol="0">
+              <a:spAutoFit/>
+            </a:bodyPr>
+            <a:lstStyle/>
+            <a:p>
+              <a:r>
+                <a:rPr lang="en-US" sz="2000" dirty="0"/>
+                <a:t>Actinopterygii</a:t>
+              </a:r>
+            </a:p>
+          </p:txBody>
+        </p:sp>
+        <p:sp>
+          <p:nvSpPr>
+            <p:cNvPr id="135" name="TextBox 134">
+              <a:extLst>
+                <a:ext uri="{FF2B5EF4-FFF2-40B4-BE49-F238E27FC236}">
+                  <a16:creationId xmlns:a16="http://schemas.microsoft.com/office/drawing/2014/main" id="{FFF9ADF3-DB4B-3E2F-4CCB-7DA42D750A00}"/>
+                </a:ext>
+              </a:extLst>
+            </p:cNvPr>
+            <p:cNvSpPr txBox="1"/>
+            <p:nvPr/>
+          </p:nvSpPr>
+          <p:spPr>
+            <a:xfrm>
+              <a:off x="13294613" y="17054745"/>
+              <a:ext cx="3178103" cy="400110"/>
+            </a:xfrm>
+            <a:prstGeom prst="rect">
+              <a:avLst/>
+            </a:prstGeom>
+            <a:noFill/>
+          </p:spPr>
+          <p:txBody>
+            <a:bodyPr wrap="square" rtlCol="0">
+              <a:spAutoFit/>
+            </a:bodyPr>
+            <a:lstStyle/>
+            <a:p>
+              <a:r>
+                <a:rPr lang="en-US" sz="2000" dirty="0" err="1"/>
+                <a:t>Sauropsida</a:t>
+              </a:r>
+              <a:endParaRPr lang="en-US" sz="2000" dirty="0"/>
+            </a:p>
+          </p:txBody>
+        </p:sp>
+        <p:sp>
+          <p:nvSpPr>
+            <p:cNvPr id="136" name="TextBox 135">
+              <a:extLst>
+                <a:ext uri="{FF2B5EF4-FFF2-40B4-BE49-F238E27FC236}">
+                  <a16:creationId xmlns:a16="http://schemas.microsoft.com/office/drawing/2014/main" id="{28E01B4B-AF74-EF20-96F2-E0E0002A17DA}"/>
+                </a:ext>
+              </a:extLst>
+            </p:cNvPr>
+            <p:cNvSpPr txBox="1"/>
+            <p:nvPr/>
+          </p:nvSpPr>
+          <p:spPr>
+            <a:xfrm>
+              <a:off x="13294616" y="13940076"/>
+              <a:ext cx="3178103" cy="400110"/>
+            </a:xfrm>
+            <a:prstGeom prst="rect">
+              <a:avLst/>
+            </a:prstGeom>
+            <a:noFill/>
+          </p:spPr>
+          <p:txBody>
+            <a:bodyPr wrap="square" rtlCol="0">
+              <a:spAutoFit/>
+            </a:bodyPr>
+            <a:lstStyle/>
+            <a:p>
+              <a:r>
+                <a:rPr lang="en-US" sz="2000" dirty="0"/>
+                <a:t>Mammalia</a:t>
+              </a:r>
+            </a:p>
+          </p:txBody>
+        </p:sp>
+        <p:grpSp>
+          <p:nvGrpSpPr>
+            <p:cNvPr id="138" name="Group 137">
+              <a:extLst>
+                <a:ext uri="{FF2B5EF4-FFF2-40B4-BE49-F238E27FC236}">
+                  <a16:creationId xmlns:a16="http://schemas.microsoft.com/office/drawing/2014/main" id="{FDA4FC55-BEF5-6F07-D982-6B0EF7270BF9}"/>
+                </a:ext>
+              </a:extLst>
+            </p:cNvPr>
+            <p:cNvGrpSpPr/>
+            <p:nvPr/>
+          </p:nvGrpSpPr>
+          <p:grpSpPr>
+            <a:xfrm>
+              <a:off x="18120111" y="16442122"/>
+              <a:ext cx="3874327" cy="3664947"/>
+              <a:chOff x="22145625" y="17185271"/>
+              <a:chExt cx="3830535" cy="5485773"/>
+            </a:xfrm>
+          </p:grpSpPr>
+          <p:pic>
+            <p:nvPicPr>
+              <p:cNvPr id="139" name="Picture 138">
+                <a:extLst>
+                  <a:ext uri="{FF2B5EF4-FFF2-40B4-BE49-F238E27FC236}">
+                    <a16:creationId xmlns:a16="http://schemas.microsoft.com/office/drawing/2014/main" id="{A56DAF45-7265-3578-F18D-43185F762BDE}"/>
+                  </a:ext>
+                </a:extLst>
+              </p:cNvPr>
+              <p:cNvPicPr>
+                <a:picLocks noChangeAspect="1"/>
+              </p:cNvPicPr>
+              <p:nvPr/>
+            </p:nvPicPr>
+            <p:blipFill>
+              <a:blip r:embed="rId7"/>
+              <a:srcRect l="86803" t="70725" r="1325" b="27543"/>
+              <a:stretch>
+                <a:fillRect/>
+              </a:stretch>
+            </p:blipFill>
+            <p:spPr>
+              <a:xfrm rot="16200000">
+                <a:off x="20511085" y="19669265"/>
+                <a:ext cx="4848226" cy="520165"/>
+              </a:xfrm>
+              <a:prstGeom prst="rect">
+                <a:avLst/>
+              </a:prstGeom>
+            </p:spPr>
+          </p:pic>
+          <p:sp>
+            <p:nvSpPr>
+              <p:cNvPr id="140" name="TextBox 139">
+                <a:extLst>
+                  <a:ext uri="{FF2B5EF4-FFF2-40B4-BE49-F238E27FC236}">
+                    <a16:creationId xmlns:a16="http://schemas.microsoft.com/office/drawing/2014/main" id="{DD5FCBCC-31FC-40B1-2299-1441D36793A8}"/>
+                  </a:ext>
+                </a:extLst>
+              </p:cNvPr>
+              <p:cNvSpPr txBox="1"/>
+              <p:nvPr/>
+            </p:nvSpPr>
+            <p:spPr>
+              <a:xfrm rot="16200000">
+                <a:off x="19936762" y="19744488"/>
+                <a:ext cx="4817836" cy="400110"/>
+              </a:xfrm>
+              <a:prstGeom prst="rect">
+                <a:avLst/>
+              </a:prstGeom>
+              <a:noFill/>
+            </p:spPr>
+            <p:txBody>
+              <a:bodyPr wrap="square" rtlCol="0">
+                <a:spAutoFit/>
+              </a:bodyPr>
+              <a:lstStyle/>
+              <a:p>
+                <a:pPr algn="ctr"/>
+                <a:r>
+                  <a:rPr lang="en-US" sz="2000" dirty="0"/>
+                  <a:t>Variable importance</a:t>
+                </a:r>
+              </a:p>
+            </p:txBody>
+          </p:sp>
+          <p:sp>
+            <p:nvSpPr>
+              <p:cNvPr id="141" name="TextBox 140">
+                <a:extLst>
+                  <a:ext uri="{FF2B5EF4-FFF2-40B4-BE49-F238E27FC236}">
+                    <a16:creationId xmlns:a16="http://schemas.microsoft.com/office/drawing/2014/main" id="{2C9E65C7-DCA7-6082-1316-8715C26AF260}"/>
+                  </a:ext>
+                </a:extLst>
+              </p:cNvPr>
+              <p:cNvSpPr txBox="1"/>
+              <p:nvPr/>
+            </p:nvSpPr>
+            <p:spPr>
+              <a:xfrm>
+                <a:off x="23417771" y="21980014"/>
+                <a:ext cx="2558389" cy="691030"/>
+              </a:xfrm>
+              <a:prstGeom prst="rect">
+                <a:avLst/>
+              </a:prstGeom>
+              <a:noFill/>
+            </p:spPr>
+            <p:txBody>
+              <a:bodyPr wrap="square" rtlCol="0">
+                <a:spAutoFit/>
+              </a:bodyPr>
+              <a:lstStyle/>
+              <a:p>
+                <a:r>
+                  <a:rPr lang="en-US" sz="2400" dirty="0"/>
+                  <a:t>0.5</a:t>
+                </a:r>
+              </a:p>
+            </p:txBody>
+          </p:sp>
+          <p:sp>
+            <p:nvSpPr>
+              <p:cNvPr id="142" name="TextBox 141">
+                <a:extLst>
+                  <a:ext uri="{FF2B5EF4-FFF2-40B4-BE49-F238E27FC236}">
+                    <a16:creationId xmlns:a16="http://schemas.microsoft.com/office/drawing/2014/main" id="{49B2B976-1933-8800-8B79-CED795CEE529}"/>
+                  </a:ext>
+                </a:extLst>
+              </p:cNvPr>
+              <p:cNvSpPr txBox="1"/>
+              <p:nvPr/>
+            </p:nvSpPr>
+            <p:spPr>
+              <a:xfrm>
+                <a:off x="23417771" y="17185271"/>
+                <a:ext cx="2558389" cy="691030"/>
+              </a:xfrm>
+              <a:prstGeom prst="rect">
+                <a:avLst/>
+              </a:prstGeom>
+              <a:noFill/>
+            </p:spPr>
+            <p:txBody>
+              <a:bodyPr wrap="square" rtlCol="0">
+                <a:spAutoFit/>
+              </a:bodyPr>
+              <a:lstStyle/>
+              <a:p>
+                <a:r>
+                  <a:rPr lang="en-US" sz="2400" dirty="0"/>
+                  <a:t>1</a:t>
+                </a:r>
+              </a:p>
+            </p:txBody>
+          </p:sp>
+          <p:sp>
+            <p:nvSpPr>
+              <p:cNvPr id="143" name="TextBox 142">
+                <a:extLst>
+                  <a:ext uri="{FF2B5EF4-FFF2-40B4-BE49-F238E27FC236}">
+                    <a16:creationId xmlns:a16="http://schemas.microsoft.com/office/drawing/2014/main" id="{3044ECCD-6842-910B-4B6F-E46472B73C5F}"/>
+                  </a:ext>
+                </a:extLst>
+              </p:cNvPr>
+              <p:cNvSpPr txBox="1"/>
+              <p:nvPr/>
+            </p:nvSpPr>
+            <p:spPr>
+              <a:xfrm>
+                <a:off x="23417771" y="19584577"/>
+                <a:ext cx="2558389" cy="691030"/>
+              </a:xfrm>
+              <a:prstGeom prst="rect">
+                <a:avLst/>
+              </a:prstGeom>
+              <a:noFill/>
+            </p:spPr>
+            <p:txBody>
+              <a:bodyPr wrap="square" rtlCol="0">
+                <a:spAutoFit/>
+              </a:bodyPr>
+              <a:lstStyle/>
+              <a:p>
+                <a:r>
+                  <a:rPr lang="en-US" sz="2400" dirty="0"/>
+                  <a:t>0.75</a:t>
+                </a:r>
+              </a:p>
+            </p:txBody>
+          </p:sp>
+          <p:cxnSp>
+            <p:nvCxnSpPr>
+              <p:cNvPr id="144" name="Straight Connector 143">
+                <a:extLst>
+                  <a:ext uri="{FF2B5EF4-FFF2-40B4-BE49-F238E27FC236}">
+                    <a16:creationId xmlns:a16="http://schemas.microsoft.com/office/drawing/2014/main" id="{DEB058D9-3C8D-6528-72FE-B32F304565E2}"/>
+                  </a:ext>
+                </a:extLst>
+              </p:cNvPr>
+              <p:cNvCxnSpPr>
+                <a:cxnSpLocks/>
+              </p:cNvCxnSpPr>
+              <p:nvPr/>
+            </p:nvCxnSpPr>
+            <p:spPr>
+              <a:xfrm>
+                <a:off x="23307993" y="17503500"/>
+                <a:ext cx="0" cy="4846367"/>
+              </a:xfrm>
+              <a:prstGeom prst="line">
+                <a:avLst/>
+              </a:prstGeom>
+              <a:ln w="38100">
+                <a:solidFill>
+                  <a:schemeClr val="tx1"/>
+                </a:solidFill>
+              </a:ln>
+            </p:spPr>
+            <p:style>
+              <a:lnRef idx="1">
+                <a:schemeClr val="accent1"/>
+              </a:lnRef>
+              <a:fillRef idx="0">
+                <a:schemeClr val="accent1"/>
+              </a:fillRef>
+              <a:effectRef idx="0">
+                <a:schemeClr val="accent1"/>
+              </a:effectRef>
+              <a:fontRef idx="minor">
+                <a:schemeClr val="tx1"/>
+              </a:fontRef>
+            </p:style>
+          </p:cxnSp>
+          <p:cxnSp>
+            <p:nvCxnSpPr>
+              <p:cNvPr id="145" name="Straight Connector 144">
+                <a:extLst>
+                  <a:ext uri="{FF2B5EF4-FFF2-40B4-BE49-F238E27FC236}">
+                    <a16:creationId xmlns:a16="http://schemas.microsoft.com/office/drawing/2014/main" id="{0A5F47FC-428B-F306-77A3-FED44CD5E6FE}"/>
+                  </a:ext>
+                </a:extLst>
+              </p:cNvPr>
+              <p:cNvCxnSpPr>
+                <a:cxnSpLocks/>
+              </p:cNvCxnSpPr>
+              <p:nvPr/>
+            </p:nvCxnSpPr>
+            <p:spPr>
+              <a:xfrm flipH="1" flipV="1">
+                <a:off x="23324665" y="22320931"/>
+                <a:ext cx="121683" cy="1471"/>
+              </a:xfrm>
+              <a:prstGeom prst="line">
+                <a:avLst/>
+              </a:prstGeom>
+              <a:ln w="38100">
+                <a:solidFill>
+                  <a:schemeClr val="tx1"/>
+                </a:solidFill>
+              </a:ln>
+            </p:spPr>
+            <p:style>
+              <a:lnRef idx="1">
+                <a:schemeClr val="accent1"/>
+              </a:lnRef>
+              <a:fillRef idx="0">
+                <a:schemeClr val="accent1"/>
+              </a:fillRef>
+              <a:effectRef idx="0">
+                <a:schemeClr val="accent1"/>
+              </a:effectRef>
+              <a:fontRef idx="minor">
+                <a:schemeClr val="tx1"/>
+              </a:fontRef>
+            </p:style>
+          </p:cxnSp>
+          <p:cxnSp>
+            <p:nvCxnSpPr>
+              <p:cNvPr id="146" name="Straight Connector 145">
+                <a:extLst>
+                  <a:ext uri="{FF2B5EF4-FFF2-40B4-BE49-F238E27FC236}">
+                    <a16:creationId xmlns:a16="http://schemas.microsoft.com/office/drawing/2014/main" id="{4E5FCA45-73E6-C090-2556-C3CFC908CE40}"/>
+                  </a:ext>
+                </a:extLst>
+              </p:cNvPr>
+              <p:cNvCxnSpPr>
+                <a:cxnSpLocks/>
+              </p:cNvCxnSpPr>
+              <p:nvPr/>
+            </p:nvCxnSpPr>
+            <p:spPr>
+              <a:xfrm flipH="1">
+                <a:off x="23324665" y="17532287"/>
+                <a:ext cx="101441" cy="0"/>
+              </a:xfrm>
+              <a:prstGeom prst="line">
+                <a:avLst/>
+              </a:prstGeom>
+              <a:ln w="38100">
+                <a:solidFill>
+                  <a:schemeClr val="tx1"/>
+                </a:solidFill>
+              </a:ln>
+            </p:spPr>
+            <p:style>
+              <a:lnRef idx="1">
+                <a:schemeClr val="accent1"/>
+              </a:lnRef>
+              <a:fillRef idx="0">
+                <a:schemeClr val="accent1"/>
+              </a:fillRef>
+              <a:effectRef idx="0">
+                <a:schemeClr val="accent1"/>
+              </a:effectRef>
+              <a:fontRef idx="minor">
+                <a:schemeClr val="tx1"/>
+              </a:fontRef>
+            </p:style>
+          </p:cxnSp>
+          <p:cxnSp>
+            <p:nvCxnSpPr>
+              <p:cNvPr id="147" name="Straight Connector 146">
+                <a:extLst>
+                  <a:ext uri="{FF2B5EF4-FFF2-40B4-BE49-F238E27FC236}">
+                    <a16:creationId xmlns:a16="http://schemas.microsoft.com/office/drawing/2014/main" id="{0D52A1E5-DB15-DDB4-68E4-6BFD076B5145}"/>
+                  </a:ext>
+                </a:extLst>
+              </p:cNvPr>
+              <p:cNvCxnSpPr>
+                <a:cxnSpLocks/>
+              </p:cNvCxnSpPr>
+              <p:nvPr/>
+            </p:nvCxnSpPr>
+            <p:spPr>
+              <a:xfrm flipH="1">
+                <a:off x="23324663" y="19926681"/>
+                <a:ext cx="101441" cy="0"/>
+              </a:xfrm>
+              <a:prstGeom prst="line">
+                <a:avLst/>
+              </a:prstGeom>
+              <a:ln w="38100">
+                <a:solidFill>
+                  <a:schemeClr val="tx1"/>
+                </a:solidFill>
+              </a:ln>
+            </p:spPr>
+            <p:style>
+              <a:lnRef idx="1">
+                <a:schemeClr val="accent1"/>
+              </a:lnRef>
+              <a:fillRef idx="0">
+                <a:schemeClr val="accent1"/>
+              </a:fillRef>
+              <a:effectRef idx="0">
+                <a:schemeClr val="accent1"/>
+              </a:effectRef>
+              <a:fontRef idx="minor">
+                <a:schemeClr val="tx1"/>
+              </a:fontRef>
+            </p:style>
+          </p:cxnSp>
+        </p:grpSp>
+        <p:grpSp>
+          <p:nvGrpSpPr>
+            <p:cNvPr id="151" name="Group 150">
+              <a:extLst>
+                <a:ext uri="{FF2B5EF4-FFF2-40B4-BE49-F238E27FC236}">
+                  <a16:creationId xmlns:a16="http://schemas.microsoft.com/office/drawing/2014/main" id="{C7BB1B4A-64F2-2028-EFD0-21FF8CEA7346}"/>
+                </a:ext>
+              </a:extLst>
+            </p:cNvPr>
+            <p:cNvGrpSpPr/>
+            <p:nvPr/>
+          </p:nvGrpSpPr>
+          <p:grpSpPr>
+            <a:xfrm>
+              <a:off x="17732575" y="14436406"/>
+              <a:ext cx="3057795" cy="1876909"/>
+              <a:chOff x="21083291" y="13827276"/>
+              <a:chExt cx="2396007" cy="1470696"/>
+            </a:xfrm>
+          </p:grpSpPr>
+          <p:pic>
+            <p:nvPicPr>
+              <p:cNvPr id="149" name="Picture 148">
+                <a:extLst>
+                  <a:ext uri="{FF2B5EF4-FFF2-40B4-BE49-F238E27FC236}">
+                    <a16:creationId xmlns:a16="http://schemas.microsoft.com/office/drawing/2014/main" id="{E23572A4-07A5-5DE9-157A-E8DB826D190C}"/>
+                  </a:ext>
+                </a:extLst>
+              </p:cNvPr>
+              <p:cNvPicPr>
+                <a:picLocks noChangeAspect="1"/>
+              </p:cNvPicPr>
+              <p:nvPr/>
+            </p:nvPicPr>
+            <p:blipFill>
+              <a:blip r:embed="rId8"/>
+              <a:srcRect l="72582" t="21697" r="10049" b="63999"/>
+              <a:stretch>
+                <a:fillRect/>
+              </a:stretch>
+            </p:blipFill>
+            <p:spPr>
+              <a:xfrm>
+                <a:off x="21083291" y="14447849"/>
+                <a:ext cx="1811622" cy="850123"/>
+              </a:xfrm>
+              <a:prstGeom prst="rect">
+                <a:avLst/>
+              </a:prstGeom>
+            </p:spPr>
+          </p:pic>
+          <p:sp>
+            <p:nvSpPr>
+              <p:cNvPr id="150" name="TextBox 149">
+                <a:extLst>
+                  <a:ext uri="{FF2B5EF4-FFF2-40B4-BE49-F238E27FC236}">
+                    <a16:creationId xmlns:a16="http://schemas.microsoft.com/office/drawing/2014/main" id="{B70387CD-52FF-7C12-5E65-D1FFD32ECA44}"/>
+                  </a:ext>
+                </a:extLst>
+              </p:cNvPr>
+              <p:cNvSpPr txBox="1"/>
+              <p:nvPr/>
+            </p:nvSpPr>
+            <p:spPr>
+              <a:xfrm>
+                <a:off x="21439680" y="13827276"/>
+                <a:ext cx="2039618" cy="554681"/>
+              </a:xfrm>
+              <a:prstGeom prst="rect">
+                <a:avLst/>
+              </a:prstGeom>
+              <a:noFill/>
+            </p:spPr>
+            <p:txBody>
+              <a:bodyPr wrap="square" rtlCol="0">
+                <a:spAutoFit/>
+              </a:bodyPr>
+              <a:lstStyle/>
+              <a:p>
+                <a:r>
+                  <a:rPr lang="en-US" sz="2000" dirty="0"/>
+                  <a:t>Response</a:t>
+                </a:r>
+              </a:p>
+              <a:p>
+                <a:r>
+                  <a:rPr lang="en-US" sz="2000" dirty="0"/>
+                  <a:t>metric</a:t>
+                </a:r>
+              </a:p>
+            </p:txBody>
+          </p:sp>
+        </p:grpSp>
       </p:grpSp>
     </p:spTree>
     <p:extLst>
